--- a/NARAE_Pitch_Deck.pptx
+++ b/NARAE_Pitch_Deck.pptx
@@ -3111,7 +3111,7 @@
             <a:avLst/>
           </a:prstGeom>
           <a:solidFill>
-            <a:srgbClr val="FAFCFB"/>
+            <a:srgbClr val="F8FAF9"/>
           </a:solidFill>
           <a:ln>
             <a:noFill/>
@@ -3154,12 +3154,10 @@
             <a:avLst/>
           </a:prstGeom>
           <a:solidFill>
-            <a:srgbClr val="E2F1EA"/>
+            <a:srgbClr val="E0EFE8"/>
           </a:solidFill>
-          <a:ln w="9525">
-            <a:solidFill>
-              <a:srgbClr val="DAE6E0"/>
-            </a:solidFill>
+          <a:ln>
+            <a:noFill/>
           </a:ln>
         </p:spPr>
         <p:style>
@@ -3177,18 +3175,24 @@
           </a:fontRef>
         </p:style>
         <p:txBody>
-          <a:bodyPr rtlCol="0" anchor="ctr"/>
+          <a:bodyPr rtlCol="0" anchor="ctr" wrap="square" lIns="73152" rIns="73152" tIns="18288" bIns="18288"/>
           <a:lstStyle/>
           <a:p>
             <a:pPr algn="ctr">
               <a:defRPr sz="900" b="1">
                 <a:solidFill>
-                  <a:srgbClr val="184438"/>
-                </a:solidFill>
-                <a:latin typeface="Public Sans"/>
-              </a:defRPr>
-            </a:pPr>
-            <a:r>
+                  <a:srgbClr val="164338"/>
+                </a:solidFill>
+                <a:latin typeface="Public Sans"/>
+              </a:defRPr>
+            </a:pPr>
+            <a:r>
+              <a:rPr b="1">
+                <a:solidFill>
+                  <a:srgbClr val="164338"/>
+                </a:solidFill>
+                <a:latin typeface="Public Sans"/>
+              </a:rPr>
               <a:t>HACKATHON 2026</a:t>
             </a:r>
           </a:p>
@@ -3203,7 +3207,7 @@
         <p:spPr>
           <a:xfrm>
             <a:off x="731520" y="1188720"/>
-            <a:ext cx="6858000" cy="3840480"/>
+            <a:ext cx="6858000" cy="3749039"/>
           </a:xfrm>
           <a:prstGeom prst="rect">
             <a:avLst/>
@@ -3211,68 +3215,95 @@
           <a:noFill/>
         </p:spPr>
         <p:txBody>
-          <a:bodyPr wrap="square">
+          <a:bodyPr wrap="square" lIns="0" tIns="0">
             <a:spAutoFit/>
           </a:bodyPr>
           <a:lstStyle/>
           <a:p>
-            <a:pPr>
+            <a:pPr algn="l">
+              <a:spcBef>
+                <a:spcPts val="0"/>
+              </a:spcBef>
               <a:defRPr sz="2800" b="1">
                 <a:solidFill>
-                  <a:srgbClr val="2A7662"/>
-                </a:solidFill>
-                <a:latin typeface="Public Sans"/>
-              </a:defRPr>
-            </a:pPr>
-            <a:r>
+                  <a:srgbClr val="2B7865"/>
+                </a:solidFill>
+                <a:latin typeface="Public Sans"/>
+              </a:defRPr>
+            </a:pPr>
+            <a:r>
+              <a:rPr sz="2800" b="1">
+                <a:solidFill>
+                  <a:srgbClr val="2B7865"/>
+                </a:solidFill>
+                <a:latin typeface="Public Sans"/>
+              </a:rPr>
               <a:t>나래</a:t>
             </a:r>
           </a:p>
           <a:p>
-            <a:pPr>
+            <a:pPr algn="l">
               <a:spcBef>
                 <a:spcPts val="400"/>
               </a:spcBef>
               <a:defRPr sz="5600" b="1">
                 <a:solidFill>
-                  <a:srgbClr val="14342C"/>
-                </a:solidFill>
-                <a:latin typeface="Public Sans"/>
-              </a:defRPr>
-            </a:pPr>
-            <a:r>
+                  <a:srgbClr val="15362F"/>
+                </a:solidFill>
+                <a:latin typeface="Public Sans"/>
+              </a:defRPr>
+            </a:pPr>
+            <a:r>
+              <a:rPr sz="5600" b="1">
+                <a:solidFill>
+                  <a:srgbClr val="15362F"/>
+                </a:solidFill>
+                <a:latin typeface="Public Sans"/>
+              </a:rPr>
               <a:t>Narae. ↗</a:t>
             </a:r>
           </a:p>
           <a:p>
-            <a:pPr>
-              <a:spcBef>
-                <a:spcPts val="1400"/>
+            <a:pPr algn="l">
+              <a:spcBef>
+                <a:spcPts val="1200"/>
               </a:spcBef>
               <a:defRPr sz="2200" b="1">
                 <a:solidFill>
-                  <a:srgbClr val="204A40"/>
-                </a:solidFill>
-                <a:latin typeface="Public Sans"/>
-              </a:defRPr>
-            </a:pPr>
-            <a:r>
+                  <a:srgbClr val="234E44"/>
+                </a:solidFill>
+                <a:latin typeface="Public Sans"/>
+              </a:defRPr>
+            </a:pPr>
+            <a:r>
+              <a:rPr sz="2200" b="1">
+                <a:solidFill>
+                  <a:srgbClr val="234E44"/>
+                </a:solidFill>
+                <a:latin typeface="Public Sans"/>
+              </a:rPr>
               <a:t>A Little Help, A Life More Independent.</a:t>
             </a:r>
           </a:p>
           <a:p>
-            <a:pPr>
+            <a:pPr algn="l">
               <a:spcBef>
                 <a:spcPts val="800"/>
               </a:spcBef>
-              <a:defRPr sz="1200">
-                <a:solidFill>
-                  <a:srgbClr val="60746D"/>
-                </a:solidFill>
-                <a:latin typeface="Public Sans"/>
-              </a:defRPr>
-            </a:pPr>
-            <a:r>
+              <a:defRPr sz="1200" b="0">
+                <a:solidFill>
+                  <a:srgbClr val="587068"/>
+                </a:solidFill>
+                <a:latin typeface="Public Sans"/>
+              </a:defRPr>
+            </a:pPr>
+            <a:r>
+              <a:rPr sz="1200" b="0">
+                <a:solidFill>
+                  <a:srgbClr val="587068"/>
+                </a:solidFill>
+                <a:latin typeface="Public Sans"/>
+              </a:rPr>
               <a:t>Smart Caregiver &amp; Wearable Companion berbasis AI (Google Gemini Function Calling) untuk penderita demensia tahap awal dan perawat yang mendampinginya.</a:t>
             </a:r>
           </a:p>
@@ -3293,12 +3324,10 @@
             <a:avLst/>
           </a:prstGeom>
           <a:solidFill>
-            <a:srgbClr val="F2F7F4"/>
+            <a:srgbClr val="F1F6F3"/>
           </a:solidFill>
-          <a:ln w="9525">
-            <a:solidFill>
-              <a:srgbClr val="DAE6E0"/>
-            </a:solidFill>
+          <a:ln>
+            <a:noFill/>
           </a:ln>
         </p:spPr>
         <p:style>
@@ -3316,19 +3345,25 @@
           </a:fontRef>
         </p:style>
         <p:txBody>
-          <a:bodyPr rtlCol="0" anchor="ctr"/>
+          <a:bodyPr rtlCol="0" anchor="ctr" wrap="square" lIns="73152" rIns="73152" tIns="18288" bIns="18288"/>
           <a:lstStyle/>
           <a:p>
             <a:pPr algn="ctr">
               <a:defRPr sz="850" b="1">
                 <a:solidFill>
-                  <a:srgbClr val="204A40"/>
-                </a:solidFill>
-                <a:latin typeface="Public Sans"/>
-              </a:defRPr>
-            </a:pPr>
-            <a:r>
-              <a:t>3D Smartband Simulator</a:t>
+                  <a:srgbClr val="234E44"/>
+                </a:solidFill>
+                <a:latin typeface="Public Sans"/>
+              </a:defRPr>
+            </a:pPr>
+            <a:r>
+              <a:rPr b="1">
+                <a:solidFill>
+                  <a:srgbClr val="234E44"/>
+                </a:solidFill>
+                <a:latin typeface="Public Sans"/>
+              </a:rPr>
+              <a:t>3D SMARTBAND SIMULATOR</a:t>
             </a:r>
           </a:p>
         </p:txBody>
@@ -3348,12 +3383,10 @@
             <a:avLst/>
           </a:prstGeom>
           <a:solidFill>
-            <a:srgbClr val="F2F7F4"/>
+            <a:srgbClr val="F1F6F3"/>
           </a:solidFill>
-          <a:ln w="9525">
-            <a:solidFill>
-              <a:srgbClr val="DAE6E0"/>
-            </a:solidFill>
+          <a:ln>
+            <a:noFill/>
           </a:ln>
         </p:spPr>
         <p:style>
@@ -3371,19 +3404,25 @@
           </a:fontRef>
         </p:style>
         <p:txBody>
-          <a:bodyPr rtlCol="0" anchor="ctr"/>
+          <a:bodyPr rtlCol="0" anchor="ctr" wrap="square" lIns="73152" rIns="73152" tIns="18288" bIns="18288"/>
           <a:lstStyle/>
           <a:p>
             <a:pPr algn="ctr">
               <a:defRPr sz="850" b="1">
                 <a:solidFill>
-                  <a:srgbClr val="204A40"/>
-                </a:solidFill>
-                <a:latin typeface="Public Sans"/>
-              </a:defRPr>
-            </a:pPr>
-            <a:r>
-              <a:t>Gemini Function Calling</a:t>
+                  <a:srgbClr val="234E44"/>
+                </a:solidFill>
+                <a:latin typeface="Public Sans"/>
+              </a:defRPr>
+            </a:pPr>
+            <a:r>
+              <a:rPr b="1">
+                <a:solidFill>
+                  <a:srgbClr val="234E44"/>
+                </a:solidFill>
+                <a:latin typeface="Public Sans"/>
+              </a:rPr>
+              <a:t>GEMINI FUNCTION CALLING</a:t>
             </a:r>
           </a:p>
         </p:txBody>
@@ -3403,12 +3442,10 @@
             <a:avLst/>
           </a:prstGeom>
           <a:solidFill>
-            <a:srgbClr val="F2F7F4"/>
+            <a:srgbClr val="F1F6F3"/>
           </a:solidFill>
-          <a:ln w="9525">
-            <a:solidFill>
-              <a:srgbClr val="DAE6E0"/>
-            </a:solidFill>
+          <a:ln>
+            <a:noFill/>
           </a:ln>
         </p:spPr>
         <p:style>
@@ -3426,19 +3463,25 @@
           </a:fontRef>
         </p:style>
         <p:txBody>
-          <a:bodyPr rtlCol="0" anchor="ctr"/>
+          <a:bodyPr rtlCol="0" anchor="ctr" wrap="square" lIns="73152" rIns="73152" tIns="18288" bIns="18288"/>
           <a:lstStyle/>
           <a:p>
             <a:pPr algn="ctr">
               <a:defRPr sz="850" b="1">
                 <a:solidFill>
-                  <a:srgbClr val="204A40"/>
-                </a:solidFill>
-                <a:latin typeface="Public Sans"/>
-              </a:defRPr>
-            </a:pPr>
-            <a:r>
-              <a:t>Centralized Command Hub</a:t>
+                  <a:srgbClr val="234E44"/>
+                </a:solidFill>
+                <a:latin typeface="Public Sans"/>
+              </a:defRPr>
+            </a:pPr>
+            <a:r>
+              <a:rPr b="1">
+                <a:solidFill>
+                  <a:srgbClr val="234E44"/>
+                </a:solidFill>
+                <a:latin typeface="Public Sans"/>
+              </a:rPr>
+              <a:t>CAREGIVER COMMAND HUB</a:t>
             </a:r>
           </a:p>
         </p:txBody>
@@ -3458,12 +3501,10 @@
             <a:avLst/>
           </a:prstGeom>
           <a:solidFill>
-            <a:srgbClr val="F2F7F4"/>
+            <a:srgbClr val="F1F6F3"/>
           </a:solidFill>
-          <a:ln w="9525">
-            <a:solidFill>
-              <a:srgbClr val="DAE6E0"/>
-            </a:solidFill>
+          <a:ln>
+            <a:noFill/>
           </a:ln>
         </p:spPr>
         <p:style>
@@ -3481,19 +3522,25 @@
           </a:fontRef>
         </p:style>
         <p:txBody>
-          <a:bodyPr rtlCol="0" anchor="ctr"/>
+          <a:bodyPr rtlCol="0" anchor="ctr" wrap="square" lIns="73152" rIns="73152" tIns="18288" bIns="18288"/>
           <a:lstStyle/>
           <a:p>
             <a:pPr algn="ctr">
               <a:defRPr sz="850" b="1">
                 <a:solidFill>
-                  <a:srgbClr val="204A40"/>
-                </a:solidFill>
-                <a:latin typeface="Public Sans"/>
-              </a:defRPr>
-            </a:pPr>
-            <a:r>
-              <a:t>Multi-Tenant</a:t>
+                  <a:srgbClr val="234E44"/>
+                </a:solidFill>
+                <a:latin typeface="Public Sans"/>
+              </a:defRPr>
+            </a:pPr>
+            <a:r>
+              <a:rPr b="1">
+                <a:solidFill>
+                  <a:srgbClr val="234E44"/>
+                </a:solidFill>
+                <a:latin typeface="Public Sans"/>
+              </a:rPr>
+              <a:t>MULTI-TENANT</a:t>
             </a:r>
           </a:p>
         </p:txBody>
@@ -3513,11 +3560,11 @@
             <a:avLst/>
           </a:prstGeom>
           <a:solidFill>
-            <a:srgbClr val="F2F7F4"/>
+            <a:srgbClr val="F1F6F3"/>
           </a:solidFill>
           <a:ln w="12700">
             <a:solidFill>
-              <a:srgbClr val="DAE6E0"/>
+              <a:srgbClr val="D8E4DE"/>
             </a:solidFill>
           </a:ln>
         </p:spPr>
@@ -3536,130 +3583,181 @@
           </a:fontRef>
         </p:style>
         <p:txBody>
-          <a:bodyPr rtlCol="0" anchor="ctr" wrap="square" lIns="228600" rIns="228600" tIns="228600"/>
-          <a:lstStyle/>
-          <a:p>
-            <a:pPr algn="ctr">
+          <a:bodyPr rtlCol="0" anchor="ctr" wrap="square" lIns="228600" rIns="228600" tIns="201168"/>
+          <a:lstStyle/>
+          <a:p>
+            <a:pPr algn="l">
+              <a:spcBef>
+                <a:spcPts val="0"/>
+              </a:spcBef>
               <a:defRPr sz="900" b="1">
                 <a:solidFill>
-                  <a:srgbClr val="2A7662"/>
-                </a:solidFill>
-                <a:latin typeface="Public Sans"/>
-              </a:defRPr>
-            </a:pPr>
-            <a:r>
+                  <a:srgbClr val="2B7865"/>
+                </a:solidFill>
+                <a:latin typeface="Public Sans"/>
+              </a:defRPr>
+            </a:pPr>
+            <a:r>
+              <a:rPr sz="900" b="1">
+                <a:solidFill>
+                  <a:srgbClr val="2B7865"/>
+                </a:solidFill>
+                <a:latin typeface="Public Sans"/>
+              </a:rPr>
               <a:t>KONSEPSI SISTEM NARAE</a:t>
             </a:r>
           </a:p>
           <a:p>
-            <a:pPr>
-              <a:spcBef>
-                <a:spcPts val="400"/>
-              </a:spcBef>
-              <a:defRPr sz="1600" b="1">
-                <a:solidFill>
-                  <a:srgbClr val="14342C"/>
-                </a:solidFill>
-                <a:latin typeface="Public Sans"/>
-              </a:defRPr>
-            </a:pPr>
-            <a:r>
+            <a:pPr algn="l">
+              <a:spcBef>
+                <a:spcPts val="300"/>
+              </a:spcBef>
+              <a:defRPr sz="1500" b="1">
+                <a:solidFill>
+                  <a:srgbClr val="15362F"/>
+                </a:solidFill>
+                <a:latin typeface="Public Sans"/>
+              </a:defRPr>
+            </a:pPr>
+            <a:r>
+              <a:rPr sz="1500" b="1">
+                <a:solidFill>
+                  <a:srgbClr val="15362F"/>
+                </a:solidFill>
+                <a:latin typeface="Public Sans"/>
+              </a:rPr>
               <a:t>Solusi Dua Sisi Real-Time</a:t>
             </a:r>
           </a:p>
           <a:p>
-            <a:pPr>
+            <a:pPr algn="l">
               <a:spcBef>
                 <a:spcPts val="800"/>
               </a:spcBef>
               <a:defRPr sz="1100" b="1">
                 <a:solidFill>
-                  <a:srgbClr val="204A40"/>
-                </a:solidFill>
-                <a:latin typeface="Public Sans"/>
-              </a:defRPr>
-            </a:pPr>
-            <a:r>
+                  <a:srgbClr val="234E44"/>
+                </a:solidFill>
+                <a:latin typeface="Public Sans"/>
+              </a:defRPr>
+            </a:pPr>
+            <a:r>
+              <a:rPr sz="1100" b="1">
+                <a:solidFill>
+                  <a:srgbClr val="234E44"/>
+                </a:solidFill>
+                <a:latin typeface="Public Sans"/>
+              </a:rPr>
               <a:t>• Gelang Taktil Mandiri</a:t>
             </a:r>
           </a:p>
           <a:p>
-            <a:pPr>
+            <a:pPr algn="l">
               <a:spcBef>
                 <a:spcPts val="200"/>
               </a:spcBef>
-              <a:defRPr sz="950">
-                <a:solidFill>
-                  <a:srgbClr val="60746D"/>
-                </a:solidFill>
-                <a:latin typeface="Public Sans"/>
-              </a:defRPr>
-            </a:pPr>
-            <a:r>
+              <a:defRPr sz="930" b="0">
+                <a:solidFill>
+                  <a:srgbClr val="587068"/>
+                </a:solidFill>
+                <a:latin typeface="Public Sans"/>
+              </a:defRPr>
+            </a:pPr>
+            <a:r>
+              <a:rPr sz="930" b="0">
+                <a:solidFill>
+                  <a:srgbClr val="587068"/>
+                </a:solidFill>
+                <a:latin typeface="Public Sans"/>
+              </a:rPr>
               <a:t>  2 tombol fisik khusus (Jadwal &amp; Bantuan), audio pengingat lokal offline-first, tanpa layar rumit.</a:t>
             </a:r>
           </a:p>
           <a:p>
-            <a:pPr>
+            <a:pPr algn="l">
               <a:spcBef>
                 <a:spcPts val="800"/>
               </a:spcBef>
               <a:defRPr sz="1100" b="1">
                 <a:solidFill>
-                  <a:srgbClr val="204A40"/>
-                </a:solidFill>
-                <a:latin typeface="Public Sans"/>
-              </a:defRPr>
-            </a:pPr>
-            <a:r>
+                  <a:srgbClr val="234E44"/>
+                </a:solidFill>
+                <a:latin typeface="Public Sans"/>
+              </a:defRPr>
+            </a:pPr>
+            <a:r>
+              <a:rPr sz="1100" b="1">
+                <a:solidFill>
+                  <a:srgbClr val="234E44"/>
+                </a:solidFill>
+                <a:latin typeface="Public Sans"/>
+              </a:rPr>
               <a:t>• AI Contextual Companion</a:t>
             </a:r>
           </a:p>
           <a:p>
-            <a:pPr>
+            <a:pPr algn="l">
               <a:spcBef>
                 <a:spcPts val="200"/>
               </a:spcBef>
-              <a:defRPr sz="950">
-                <a:solidFill>
-                  <a:srgbClr val="60746D"/>
-                </a:solidFill>
-                <a:latin typeface="Public Sans"/>
-              </a:defRPr>
-            </a:pPr>
-            <a:r>
+              <a:defRPr sz="930" b="0">
+                <a:solidFill>
+                  <a:srgbClr val="587068"/>
+                </a:solidFill>
+                <a:latin typeface="Public Sans"/>
+              </a:defRPr>
+            </a:pPr>
+            <a:r>
+              <a:rPr sz="930" b="0">
+                <a:solidFill>
+                  <a:srgbClr val="587068"/>
+                </a:solidFill>
+                <a:latin typeface="Public Sans"/>
+              </a:rPr>
               <a:t>  Gemini 2.0 Flash dengan Function Calling, closed-world, tanpa diagnosis medis, respon ringkas 1-2 kalimat.</a:t>
             </a:r>
           </a:p>
           <a:p>
-            <a:pPr>
+            <a:pPr algn="l">
               <a:spcBef>
                 <a:spcPts val="800"/>
               </a:spcBef>
               <a:defRPr sz="1100" b="1">
                 <a:solidFill>
-                  <a:srgbClr val="204A40"/>
-                </a:solidFill>
-                <a:latin typeface="Public Sans"/>
-              </a:defRPr>
-            </a:pPr>
-            <a:r>
+                  <a:srgbClr val="234E44"/>
+                </a:solidFill>
+                <a:latin typeface="Public Sans"/>
+              </a:defRPr>
+            </a:pPr>
+            <a:r>
+              <a:rPr sz="1100" b="1">
+                <a:solidFill>
+                  <a:srgbClr val="234E44"/>
+                </a:solidFill>
+                <a:latin typeface="Public Sans"/>
+              </a:rPr>
               <a:t>• Caregiver Command Center</a:t>
             </a:r>
           </a:p>
           <a:p>
-            <a:pPr>
+            <a:pPr algn="l">
               <a:spcBef>
                 <a:spcPts val="200"/>
               </a:spcBef>
-              <a:defRPr sz="950">
-                <a:solidFill>
-                  <a:srgbClr val="60746D"/>
-                </a:solidFill>
-                <a:latin typeface="Public Sans"/>
-              </a:defRPr>
-            </a:pPr>
-            <a:r>
+              <a:defRPr sz="930" b="0">
+                <a:solidFill>
+                  <a:srgbClr val="587068"/>
+                </a:solidFill>
+                <a:latin typeface="Public Sans"/>
+              </a:defRPr>
+            </a:pPr>
+            <a:r>
+              <a:rPr sz="930" b="0">
+                <a:solidFill>
+                  <a:srgbClr val="587068"/>
+                </a:solidFill>
+                <a:latin typeface="Public Sans"/>
+              </a:rPr>
               <a:t>  Monitoring multi-pasien, deteksi bentrok jadwal, konfirmasi laporan 1-klik, auto-eskalasi 10 detik.</a:t>
             </a:r>
           </a:p>
@@ -3680,7 +3778,7 @@
             <a:avLst/>
           </a:prstGeom>
           <a:solidFill>
-            <a:srgbClr val="14342C"/>
+            <a:srgbClr val="15362F"/>
           </a:solidFill>
           <a:ln>
             <a:noFill/>
@@ -3704,7 +3802,10 @@
           <a:bodyPr rtlCol="0" anchor="ctr" wrap="square" lIns="320040" tIns="164592"/>
           <a:lstStyle/>
           <a:p>
-            <a:pPr algn="ctr">
+            <a:pPr algn="l">
+              <a:spcBef>
+                <a:spcPts val="0"/>
+              </a:spcBef>
               <a:defRPr sz="850" b="1">
                 <a:solidFill>
                   <a:srgbClr val="A0CDC3"/>
@@ -3713,11 +3814,20 @@
               </a:defRPr>
             </a:pPr>
             <a:r>
+              <a:rPr sz="850" b="1">
+                <a:solidFill>
+                  <a:srgbClr val="A0CDC3"/>
+                </a:solidFill>
+                <a:latin typeface="Public Sans"/>
+              </a:rPr>
               <a:t>PREPARED BY :</a:t>
             </a:r>
           </a:p>
           <a:p>
-            <a:pPr>
+            <a:pPr algn="l">
+              <a:spcBef>
+                <a:spcPts val="200"/>
+              </a:spcBef>
               <a:defRPr sz="1600" b="1">
                 <a:solidFill>
                   <a:srgbClr val="FFFFFF"/>
@@ -3726,15 +3836,21 @@
               </a:defRPr>
             </a:pPr>
             <a:r>
+              <a:rPr sz="1600" b="1">
+                <a:solidFill>
+                  <a:srgbClr val="FFFFFF"/>
+                </a:solidFill>
+                <a:latin typeface="Public Sans"/>
+              </a:rPr>
               <a:t>Tim Mi Ayam Kopma</a:t>
             </a:r>
           </a:p>
           <a:p>
-            <a:pPr>
-              <a:spcBef>
-                <a:spcPts val="200"/>
-              </a:spcBef>
-              <a:defRPr sz="1000">
+            <a:pPr algn="l">
+              <a:spcBef>
+                <a:spcPts val="300"/>
+              </a:spcBef>
+              <a:defRPr sz="1000" b="0">
                 <a:solidFill>
                   <a:srgbClr val="D7EBE6"/>
                 </a:solidFill>
@@ -3742,6 +3858,12 @@
               </a:defRPr>
             </a:pPr>
             <a:r>
+              <a:rPr sz="1000" b="0">
+                <a:solidFill>
+                  <a:srgbClr val="D7EBE6"/>
+                </a:solidFill>
+                <a:latin typeface="Public Sans"/>
+              </a:rPr>
               <a:t>Radhitya Rasta Pramoja (UI/UX)  ·  Nicolaus Narindra (Front-End &amp; 3D)  ·  Michael Bintang Febryan S.J (Back-End &amp; AI)</a:t>
             </a:r>
           </a:p>
@@ -3769,7 +3891,10 @@
           </a:bodyPr>
           <a:lstStyle/>
           <a:p>
-            <a:pPr>
+            <a:pPr algn="l">
+              <a:spcBef>
+                <a:spcPts val="0"/>
+              </a:spcBef>
               <a:defRPr sz="850" b="1">
                 <a:solidFill>
                   <a:srgbClr val="A0CDC3"/>
@@ -3778,11 +3903,20 @@
               </a:defRPr>
             </a:pPr>
             <a:r>
+              <a:rPr sz="850" b="1">
+                <a:solidFill>
+                  <a:srgbClr val="A0CDC3"/>
+                </a:solidFill>
+                <a:latin typeface="Public Sans"/>
+              </a:rPr>
               <a:t>PREPARED FOR :</a:t>
             </a:r>
           </a:p>
           <a:p>
-            <a:pPr>
+            <a:pPr algn="l">
+              <a:spcBef>
+                <a:spcPts val="200"/>
+              </a:spcBef>
               <a:defRPr sz="1600" b="1">
                 <a:solidFill>
                   <a:srgbClr val="FFFFFF"/>
@@ -3791,15 +3925,21 @@
               </a:defRPr>
             </a:pPr>
             <a:r>
+              <a:rPr sz="1600" b="1">
+                <a:solidFill>
+                  <a:srgbClr val="FFFFFF"/>
+                </a:solidFill>
+                <a:latin typeface="Public Sans"/>
+              </a:rPr>
               <a:t>INCEPTION 2026</a:t>
             </a:r>
           </a:p>
           <a:p>
-            <a:pPr>
-              <a:spcBef>
-                <a:spcPts val="200"/>
-              </a:spcBef>
-              <a:defRPr sz="1000">
+            <a:pPr algn="l">
+              <a:spcBef>
+                <a:spcPts val="300"/>
+              </a:spcBef>
+              <a:defRPr sz="1000" b="0">
                 <a:solidFill>
                   <a:srgbClr val="D7EBE6"/>
                 </a:solidFill>
@@ -3807,6 +3947,12 @@
               </a:defRPr>
             </a:pPr>
             <a:r>
+              <a:rPr sz="1000" b="0">
+                <a:solidFill>
+                  <a:srgbClr val="D7EBE6"/>
+                </a:solidFill>
+                <a:latin typeface="Public Sans"/>
+              </a:rPr>
               <a:t>Hacking Day 24 Jam · Kategori AI &amp; IoT Prototype</a:t>
             </a:r>
           </a:p>
@@ -3845,7 +3991,7 @@
             <a:avLst/>
           </a:prstGeom>
           <a:solidFill>
-            <a:srgbClr val="FAFCFB"/>
+            <a:srgbClr val="F8FAF9"/>
           </a:solidFill>
           <a:ln>
             <a:noFill/>
@@ -3882,17 +4028,17 @@
         <p:spPr>
           <a:xfrm>
             <a:off x="731520" y="384048"/>
-            <a:ext cx="2926080" cy="292608"/>
+            <a:ext cx="3108960" cy="292608"/>
           </a:xfrm>
           <a:prstGeom prst="roundRect">
             <a:avLst/>
           </a:prstGeom>
           <a:solidFill>
-            <a:srgbClr val="E2F1EA"/>
+            <a:srgbClr val="E0EFE8"/>
           </a:solidFill>
           <a:ln w="9525">
             <a:solidFill>
-              <a:srgbClr val="DAE6E0"/>
+              <a:srgbClr val="D8E4DE"/>
             </a:solidFill>
           </a:ln>
         </p:spPr>
@@ -3917,12 +4063,18 @@
             <a:pPr algn="ctr">
               <a:defRPr sz="850" b="1">
                 <a:solidFill>
-                  <a:srgbClr val="184438"/>
-                </a:solidFill>
-                <a:latin typeface="Public Sans"/>
-              </a:defRPr>
-            </a:pPr>
-            <a:r>
+                  <a:srgbClr val="164338"/>
+                </a:solidFill>
+                <a:latin typeface="Public Sans"/>
+              </a:defRPr>
+            </a:pPr>
+            <a:r>
+              <a:rPr b="1">
+                <a:solidFill>
+                  <a:srgbClr val="164338"/>
+                </a:solidFill>
+                <a:latin typeface="Public Sans"/>
+              </a:rPr>
               <a:t>01 / LATAR BELAKANG &amp; MASALAH</a:t>
             </a:r>
           </a:p>
@@ -3936,8 +4088,8 @@
         </p:nvSpPr>
         <p:spPr>
           <a:xfrm>
-            <a:off x="8686800" y="347472"/>
-            <a:ext cx="2773375" cy="320040"/>
+            <a:off x="8412480" y="347472"/>
+            <a:ext cx="3047695" cy="320040"/>
           </a:xfrm>
           <a:prstGeom prst="rect">
             <a:avLst/>
@@ -3953,12 +4105,18 @@
             <a:pPr algn="r">
               <a:defRPr sz="950" b="1">
                 <a:solidFill>
-                  <a:srgbClr val="60746D"/>
-                </a:solidFill>
-                <a:latin typeface="Public Sans"/>
-              </a:defRPr>
-            </a:pPr>
-            <a:r>
+                  <a:srgbClr val="587068"/>
+                </a:solidFill>
+                <a:latin typeface="Public Sans"/>
+              </a:defRPr>
+            </a:pPr>
+            <a:r>
+              <a:rPr b="1">
+                <a:solidFill>
+                  <a:srgbClr val="587068"/>
+                </a:solidFill>
+                <a:latin typeface="Public Sans"/>
+              </a:rPr>
               <a:t>NARAE · INCEPTION 2026</a:t>
             </a:r>
           </a:p>
@@ -3989,12 +4147,18 @@
             <a:pPr>
               <a:defRPr sz="2300" b="1">
                 <a:solidFill>
-                  <a:srgbClr val="14342C"/>
-                </a:solidFill>
-                <a:latin typeface="Public Sans"/>
-              </a:defRPr>
-            </a:pPr>
-            <a:r>
+                  <a:srgbClr val="15362F"/>
+                </a:solidFill>
+                <a:latin typeface="Public Sans"/>
+              </a:defRPr>
+            </a:pPr>
+            <a:r>
+              <a:rPr b="1">
+                <a:solidFill>
+                  <a:srgbClr val="15362F"/>
+                </a:solidFill>
+                <a:latin typeface="Public Sans"/>
+              </a:rPr>
               <a:t>The Problem</a:t>
             </a:r>
           </a:p>
@@ -4005,12 +4169,18 @@
               </a:spcBef>
               <a:defRPr sz="1100">
                 <a:solidFill>
-                  <a:srgbClr val="60746D"/>
-                </a:solidFill>
-                <a:latin typeface="Public Sans"/>
-              </a:defRPr>
-            </a:pPr>
-            <a:r>
+                  <a:srgbClr val="587068"/>
+                </a:solidFill>
+                <a:latin typeface="Public Sans"/>
+              </a:defRPr>
+            </a:pPr>
+            <a:r>
+              <a:rPr>
+                <a:solidFill>
+                  <a:srgbClr val="587068"/>
+                </a:solidFill>
+                <a:latin typeface="Public Sans"/>
+              </a:rPr>
               <a:t>Krisis pendampingan demensia tahap awal: beban kognitif pasien dan keterbatasan rasio caregiver.</a:t>
             </a:r>
           </a:p>
@@ -4031,11 +4201,11 @@
             <a:avLst/>
           </a:prstGeom>
           <a:solidFill>
-            <a:srgbClr val="F2F7F4"/>
+            <a:srgbClr val="F1F6F3"/>
           </a:solidFill>
           <a:ln w="12700">
             <a:solidFill>
-              <a:srgbClr val="DAE6E0"/>
+              <a:srgbClr val="D8E4DE"/>
             </a:solidFill>
           </a:ln>
         </p:spPr>
@@ -4061,7 +4231,7 @@
             <a:r>
               <a:rPr sz="2400" b="1">
                 <a:solidFill>
-                  <a:srgbClr val="14342C"/>
+                  <a:srgbClr val="15362F"/>
                 </a:solidFill>
                 <a:latin typeface="Public Sans"/>
               </a:rPr>
@@ -4070,7 +4240,7 @@
             <a:r>
               <a:rPr sz="1200" b="1">
                 <a:solidFill>
-                  <a:srgbClr val="204A40"/>
+                  <a:srgbClr val="234E44"/>
                 </a:solidFill>
                 <a:latin typeface="Public Sans"/>
               </a:rPr>
@@ -4078,18 +4248,24 @@
             </a:r>
           </a:p>
           <a:p>
-            <a:pPr>
+            <a:pPr algn="l">
               <a:spcBef>
                 <a:spcPts val="400"/>
               </a:spcBef>
-              <a:defRPr sz="1000">
-                <a:solidFill>
-                  <a:srgbClr val="60746D"/>
-                </a:solidFill>
-                <a:latin typeface="Public Sans"/>
-              </a:defRPr>
-            </a:pPr>
-            <a:r>
+              <a:defRPr sz="1000" b="0">
+                <a:solidFill>
+                  <a:srgbClr val="587068"/>
+                </a:solidFill>
+                <a:latin typeface="Public Sans"/>
+              </a:defRPr>
+            </a:pPr>
+            <a:r>
+              <a:rPr sz="1000" b="0">
+                <a:solidFill>
+                  <a:srgbClr val="587068"/>
+                </a:solidFill>
+                <a:latin typeface="Public Sans"/>
+              </a:rPr>
               <a:t>Di Indonesia, lebih dari 70% perawatan bertumpu pada caregiver keluarga dan perawat panti dengan dukungan fasilitas terbatas. Kesenjangan rasio perawat dan pasien memicu kejenuhan fisik/mental (caregiver burden) dan risiko kelalaian fatal pada pasien lansia.</a:t>
             </a:r>
           </a:p>
@@ -4114,7 +4290,7 @@
           </a:solidFill>
           <a:ln w="12700">
             <a:solidFill>
-              <a:srgbClr val="DAE6E0"/>
+              <a:srgbClr val="D8E4DE"/>
             </a:solidFill>
           </a:ln>
         </p:spPr>
@@ -4136,98 +4312,134 @@
           <a:bodyPr rtlCol="0" anchor="ctr" wrap="square" lIns="228600" rIns="228600" tIns="502920"/>
           <a:lstStyle/>
           <a:p>
-            <a:pPr algn="ctr">
+            <a:pPr algn="l">
               <a:spcBef>
                 <a:spcPts val="800"/>
               </a:spcBef>
               <a:defRPr sz="1100" b="1">
                 <a:solidFill>
-                  <a:srgbClr val="14342C"/>
-                </a:solidFill>
-                <a:latin typeface="Public Sans"/>
-              </a:defRPr>
-            </a:pPr>
-            <a:r>
+                  <a:srgbClr val="15362F"/>
+                </a:solidFill>
+                <a:latin typeface="Public Sans"/>
+              </a:defRPr>
+            </a:pPr>
+            <a:r>
+              <a:rPr sz="1100" b="1">
+                <a:solidFill>
+                  <a:srgbClr val="15362F"/>
+                </a:solidFill>
+                <a:latin typeface="Public Sans"/>
+              </a:rPr>
               <a:t>• Lupa Jadwal Rutin &amp; Pengobatan</a:t>
             </a:r>
           </a:p>
           <a:p>
-            <a:pPr>
+            <a:pPr algn="l">
               <a:spcBef>
                 <a:spcPts val="200"/>
               </a:spcBef>
-              <a:defRPr sz="950">
-                <a:solidFill>
-                  <a:srgbClr val="60746D"/>
-                </a:solidFill>
-                <a:latin typeface="Public Sans"/>
-              </a:defRPr>
-            </a:pPr>
-            <a:r>
+              <a:defRPr sz="930" b="0">
+                <a:solidFill>
+                  <a:srgbClr val="587068"/>
+                </a:solidFill>
+                <a:latin typeface="Public Sans"/>
+              </a:defRPr>
+            </a:pPr>
+            <a:r>
+              <a:rPr sz="930" b="0">
+                <a:solidFill>
+                  <a:srgbClr val="587068"/>
+                </a:solidFill>
+                <a:latin typeface="Public Sans"/>
+              </a:rPr>
               <a:t>  Kesulitan mengingat waktu minum obat, makan, atau terapi harian. Keterlambatan atau kelebihan dosis menimbulkan risiko medis serius.</a:t>
             </a:r>
           </a:p>
           <a:p>
-            <a:pPr>
+            <a:pPr algn="l">
               <a:spcBef>
                 <a:spcPts val="800"/>
               </a:spcBef>
               <a:defRPr sz="1100" b="1">
                 <a:solidFill>
-                  <a:srgbClr val="14342C"/>
-                </a:solidFill>
-                <a:latin typeface="Public Sans"/>
-              </a:defRPr>
-            </a:pPr>
-            <a:r>
+                  <a:srgbClr val="15362F"/>
+                </a:solidFill>
+                <a:latin typeface="Public Sans"/>
+              </a:defRPr>
+            </a:pPr>
+            <a:r>
+              <a:rPr sz="1100" b="1">
+                <a:solidFill>
+                  <a:srgbClr val="15362F"/>
+                </a:solidFill>
+                <a:latin typeface="Public Sans"/>
+              </a:rPr>
               <a:t>• Disorientasi Waktu &amp; Barang Pribadi Hilang</a:t>
             </a:r>
           </a:p>
           <a:p>
-            <a:pPr>
+            <a:pPr algn="l">
               <a:spcBef>
                 <a:spcPts val="200"/>
               </a:spcBef>
-              <a:defRPr sz="950">
-                <a:solidFill>
-                  <a:srgbClr val="60746D"/>
-                </a:solidFill>
-                <a:latin typeface="Public Sans"/>
-              </a:defRPr>
-            </a:pPr>
-            <a:r>
+              <a:defRPr sz="930" b="0">
+                <a:solidFill>
+                  <a:srgbClr val="587068"/>
+                </a:solidFill>
+                <a:latin typeface="Public Sans"/>
+              </a:defRPr>
+            </a:pPr>
+            <a:r>
+              <a:rPr sz="930" b="0">
+                <a:solidFill>
+                  <a:srgbClr val="587068"/>
+                </a:solidFill>
+                <a:latin typeface="Public Sans"/>
+              </a:rPr>
               <a:t>  Sering bingung hari/jam berapa saat ini dan panik saat kacamata atau dompet tidak ditemukan di tempat biasanya.</a:t>
             </a:r>
           </a:p>
           <a:p>
-            <a:pPr>
+            <a:pPr algn="l">
               <a:spcBef>
                 <a:spcPts val="800"/>
               </a:spcBef>
               <a:defRPr sz="1100" b="1">
                 <a:solidFill>
-                  <a:srgbClr val="14342C"/>
-                </a:solidFill>
-                <a:latin typeface="Public Sans"/>
-              </a:defRPr>
-            </a:pPr>
-            <a:r>
+                  <a:srgbClr val="15362F"/>
+                </a:solidFill>
+                <a:latin typeface="Public Sans"/>
+              </a:defRPr>
+            </a:pPr>
+            <a:r>
+              <a:rPr sz="1100" b="1">
+                <a:solidFill>
+                  <a:srgbClr val="15362F"/>
+                </a:solidFill>
+                <a:latin typeface="Public Sans"/>
+              </a:rPr>
               <a:t>• Penurunan Kemandirian &amp; Rasa Bersalah</a:t>
             </a:r>
           </a:p>
           <a:p>
-            <a:pPr>
+            <a:pPr algn="l">
               <a:spcBef>
                 <a:spcPts val="200"/>
               </a:spcBef>
-              <a:defRPr sz="950">
-                <a:solidFill>
-                  <a:srgbClr val="60746D"/>
-                </a:solidFill>
-                <a:latin typeface="Public Sans"/>
-              </a:defRPr>
-            </a:pPr>
-            <a:r>
+              <a:defRPr sz="930" b="0">
+                <a:solidFill>
+                  <a:srgbClr val="587068"/>
+                </a:solidFill>
+                <a:latin typeface="Public Sans"/>
+              </a:defRPr>
+            </a:pPr>
+            <a:r>
+              <a:rPr sz="930" b="0">
+                <a:solidFill>
+                  <a:srgbClr val="587068"/>
+                </a:solidFill>
+                <a:latin typeface="Public Sans"/>
+              </a:rPr>
               <a:t>  Merasa tidak berdaya dan tertekan karena harus berulang kali bertanya kepada perawat, memicu kecemasan dan isolasi sosial.</a:t>
             </a:r>
           </a:p>
@@ -4248,7 +4460,7 @@
             <a:avLst/>
           </a:prstGeom>
           <a:solidFill>
-            <a:srgbClr val="FEF2EF"/>
+            <a:srgbClr val="FDF1EE"/>
           </a:solidFill>
           <a:ln>
             <a:noFill/>
@@ -4275,12 +4487,18 @@
             <a:pPr algn="ctr">
               <a:defRPr sz="800" b="1">
                 <a:solidFill>
-                  <a:srgbClr val="CC4C38"/>
-                </a:solidFill>
-                <a:latin typeface="Public Sans"/>
-              </a:defRPr>
-            </a:pPr>
-            <a:r>
+                  <a:srgbClr val="C84E38"/>
+                </a:solidFill>
+                <a:latin typeface="Public Sans"/>
+              </a:defRPr>
+            </a:pPr>
+            <a:r>
+              <a:rPr b="1">
+                <a:solidFill>
+                  <a:srgbClr val="C84E38"/>
+                </a:solidFill>
+                <a:latin typeface="Public Sans"/>
+              </a:rPr>
               <a:t>SISI PASIEN (LANSIA / ODD)</a:t>
             </a:r>
           </a:p>
@@ -4305,7 +4523,7 @@
           </a:solidFill>
           <a:ln w="12700">
             <a:solidFill>
-              <a:srgbClr val="DAE6E0"/>
+              <a:srgbClr val="D8E4DE"/>
             </a:solidFill>
           </a:ln>
         </p:spPr>
@@ -4327,98 +4545,134 @@
           <a:bodyPr rtlCol="0" anchor="ctr" wrap="square" lIns="228600" rIns="228600" tIns="502920"/>
           <a:lstStyle/>
           <a:p>
-            <a:pPr algn="ctr">
+            <a:pPr algn="l">
               <a:spcBef>
                 <a:spcPts val="800"/>
               </a:spcBef>
               <a:defRPr sz="1100" b="1">
                 <a:solidFill>
-                  <a:srgbClr val="14342C"/>
-                </a:solidFill>
-                <a:latin typeface="Public Sans"/>
-              </a:defRPr>
-            </a:pPr>
-            <a:r>
+                  <a:srgbClr val="15362F"/>
+                </a:solidFill>
+                <a:latin typeface="Public Sans"/>
+              </a:defRPr>
+            </a:pPr>
+            <a:r>
+              <a:rPr sz="1100" b="1">
+                <a:solidFill>
+                  <a:srgbClr val="15362F"/>
+                </a:solidFill>
+                <a:latin typeface="Public Sans"/>
+              </a:rPr>
               <a:t>• Rasio Pasien Tidak Seimbang (1 : Banyak)</a:t>
             </a:r>
           </a:p>
           <a:p>
-            <a:pPr>
+            <a:pPr algn="l">
               <a:spcBef>
                 <a:spcPts val="200"/>
               </a:spcBef>
-              <a:defRPr sz="950">
-                <a:solidFill>
-                  <a:srgbClr val="60746D"/>
-                </a:solidFill>
-                <a:latin typeface="Public Sans"/>
-              </a:defRPr>
-            </a:pPr>
-            <a:r>
+              <a:defRPr sz="930" b="0">
+                <a:solidFill>
+                  <a:srgbClr val="587068"/>
+                </a:solidFill>
+                <a:latin typeface="Public Sans"/>
+              </a:defRPr>
+            </a:pPr>
+            <a:r>
+              <a:rPr sz="930" b="0">
+                <a:solidFill>
+                  <a:srgbClr val="587068"/>
+                </a:solidFill>
+                <a:latin typeface="Public Sans"/>
+              </a:rPr>
               <a:t>  Satu perawat umumnya mengasuh 3–10 lansia sekaligus dalam satu shift kerja, membuat pengawasan terus-menerus mustahil dilakukan.</a:t>
             </a:r>
           </a:p>
           <a:p>
-            <a:pPr>
+            <a:pPr algn="l">
               <a:spcBef>
                 <a:spcPts val="800"/>
               </a:spcBef>
               <a:defRPr sz="1100" b="1">
                 <a:solidFill>
-                  <a:srgbClr val="14342C"/>
-                </a:solidFill>
-                <a:latin typeface="Public Sans"/>
-              </a:defRPr>
-            </a:pPr>
-            <a:r>
+                  <a:srgbClr val="15362F"/>
+                </a:solidFill>
+                <a:latin typeface="Public Sans"/>
+              </a:defRPr>
+            </a:pPr>
+            <a:r>
+              <a:rPr sz="1100" b="1">
+                <a:solidFill>
+                  <a:srgbClr val="15362F"/>
+                </a:solidFill>
+                <a:latin typeface="Public Sans"/>
+              </a:rPr>
               <a:t>• Repetitive Verbal Burden (Kelelahan Fisik)</a:t>
             </a:r>
           </a:p>
           <a:p>
-            <a:pPr>
+            <a:pPr algn="l">
               <a:spcBef>
                 <a:spcPts val="200"/>
               </a:spcBef>
-              <a:defRPr sz="950">
-                <a:solidFill>
-                  <a:srgbClr val="60746D"/>
-                </a:solidFill>
-                <a:latin typeface="Public Sans"/>
-              </a:defRPr>
-            </a:pPr>
-            <a:r>
+              <a:defRPr sz="930" b="0">
+                <a:solidFill>
+                  <a:srgbClr val="587068"/>
+                </a:solidFill>
+                <a:latin typeface="Public Sans"/>
+              </a:defRPr>
+            </a:pPr>
+            <a:r>
+              <a:rPr sz="930" b="0">
+                <a:solidFill>
+                  <a:srgbClr val="587068"/>
+                </a:solidFill>
+                <a:latin typeface="Public Sans"/>
+              </a:rPr>
               <a:t>  Menghabiskan energi luar biasa untuk menjawab pertanyaan yang sama berulang kali dan mengingatkan jadwal secara manual setiap saat.</a:t>
             </a:r>
           </a:p>
           <a:p>
-            <a:pPr>
+            <a:pPr algn="l">
               <a:spcBef>
                 <a:spcPts val="800"/>
               </a:spcBef>
               <a:defRPr sz="1100" b="1">
                 <a:solidFill>
-                  <a:srgbClr val="14342C"/>
-                </a:solidFill>
-                <a:latin typeface="Public Sans"/>
-              </a:defRPr>
-            </a:pPr>
-            <a:r>
+                  <a:srgbClr val="15362F"/>
+                </a:solidFill>
+                <a:latin typeface="Public Sans"/>
+              </a:defRPr>
+            </a:pPr>
+            <a:r>
+              <a:rPr sz="1100" b="1">
+                <a:solidFill>
+                  <a:srgbClr val="15362F"/>
+                </a:solidFill>
+                <a:latin typeface="Public Sans"/>
+              </a:rPr>
               <a:t>• Ketiadaan Sistem Eskalasi &amp; Tracking Otomatis</a:t>
             </a:r>
           </a:p>
           <a:p>
-            <a:pPr>
+            <a:pPr algn="l">
               <a:spcBef>
                 <a:spcPts val="200"/>
               </a:spcBef>
-              <a:defRPr sz="950">
-                <a:solidFill>
-                  <a:srgbClr val="60746D"/>
-                </a:solidFill>
-                <a:latin typeface="Public Sans"/>
-              </a:defRPr>
-            </a:pPr>
-            <a:r>
+              <a:defRPr sz="930" b="0">
+                <a:solidFill>
+                  <a:srgbClr val="587068"/>
+                </a:solidFill>
+                <a:latin typeface="Public Sans"/>
+              </a:defRPr>
+            </a:pPr>
+            <a:r>
+              <a:rPr sz="930" b="0">
+                <a:solidFill>
+                  <a:srgbClr val="587068"/>
+                </a:solidFill>
+                <a:latin typeface="Public Sans"/>
+              </a:rPr>
               <a:t>  Sulit mengetahui apakah pasien benar-benar telah meminum obatnya, dan tidak ada sistem peringatan dini ketika jadwal terlewat (missed).</a:t>
             </a:r>
           </a:p>
@@ -4439,7 +4693,7 @@
             <a:avLst/>
           </a:prstGeom>
           <a:solidFill>
-            <a:srgbClr val="E2F1EA"/>
+            <a:srgbClr val="E0EFE8"/>
           </a:solidFill>
           <a:ln>
             <a:noFill/>
@@ -4466,12 +4720,18 @@
             <a:pPr algn="ctr">
               <a:defRPr sz="800" b="1">
                 <a:solidFill>
-                  <a:srgbClr val="184438"/>
-                </a:solidFill>
-                <a:latin typeface="Public Sans"/>
-              </a:defRPr>
-            </a:pPr>
-            <a:r>
+                  <a:srgbClr val="164338"/>
+                </a:solidFill>
+                <a:latin typeface="Public Sans"/>
+              </a:defRPr>
+            </a:pPr>
+            <a:r>
+              <a:rPr b="1">
+                <a:solidFill>
+                  <a:srgbClr val="164338"/>
+                </a:solidFill>
+                <a:latin typeface="Public Sans"/>
+              </a:rPr>
               <a:t>SISI CAREGIVER &amp; PERAWAT</a:t>
             </a:r>
           </a:p>
@@ -4510,7 +4770,7 @@
             <a:avLst/>
           </a:prstGeom>
           <a:solidFill>
-            <a:srgbClr val="FAFCFB"/>
+            <a:srgbClr val="F8FAF9"/>
           </a:solidFill>
           <a:ln>
             <a:noFill/>
@@ -4547,17 +4807,17 @@
         <p:spPr>
           <a:xfrm>
             <a:off x="731520" y="384048"/>
-            <a:ext cx="2926080" cy="292608"/>
+            <a:ext cx="3108960" cy="292608"/>
           </a:xfrm>
           <a:prstGeom prst="roundRect">
             <a:avLst/>
           </a:prstGeom>
           <a:solidFill>
-            <a:srgbClr val="E2F1EA"/>
+            <a:srgbClr val="E0EFE8"/>
           </a:solidFill>
           <a:ln w="9525">
             <a:solidFill>
-              <a:srgbClr val="DAE6E0"/>
+              <a:srgbClr val="D8E4DE"/>
             </a:solidFill>
           </a:ln>
         </p:spPr>
@@ -4582,12 +4842,18 @@
             <a:pPr algn="ctr">
               <a:defRPr sz="850" b="1">
                 <a:solidFill>
-                  <a:srgbClr val="184438"/>
-                </a:solidFill>
-                <a:latin typeface="Public Sans"/>
-              </a:defRPr>
-            </a:pPr>
-            <a:r>
+                  <a:srgbClr val="164338"/>
+                </a:solidFill>
+                <a:latin typeface="Public Sans"/>
+              </a:defRPr>
+            </a:pPr>
+            <a:r>
+              <a:rPr b="1">
+                <a:solidFill>
+                  <a:srgbClr val="164338"/>
+                </a:solidFill>
+                <a:latin typeface="Public Sans"/>
+              </a:rPr>
               <a:t>02 / NILAI UTAMA &amp; SOLUSI</a:t>
             </a:r>
           </a:p>
@@ -4601,8 +4867,8 @@
         </p:nvSpPr>
         <p:spPr>
           <a:xfrm>
-            <a:off x="8686800" y="347472"/>
-            <a:ext cx="2773375" cy="320040"/>
+            <a:off x="8412480" y="347472"/>
+            <a:ext cx="3047695" cy="320040"/>
           </a:xfrm>
           <a:prstGeom prst="rect">
             <a:avLst/>
@@ -4618,12 +4884,18 @@
             <a:pPr algn="r">
               <a:defRPr sz="950" b="1">
                 <a:solidFill>
-                  <a:srgbClr val="60746D"/>
-                </a:solidFill>
-                <a:latin typeface="Public Sans"/>
-              </a:defRPr>
-            </a:pPr>
-            <a:r>
+                  <a:srgbClr val="587068"/>
+                </a:solidFill>
+                <a:latin typeface="Public Sans"/>
+              </a:defRPr>
+            </a:pPr>
+            <a:r>
+              <a:rPr b="1">
+                <a:solidFill>
+                  <a:srgbClr val="587068"/>
+                </a:solidFill>
+                <a:latin typeface="Public Sans"/>
+              </a:rPr>
               <a:t>NARAE · INCEPTION 2026</a:t>
             </a:r>
           </a:p>
@@ -4654,12 +4926,18 @@
             <a:pPr>
               <a:defRPr sz="2300" b="1">
                 <a:solidFill>
-                  <a:srgbClr val="14342C"/>
-                </a:solidFill>
-                <a:latin typeface="Public Sans"/>
-              </a:defRPr>
-            </a:pPr>
-            <a:r>
+                  <a:srgbClr val="15362F"/>
+                </a:solidFill>
+                <a:latin typeface="Public Sans"/>
+              </a:defRPr>
+            </a:pPr>
+            <a:r>
+              <a:rPr b="1">
+                <a:solidFill>
+                  <a:srgbClr val="15362F"/>
+                </a:solidFill>
+                <a:latin typeface="Public Sans"/>
+              </a:rPr>
               <a:t>Our Solution</a:t>
             </a:r>
           </a:p>
@@ -4670,12 +4948,18 @@
               </a:spcBef>
               <a:defRPr sz="1100">
                 <a:solidFill>
-                  <a:srgbClr val="60746D"/>
-                </a:solidFill>
-                <a:latin typeface="Public Sans"/>
-              </a:defRPr>
-            </a:pPr>
-            <a:r>
+                  <a:srgbClr val="587068"/>
+                </a:solidFill>
+                <a:latin typeface="Public Sans"/>
+              </a:defRPr>
+            </a:pPr>
+            <a:r>
+              <a:rPr>
+                <a:solidFill>
+                  <a:srgbClr val="587068"/>
+                </a:solidFill>
+                <a:latin typeface="Public Sans"/>
+              </a:rPr>
               <a:t>NARAE menghadirkan ekosistem pendamping memori cerdas: Wearable Taktil + AI Terpandu + Caregiver Hub.</a:t>
             </a:r>
           </a:p>
@@ -4696,11 +4980,11 @@
             <a:avLst/>
           </a:prstGeom>
           <a:solidFill>
-            <a:srgbClr val="E2F1EA"/>
+            <a:srgbClr val="E0EFE8"/>
           </a:solidFill>
           <a:ln w="12700">
             <a:solidFill>
-              <a:srgbClr val="2A7662"/>
+              <a:srgbClr val="2B7865"/>
             </a:solidFill>
           </a:ln>
         </p:spPr>
@@ -4722,15 +5006,24 @@
           <a:bodyPr rtlCol="0" anchor="ctr" wrap="square" lIns="228600" tIns="109728"/>
           <a:lstStyle/>
           <a:p>
-            <a:pPr algn="ctr">
+            <a:pPr algn="l">
+              <a:spcBef>
+                <a:spcPts val="0"/>
+              </a:spcBef>
               <a:defRPr sz="1100" b="1">
                 <a:solidFill>
-                  <a:srgbClr val="14342C"/>
-                </a:solidFill>
-                <a:latin typeface="Public Sans"/>
-              </a:defRPr>
-            </a:pPr>
-            <a:r>
+                  <a:srgbClr val="15362F"/>
+                </a:solidFill>
+                <a:latin typeface="Public Sans"/>
+              </a:defRPr>
+            </a:pPr>
+            <a:r>
+              <a:rPr sz="1100" b="1">
+                <a:solidFill>
+                  <a:srgbClr val="15362F"/>
+                </a:solidFill>
+                <a:latin typeface="Public Sans"/>
+              </a:rPr>
               <a:t>“NARAE menjembatani kebutuhan pasien akan kemandirian dengan kebutuhan perawat akan sistem pemantauan yang efisien dan andal. Mengubah pengasuhan pasif menjadi kemandirian yang didukung teknologi empatik.”</a:t>
             </a:r>
           </a:p>
@@ -4755,7 +5048,7 @@
           </a:solidFill>
           <a:ln w="12700">
             <a:solidFill>
-              <a:srgbClr val="DAE6E0"/>
+              <a:srgbClr val="D8E4DE"/>
             </a:solidFill>
           </a:ln>
         </p:spPr>
@@ -4777,143 +5070,200 @@
           <a:bodyPr rtlCol="0" anchor="ctr" wrap="square" lIns="182880" rIns="182880" tIns="502920"/>
           <a:lstStyle/>
           <a:p>
-            <a:pPr algn="ctr">
+            <a:pPr algn="l">
+              <a:spcBef>
+                <a:spcPts val="0"/>
+              </a:spcBef>
               <a:defRPr sz="1400" b="1">
                 <a:solidFill>
-                  <a:srgbClr val="14342C"/>
-                </a:solidFill>
-                <a:latin typeface="Public Sans"/>
-              </a:defRPr>
-            </a:pPr>
-            <a:r>
+                  <a:srgbClr val="15362F"/>
+                </a:solidFill>
+                <a:latin typeface="Public Sans"/>
+              </a:defRPr>
+            </a:pPr>
+            <a:r>
+              <a:rPr sz="1400" b="1">
+                <a:solidFill>
+                  <a:srgbClr val="15362F"/>
+                </a:solidFill>
+                <a:latin typeface="Public Sans"/>
+              </a:rPr>
               <a:t>Smartband Offline-First</a:t>
             </a:r>
           </a:p>
           <a:p>
-            <a:pPr>
+            <a:pPr algn="l">
               <a:spcBef>
                 <a:spcPts val="600"/>
               </a:spcBef>
               <a:defRPr sz="1000" b="1">
                 <a:solidFill>
-                  <a:srgbClr val="204A40"/>
-                </a:solidFill>
-                <a:latin typeface="Public Sans"/>
-              </a:defRPr>
-            </a:pPr>
-            <a:r>
+                  <a:srgbClr val="234E44"/>
+                </a:solidFill>
+                <a:latin typeface="Public Sans"/>
+              </a:defRPr>
+            </a:pPr>
+            <a:r>
+              <a:rPr sz="1000" b="1">
+                <a:solidFill>
+                  <a:srgbClr val="234E44"/>
+                </a:solidFill>
+                <a:latin typeface="Public Sans"/>
+              </a:rPr>
               <a:t>• Dual-Button Taktil</a:t>
             </a:r>
           </a:p>
           <a:p>
-            <a:pPr>
+            <a:pPr algn="l">
               <a:spcBef>
                 <a:spcPts val="100"/>
               </a:spcBef>
-              <a:defRPr sz="880">
-                <a:solidFill>
-                  <a:srgbClr val="60746D"/>
-                </a:solidFill>
-                <a:latin typeface="Public Sans"/>
-              </a:defRPr>
-            </a:pPr>
-            <a:r>
+              <a:defRPr sz="880" b="0">
+                <a:solidFill>
+                  <a:srgbClr val="587068"/>
+                </a:solidFill>
+                <a:latin typeface="Public Sans"/>
+              </a:defRPr>
+            </a:pPr>
+            <a:r>
+              <a:rPr sz="880" b="0">
+                <a:solidFill>
+                  <a:srgbClr val="587068"/>
+                </a:solidFill>
+                <a:latin typeface="Public Sans"/>
+              </a:rPr>
               <a:t>  Hanya 2 tombol fisik: Jadwal (Biru) &amp; Bantuan (Merah). Bebas layar sentuh rumit yang membingungkan.</a:t>
             </a:r>
           </a:p>
           <a:p>
-            <a:pPr>
+            <a:pPr algn="l">
               <a:spcBef>
                 <a:spcPts val="600"/>
               </a:spcBef>
               <a:defRPr sz="1000" b="1">
                 <a:solidFill>
-                  <a:srgbClr val="204A40"/>
-                </a:solidFill>
-                <a:latin typeface="Public Sans"/>
-              </a:defRPr>
-            </a:pPr>
-            <a:r>
+                  <a:srgbClr val="234E44"/>
+                </a:solidFill>
+                <a:latin typeface="Public Sans"/>
+              </a:defRPr>
+            </a:pPr>
+            <a:r>
+              <a:rPr sz="1000" b="1">
+                <a:solidFill>
+                  <a:srgbClr val="234E44"/>
+                </a:solidFill>
+                <a:latin typeface="Public Sans"/>
+              </a:rPr>
               <a:t>• Keandalan Mandiri</a:t>
             </a:r>
           </a:p>
           <a:p>
-            <a:pPr>
+            <a:pPr algn="l">
               <a:spcBef>
                 <a:spcPts val="100"/>
               </a:spcBef>
-              <a:defRPr sz="880">
-                <a:solidFill>
-                  <a:srgbClr val="60746D"/>
-                </a:solidFill>
-                <a:latin typeface="Public Sans"/>
-              </a:defRPr>
-            </a:pPr>
-            <a:r>
+              <a:defRPr sz="880" b="0">
+                <a:solidFill>
+                  <a:srgbClr val="587068"/>
+                </a:solidFill>
+                <a:latin typeface="Public Sans"/>
+              </a:defRPr>
+            </a:pPr>
+            <a:r>
+              <a:rPr sz="880" b="0">
+                <a:solidFill>
+                  <a:srgbClr val="587068"/>
+                </a:solidFill>
+                <a:latin typeface="Public Sans"/>
+              </a:rPr>
               <a:t>  Pengingat dan alarm getar/suara aktif mandiri secara lokal walau koneksi Wi-Fi terputus.</a:t>
             </a:r>
           </a:p>
           <a:p>
-            <a:pPr>
+            <a:pPr algn="l">
               <a:spcBef>
                 <a:spcPts val="600"/>
               </a:spcBef>
               <a:defRPr sz="1000" b="1">
                 <a:solidFill>
-                  <a:srgbClr val="204A40"/>
-                </a:solidFill>
-                <a:latin typeface="Public Sans"/>
-              </a:defRPr>
-            </a:pPr>
-            <a:r>
+                  <a:srgbClr val="234E44"/>
+                </a:solidFill>
+                <a:latin typeface="Public Sans"/>
+              </a:defRPr>
+            </a:pPr>
+            <a:r>
+              <a:rPr sz="1000" b="1">
+                <a:solidFill>
+                  <a:srgbClr val="234E44"/>
+                </a:solidFill>
+                <a:latin typeface="Public Sans"/>
+              </a:rPr>
               <a:t>• Respon Instan (≤0.1s)</a:t>
             </a:r>
           </a:p>
           <a:p>
-            <a:pPr>
+            <a:pPr algn="l">
               <a:spcBef>
                 <a:spcPts val="100"/>
               </a:spcBef>
-              <a:defRPr sz="880">
-                <a:solidFill>
-                  <a:srgbClr val="60746D"/>
-                </a:solidFill>
-                <a:latin typeface="Public Sans"/>
-              </a:defRPr>
-            </a:pPr>
-            <a:r>
+              <a:defRPr sz="880" b="0">
+                <a:solidFill>
+                  <a:srgbClr val="587068"/>
+                </a:solidFill>
+                <a:latin typeface="Public Sans"/>
+              </a:defRPr>
+            </a:pPr>
+            <a:r>
+              <a:rPr sz="880" b="0">
+                <a:solidFill>
+                  <a:srgbClr val="587068"/>
+                </a:solidFill>
+                <a:latin typeface="Public Sans"/>
+              </a:rPr>
               <a:t>  Tekan 1x memutar tugas berikutnya dari memori lokal tanpa jeda jaringan.</a:t>
             </a:r>
           </a:p>
           <a:p>
-            <a:pPr>
+            <a:pPr algn="l">
               <a:spcBef>
                 <a:spcPts val="600"/>
               </a:spcBef>
               <a:defRPr sz="1000" b="1">
                 <a:solidFill>
-                  <a:srgbClr val="204A40"/>
-                </a:solidFill>
-                <a:latin typeface="Public Sans"/>
-              </a:defRPr>
-            </a:pPr>
-            <a:r>
+                  <a:srgbClr val="234E44"/>
+                </a:solidFill>
+                <a:latin typeface="Public Sans"/>
+              </a:defRPr>
+            </a:pPr>
+            <a:r>
+              <a:rPr sz="1000" b="1">
+                <a:solidFill>
+                  <a:srgbClr val="234E44"/>
+                </a:solidFill>
+                <a:latin typeface="Public Sans"/>
+              </a:rPr>
               <a:t>• Indikator LED 3-Warna</a:t>
             </a:r>
           </a:p>
           <a:p>
-            <a:pPr>
+            <a:pPr algn="l">
               <a:spcBef>
                 <a:spcPts val="100"/>
               </a:spcBef>
-              <a:defRPr sz="880">
-                <a:solidFill>
-                  <a:srgbClr val="60746D"/>
-                </a:solidFill>
-                <a:latin typeface="Public Sans"/>
-              </a:defRPr>
-            </a:pPr>
-            <a:r>
+              <a:defRPr sz="880" b="0">
+                <a:solidFill>
+                  <a:srgbClr val="587068"/>
+                </a:solidFill>
+                <a:latin typeface="Public Sans"/>
+              </a:defRPr>
+            </a:pPr>
+            <a:r>
+              <a:rPr sz="880" b="0">
+                <a:solidFill>
+                  <a:srgbClr val="587068"/>
+                </a:solidFill>
+                <a:latin typeface="Public Sans"/>
+              </a:rPr>
               <a:t>  Status visual sederhana: Berhasil terkirim, Memproses, atau Gangguan koneksi.</a:t>
             </a:r>
           </a:p>
@@ -4934,7 +5284,7 @@
             <a:avLst/>
           </a:prstGeom>
           <a:solidFill>
-            <a:srgbClr val="F2F7F4"/>
+            <a:srgbClr val="F1F6F3"/>
           </a:solidFill>
           <a:ln>
             <a:noFill/>
@@ -4961,12 +5311,18 @@
             <a:pPr algn="ctr">
               <a:defRPr sz="800" b="1">
                 <a:solidFill>
-                  <a:srgbClr val="14342C"/>
-                </a:solidFill>
-                <a:latin typeface="Public Sans"/>
-              </a:defRPr>
-            </a:pPr>
-            <a:r>
+                  <a:srgbClr val="15362F"/>
+                </a:solidFill>
+                <a:latin typeface="Public Sans"/>
+              </a:defRPr>
+            </a:pPr>
+            <a:r>
+              <a:rPr b="1">
+                <a:solidFill>
+                  <a:srgbClr val="15362F"/>
+                </a:solidFill>
+                <a:latin typeface="Public Sans"/>
+              </a:rPr>
               <a:t>01 / WEARABLE TAKTIL</a:t>
             </a:r>
           </a:p>
@@ -4991,7 +5347,7 @@
           </a:solidFill>
           <a:ln w="12700">
             <a:solidFill>
-              <a:srgbClr val="DAE6E0"/>
+              <a:srgbClr val="D8E4DE"/>
             </a:solidFill>
           </a:ln>
         </p:spPr>
@@ -5013,143 +5369,200 @@
           <a:bodyPr rtlCol="0" anchor="ctr" wrap="square" lIns="182880" rIns="182880" tIns="502920"/>
           <a:lstStyle/>
           <a:p>
-            <a:pPr algn="ctr">
+            <a:pPr algn="l">
+              <a:spcBef>
+                <a:spcPts val="0"/>
+              </a:spcBef>
               <a:defRPr sz="1400" b="1">
                 <a:solidFill>
-                  <a:srgbClr val="14342C"/>
-                </a:solidFill>
-                <a:latin typeface="Public Sans"/>
-              </a:defRPr>
-            </a:pPr>
-            <a:r>
+                  <a:srgbClr val="15362F"/>
+                </a:solidFill>
+                <a:latin typeface="Public Sans"/>
+              </a:defRPr>
+            </a:pPr>
+            <a:r>
+              <a:rPr sz="1400" b="1">
+                <a:solidFill>
+                  <a:srgbClr val="15362F"/>
+                </a:solidFill>
+                <a:latin typeface="Public Sans"/>
+              </a:rPr>
               <a:t>Gemini Function Calling</a:t>
             </a:r>
           </a:p>
           <a:p>
-            <a:pPr>
+            <a:pPr algn="l">
               <a:spcBef>
                 <a:spcPts val="600"/>
               </a:spcBef>
               <a:defRPr sz="1000" b="1">
                 <a:solidFill>
-                  <a:srgbClr val="204A40"/>
-                </a:solidFill>
-                <a:latin typeface="Public Sans"/>
-              </a:defRPr>
-            </a:pPr>
-            <a:r>
+                  <a:srgbClr val="234E44"/>
+                </a:solidFill>
+                <a:latin typeface="Public Sans"/>
+              </a:defRPr>
+            </a:pPr>
+            <a:r>
+              <a:rPr sz="1000" b="1">
+                <a:solidFill>
+                  <a:srgbClr val="234E44"/>
+                </a:solidFill>
+                <a:latin typeface="Public Sans"/>
+              </a:rPr>
               <a:t>• Closed-World &amp; Zero Halusinasi</a:t>
             </a:r>
           </a:p>
           <a:p>
-            <a:pPr>
+            <a:pPr algn="l">
               <a:spcBef>
                 <a:spcPts val="100"/>
               </a:spcBef>
-              <a:defRPr sz="880">
-                <a:solidFill>
-                  <a:srgbClr val="60746D"/>
-                </a:solidFill>
-                <a:latin typeface="Public Sans"/>
-              </a:defRPr>
-            </a:pPr>
-            <a:r>
+              <a:defRPr sz="880" b="0">
+                <a:solidFill>
+                  <a:srgbClr val="587068"/>
+                </a:solidFill>
+                <a:latin typeface="Public Sans"/>
+              </a:defRPr>
+            </a:pPr>
+            <a:r>
+              <a:rPr sz="880" b="0">
+                <a:solidFill>
+                  <a:srgbClr val="587068"/>
+                </a:solidFill>
+                <a:latin typeface="Public Sans"/>
+              </a:rPr>
               <a:t>  AI hanya menjawab dari data 6 tools terverifikasi dan konteks JIT perawat. Tidak mengarang fakta.</a:t>
             </a:r>
           </a:p>
           <a:p>
-            <a:pPr>
+            <a:pPr algn="l">
               <a:spcBef>
                 <a:spcPts val="600"/>
               </a:spcBef>
               <a:defRPr sz="1000" b="1">
                 <a:solidFill>
-                  <a:srgbClr val="204A40"/>
-                </a:solidFill>
-                <a:latin typeface="Public Sans"/>
-              </a:defRPr>
-            </a:pPr>
-            <a:r>
+                  <a:srgbClr val="234E44"/>
+                </a:solidFill>
+                <a:latin typeface="Public Sans"/>
+              </a:defRPr>
+            </a:pPr>
+            <a:r>
+              <a:rPr sz="1000" b="1">
+                <a:solidFill>
+                  <a:srgbClr val="234E44"/>
+                </a:solidFill>
+                <a:latin typeface="Public Sans"/>
+              </a:rPr>
               <a:t>• Strict Medical Guardrails</a:t>
             </a:r>
           </a:p>
           <a:p>
-            <a:pPr>
+            <a:pPr algn="l">
               <a:spcBef>
                 <a:spcPts val="100"/>
               </a:spcBef>
-              <a:defRPr sz="880">
-                <a:solidFill>
-                  <a:srgbClr val="60746D"/>
-                </a:solidFill>
-                <a:latin typeface="Public Sans"/>
-              </a:defRPr>
-            </a:pPr>
-            <a:r>
+              <a:defRPr sz="880" b="0">
+                <a:solidFill>
+                  <a:srgbClr val="587068"/>
+                </a:solidFill>
+                <a:latin typeface="Public Sans"/>
+              </a:defRPr>
+            </a:pPr>
+            <a:r>
+              <a:rPr sz="880" b="0">
+                <a:solidFill>
+                  <a:srgbClr val="587068"/>
+                </a:solidFill>
+                <a:latin typeface="Public Sans"/>
+              </a:rPr>
               <a:t>  Dilarang memberi saran medis atau dosis obat. Pasien selalu diarahkan ke perawat pendamping.</a:t>
             </a:r>
           </a:p>
           <a:p>
-            <a:pPr>
+            <a:pPr algn="l">
               <a:spcBef>
                 <a:spcPts val="600"/>
               </a:spcBef>
               <a:defRPr sz="1000" b="1">
                 <a:solidFill>
-                  <a:srgbClr val="204A40"/>
-                </a:solidFill>
-                <a:latin typeface="Public Sans"/>
-              </a:defRPr>
-            </a:pPr>
-            <a:r>
+                  <a:srgbClr val="234E44"/>
+                </a:solidFill>
+                <a:latin typeface="Public Sans"/>
+              </a:defRPr>
+            </a:pPr>
+            <a:r>
+              <a:rPr sz="1000" b="1">
+                <a:solidFill>
+                  <a:srgbClr val="234E44"/>
+                </a:solidFill>
+                <a:latin typeface="Public Sans"/>
+              </a:rPr>
               <a:t>• Percakapan Multi-Turn Alami</a:t>
             </a:r>
           </a:p>
           <a:p>
-            <a:pPr>
+            <a:pPr algn="l">
               <a:spcBef>
                 <a:spcPts val="100"/>
               </a:spcBef>
-              <a:defRPr sz="880">
-                <a:solidFill>
-                  <a:srgbClr val="60746D"/>
-                </a:solidFill>
-                <a:latin typeface="Public Sans"/>
-              </a:defRPr>
-            </a:pPr>
-            <a:r>
+              <a:defRPr sz="880" b="0">
+                <a:solidFill>
+                  <a:srgbClr val="587068"/>
+                </a:solidFill>
+                <a:latin typeface="Public Sans"/>
+              </a:defRPr>
+            </a:pPr>
+            <a:r>
+              <a:rPr sz="880" b="0">
+                <a:solidFill>
+                  <a:srgbClr val="587068"/>
+                </a:solidFill>
+                <a:latin typeface="Public Sans"/>
+              </a:rPr>
               <a:t>  Mendengarkan kembali setelah menjawab sampai pasien berpamitan atau jeda hening.</a:t>
             </a:r>
           </a:p>
           <a:p>
-            <a:pPr>
+            <a:pPr algn="l">
               <a:spcBef>
                 <a:spcPts val="600"/>
               </a:spcBef>
               <a:defRPr sz="1000" b="1">
                 <a:solidFill>
-                  <a:srgbClr val="204A40"/>
-                </a:solidFill>
-                <a:latin typeface="Public Sans"/>
-              </a:defRPr>
-            </a:pPr>
-            <a:r>
+                  <a:srgbClr val="234E44"/>
+                </a:solidFill>
+                <a:latin typeface="Public Sans"/>
+              </a:defRPr>
+            </a:pPr>
+            <a:r>
+              <a:rPr sz="1000" b="1">
+                <a:solidFill>
+                  <a:srgbClr val="234E44"/>
+                </a:solidFill>
+                <a:latin typeface="Public Sans"/>
+              </a:rPr>
               <a:t>• Jawaban Ramah &amp; Ringkas</a:t>
             </a:r>
           </a:p>
           <a:p>
-            <a:pPr>
+            <a:pPr algn="l">
               <a:spcBef>
                 <a:spcPts val="100"/>
               </a:spcBef>
-              <a:defRPr sz="880">
-                <a:solidFill>
-                  <a:srgbClr val="60746D"/>
-                </a:solidFill>
-                <a:latin typeface="Public Sans"/>
-              </a:defRPr>
-            </a:pPr>
-            <a:r>
+              <a:defRPr sz="880" b="0">
+                <a:solidFill>
+                  <a:srgbClr val="587068"/>
+                </a:solidFill>
+                <a:latin typeface="Public Sans"/>
+              </a:defRPr>
+            </a:pPr>
+            <a:r>
+              <a:rPr sz="880" b="0">
+                <a:solidFill>
+                  <a:srgbClr val="587068"/>
+                </a:solidFill>
+                <a:latin typeface="Public Sans"/>
+              </a:rPr>
               <a:t>  Dibatasi maksimal 1–2 kalimat dalam bahasa Indonesia polos (TTS-ready) agar mudah dicerna.</a:t>
             </a:r>
           </a:p>
@@ -5170,7 +5583,7 @@
             <a:avLst/>
           </a:prstGeom>
           <a:solidFill>
-            <a:srgbClr val="E2F1EA"/>
+            <a:srgbClr val="E0EFE8"/>
           </a:solidFill>
           <a:ln>
             <a:noFill/>
@@ -5197,12 +5610,18 @@
             <a:pPr algn="ctr">
               <a:defRPr sz="800" b="1">
                 <a:solidFill>
-                  <a:srgbClr val="184438"/>
-                </a:solidFill>
-                <a:latin typeface="Public Sans"/>
-              </a:defRPr>
-            </a:pPr>
-            <a:r>
+                  <a:srgbClr val="164338"/>
+                </a:solidFill>
+                <a:latin typeface="Public Sans"/>
+              </a:defRPr>
+            </a:pPr>
+            <a:r>
+              <a:rPr b="1">
+                <a:solidFill>
+                  <a:srgbClr val="164338"/>
+                </a:solidFill>
+                <a:latin typeface="Public Sans"/>
+              </a:rPr>
               <a:t>02 / AI COMPANION</a:t>
             </a:r>
           </a:p>
@@ -5227,7 +5646,7 @@
           </a:solidFill>
           <a:ln w="12700">
             <a:solidFill>
-              <a:srgbClr val="DAE6E0"/>
+              <a:srgbClr val="D8E4DE"/>
             </a:solidFill>
           </a:ln>
         </p:spPr>
@@ -5249,143 +5668,200 @@
           <a:bodyPr rtlCol="0" anchor="ctr" wrap="square" lIns="182880" rIns="182880" tIns="502920"/>
           <a:lstStyle/>
           <a:p>
-            <a:pPr algn="ctr">
+            <a:pPr algn="l">
+              <a:spcBef>
+                <a:spcPts val="0"/>
+              </a:spcBef>
               <a:defRPr sz="1400" b="1">
                 <a:solidFill>
-                  <a:srgbClr val="14342C"/>
-                </a:solidFill>
-                <a:latin typeface="Public Sans"/>
-              </a:defRPr>
-            </a:pPr>
-            <a:r>
+                  <a:srgbClr val="15362F"/>
+                </a:solidFill>
+                <a:latin typeface="Public Sans"/>
+              </a:defRPr>
+            </a:pPr>
+            <a:r>
+              <a:rPr sz="1400" b="1">
+                <a:solidFill>
+                  <a:srgbClr val="15362F"/>
+                </a:solidFill>
+                <a:latin typeface="Public Sans"/>
+              </a:rPr>
               <a:t>Command Center Terpusat</a:t>
             </a:r>
           </a:p>
           <a:p>
-            <a:pPr>
+            <a:pPr algn="l">
               <a:spcBef>
                 <a:spcPts val="600"/>
               </a:spcBef>
               <a:defRPr sz="1000" b="1">
                 <a:solidFill>
-                  <a:srgbClr val="204A40"/>
-                </a:solidFill>
-                <a:latin typeface="Public Sans"/>
-              </a:defRPr>
-            </a:pPr>
-            <a:r>
+                  <a:srgbClr val="234E44"/>
+                </a:solidFill>
+                <a:latin typeface="Public Sans"/>
+              </a:defRPr>
+            </a:pPr>
+            <a:r>
+              <a:rPr sz="1000" b="1">
+                <a:solidFill>
+                  <a:srgbClr val="234E44"/>
+                </a:solidFill>
+                <a:latin typeface="Public Sans"/>
+              </a:rPr>
               <a:t>• Monitoring Multi-Pasien</a:t>
             </a:r>
           </a:p>
           <a:p>
-            <a:pPr>
+            <a:pPr algn="l">
               <a:spcBef>
                 <a:spcPts val="100"/>
               </a:spcBef>
-              <a:defRPr sz="880">
-                <a:solidFill>
-                  <a:srgbClr val="60746D"/>
-                </a:solidFill>
-                <a:latin typeface="Public Sans"/>
-              </a:defRPr>
-            </a:pPr>
-            <a:r>
+              <a:defRPr sz="880" b="0">
+                <a:solidFill>
+                  <a:srgbClr val="587068"/>
+                </a:solidFill>
+                <a:latin typeface="Public Sans"/>
+              </a:defRPr>
+            </a:pPr>
+            <a:r>
+              <a:rPr sz="880" b="0">
+                <a:solidFill>
+                  <a:srgbClr val="587068"/>
+                </a:solidFill>
+                <a:latin typeface="Public Sans"/>
+              </a:rPr>
               <a:t>  Pantau status jadwal, status baterai gelang, dan lokasi barang banyak pasien sekaligus.</a:t>
             </a:r>
           </a:p>
           <a:p>
-            <a:pPr>
+            <a:pPr algn="l">
               <a:spcBef>
                 <a:spcPts val="600"/>
               </a:spcBef>
               <a:defRPr sz="1000" b="1">
                 <a:solidFill>
-                  <a:srgbClr val="204A40"/>
-                </a:solidFill>
-                <a:latin typeface="Public Sans"/>
-              </a:defRPr>
-            </a:pPr>
-            <a:r>
+                  <a:srgbClr val="234E44"/>
+                </a:solidFill>
+                <a:latin typeface="Public Sans"/>
+              </a:defRPr>
+            </a:pPr>
+            <a:r>
+              <a:rPr sz="1000" b="1">
+                <a:solidFill>
+                  <a:srgbClr val="234E44"/>
+                </a:solidFill>
+                <a:latin typeface="Public Sans"/>
+              </a:rPr>
               <a:t>• Deteksi Bentrok Jadwal</a:t>
             </a:r>
           </a:p>
           <a:p>
-            <a:pPr>
+            <a:pPr algn="l">
               <a:spcBef>
                 <a:spcPts val="100"/>
               </a:spcBef>
-              <a:defRPr sz="880">
-                <a:solidFill>
-                  <a:srgbClr val="60746D"/>
-                </a:solidFill>
-                <a:latin typeface="Public Sans"/>
-              </a:defRPr>
-            </a:pPr>
-            <a:r>
+              <a:defRPr sz="880" b="0">
+                <a:solidFill>
+                  <a:srgbClr val="587068"/>
+                </a:solidFill>
+                <a:latin typeface="Public Sans"/>
+              </a:defRPr>
+            </a:pPr>
+            <a:r>
+              <a:rPr sz="880" b="0">
+                <a:solidFill>
+                  <a:srgbClr val="587068"/>
+                </a:solidFill>
+                <a:latin typeface="Public Sans"/>
+              </a:rPr>
               <a:t>  Algoritma otomatis mendeteksi tumpang tindih waktu kegiatan dengan opsi geser/nonaktifkan.</a:t>
             </a:r>
           </a:p>
           <a:p>
-            <a:pPr>
+            <a:pPr algn="l">
               <a:spcBef>
                 <a:spcPts val="600"/>
               </a:spcBef>
               <a:defRPr sz="1000" b="1">
                 <a:solidFill>
-                  <a:srgbClr val="204A40"/>
-                </a:solidFill>
-                <a:latin typeface="Public Sans"/>
-              </a:defRPr>
-            </a:pPr>
-            <a:r>
+                  <a:srgbClr val="234E44"/>
+                </a:solidFill>
+                <a:latin typeface="Public Sans"/>
+              </a:defRPr>
+            </a:pPr>
+            <a:r>
+              <a:rPr sz="1000" b="1">
+                <a:solidFill>
+                  <a:srgbClr val="234E44"/>
+                </a:solidFill>
+                <a:latin typeface="Public Sans"/>
+              </a:rPr>
               <a:t>• Verifikasi Human-in-the-Loop</a:t>
             </a:r>
           </a:p>
           <a:p>
-            <a:pPr>
+            <a:pPr algn="l">
               <a:spcBef>
                 <a:spcPts val="100"/>
               </a:spcBef>
-              <a:defRPr sz="880">
-                <a:solidFill>
-                  <a:srgbClr val="60746D"/>
-                </a:solidFill>
-                <a:latin typeface="Public Sans"/>
-              </a:defRPr>
-            </a:pPr>
-            <a:r>
+              <a:defRPr sz="880" b="0">
+                <a:solidFill>
+                  <a:srgbClr val="587068"/>
+                </a:solidFill>
+                <a:latin typeface="Public Sans"/>
+              </a:defRPr>
+            </a:pPr>
+            <a:r>
+              <a:rPr sz="880" b="0">
+                <a:solidFill>
+                  <a:srgbClr val="587068"/>
+                </a:solidFill>
+                <a:latin typeface="Public Sans"/>
+              </a:rPr>
               <a:t>  Klaim 'selesai' dari suara pasien menunggu konfirmasi perawat sebelum masuk status resmi.</a:t>
             </a:r>
           </a:p>
           <a:p>
-            <a:pPr>
+            <a:pPr algn="l">
               <a:spcBef>
                 <a:spcPts val="600"/>
               </a:spcBef>
               <a:defRPr sz="1000" b="1">
                 <a:solidFill>
-                  <a:srgbClr val="204A40"/>
-                </a:solidFill>
-                <a:latin typeface="Public Sans"/>
-              </a:defRPr>
-            </a:pPr>
-            <a:r>
+                  <a:srgbClr val="234E44"/>
+                </a:solidFill>
+                <a:latin typeface="Public Sans"/>
+              </a:defRPr>
+            </a:pPr>
+            <a:r>
+              <a:rPr sz="1000" b="1">
+                <a:solidFill>
+                  <a:srgbClr val="234E44"/>
+                </a:solidFill>
+                <a:latin typeface="Public Sans"/>
+              </a:rPr>
               <a:t>• 10s Auto-Escalation Darurat</a:t>
             </a:r>
           </a:p>
           <a:p>
-            <a:pPr>
+            <a:pPr algn="l">
               <a:spcBef>
                 <a:spcPts val="100"/>
               </a:spcBef>
-              <a:defRPr sz="880">
-                <a:solidFill>
-                  <a:srgbClr val="60746D"/>
-                </a:solidFill>
-                <a:latin typeface="Public Sans"/>
-              </a:defRPr>
-            </a:pPr>
-            <a:r>
+              <a:defRPr sz="880" b="0">
+                <a:solidFill>
+                  <a:srgbClr val="587068"/>
+                </a:solidFill>
+                <a:latin typeface="Public Sans"/>
+              </a:defRPr>
+            </a:pPr>
+            <a:r>
+              <a:rPr sz="880" b="0">
+                <a:solidFill>
+                  <a:srgbClr val="587068"/>
+                </a:solidFill>
+                <a:latin typeface="Public Sans"/>
+              </a:rPr>
               <a:t>  Panggilan bantuan yang tidak direspons dalam 10 detik otomatis dieskalasi ke tim perawat cadangan.</a:t>
             </a:r>
           </a:p>
@@ -5406,7 +5882,7 @@
             <a:avLst/>
           </a:prstGeom>
           <a:solidFill>
-            <a:srgbClr val="F2F7F4"/>
+            <a:srgbClr val="F1F6F3"/>
           </a:solidFill>
           <a:ln>
             <a:noFill/>
@@ -5433,12 +5909,18 @@
             <a:pPr algn="ctr">
               <a:defRPr sz="800" b="1">
                 <a:solidFill>
-                  <a:srgbClr val="14342C"/>
-                </a:solidFill>
-                <a:latin typeface="Public Sans"/>
-              </a:defRPr>
-            </a:pPr>
-            <a:r>
+                  <a:srgbClr val="15362F"/>
+                </a:solidFill>
+                <a:latin typeface="Public Sans"/>
+              </a:defRPr>
+            </a:pPr>
+            <a:r>
+              <a:rPr b="1">
+                <a:solidFill>
+                  <a:srgbClr val="15362F"/>
+                </a:solidFill>
+                <a:latin typeface="Public Sans"/>
+              </a:rPr>
               <a:t>03 / CAREGIVER HUB</a:t>
             </a:r>
           </a:p>
@@ -5477,7 +5959,7 @@
             <a:avLst/>
           </a:prstGeom>
           <a:solidFill>
-            <a:srgbClr val="FAFCFB"/>
+            <a:srgbClr val="F8FAF9"/>
           </a:solidFill>
           <a:ln>
             <a:noFill/>
@@ -5514,17 +5996,17 @@
         <p:spPr>
           <a:xfrm>
             <a:off x="731520" y="384048"/>
-            <a:ext cx="2926080" cy="292608"/>
+            <a:ext cx="3108960" cy="292608"/>
           </a:xfrm>
           <a:prstGeom prst="roundRect">
             <a:avLst/>
           </a:prstGeom>
           <a:solidFill>
-            <a:srgbClr val="E2F1EA"/>
+            <a:srgbClr val="E0EFE8"/>
           </a:solidFill>
           <a:ln w="9525">
             <a:solidFill>
-              <a:srgbClr val="DAE6E0"/>
+              <a:srgbClr val="D8E4DE"/>
             </a:solidFill>
           </a:ln>
         </p:spPr>
@@ -5549,12 +6031,18 @@
             <a:pPr algn="ctr">
               <a:defRPr sz="850" b="1">
                 <a:solidFill>
-                  <a:srgbClr val="184438"/>
-                </a:solidFill>
-                <a:latin typeface="Public Sans"/>
-              </a:defRPr>
-            </a:pPr>
-            <a:r>
+                  <a:srgbClr val="164338"/>
+                </a:solidFill>
+                <a:latin typeface="Public Sans"/>
+              </a:defRPr>
+            </a:pPr>
+            <a:r>
+              <a:rPr b="1">
+                <a:solidFill>
+                  <a:srgbClr val="164338"/>
+                </a:solidFill>
+                <a:latin typeface="Public Sans"/>
+              </a:rPr>
               <a:t>03 / EKOSISTEM PRODUK</a:t>
             </a:r>
           </a:p>
@@ -5568,8 +6056,8 @@
         </p:nvSpPr>
         <p:spPr>
           <a:xfrm>
-            <a:off x="8686800" y="347472"/>
-            <a:ext cx="2773375" cy="320040"/>
+            <a:off x="8412480" y="347472"/>
+            <a:ext cx="3047695" cy="320040"/>
           </a:xfrm>
           <a:prstGeom prst="rect">
             <a:avLst/>
@@ -5585,12 +6073,18 @@
             <a:pPr algn="r">
               <a:defRPr sz="950" b="1">
                 <a:solidFill>
-                  <a:srgbClr val="60746D"/>
-                </a:solidFill>
-                <a:latin typeface="Public Sans"/>
-              </a:defRPr>
-            </a:pPr>
-            <a:r>
+                  <a:srgbClr val="587068"/>
+                </a:solidFill>
+                <a:latin typeface="Public Sans"/>
+              </a:defRPr>
+            </a:pPr>
+            <a:r>
+              <a:rPr b="1">
+                <a:solidFill>
+                  <a:srgbClr val="587068"/>
+                </a:solidFill>
+                <a:latin typeface="Public Sans"/>
+              </a:rPr>
               <a:t>NARAE · INCEPTION 2026</a:t>
             </a:r>
           </a:p>
@@ -5621,12 +6115,18 @@
             <a:pPr>
               <a:defRPr sz="2300" b="1">
                 <a:solidFill>
-                  <a:srgbClr val="14342C"/>
-                </a:solidFill>
-                <a:latin typeface="Public Sans"/>
-              </a:defRPr>
-            </a:pPr>
-            <a:r>
+                  <a:srgbClr val="15362F"/>
+                </a:solidFill>
+                <a:latin typeface="Public Sans"/>
+              </a:defRPr>
+            </a:pPr>
+            <a:r>
+              <a:rPr b="1">
+                <a:solidFill>
+                  <a:srgbClr val="15362F"/>
+                </a:solidFill>
+                <a:latin typeface="Public Sans"/>
+              </a:rPr>
               <a:t>Product Overview</a:t>
             </a:r>
           </a:p>
@@ -5637,12 +6137,18 @@
               </a:spcBef>
               <a:defRPr sz="1100">
                 <a:solidFill>
-                  <a:srgbClr val="60746D"/>
-                </a:solidFill>
-                <a:latin typeface="Public Sans"/>
-              </a:defRPr>
-            </a:pPr>
-            <a:r>
+                  <a:srgbClr val="587068"/>
+                </a:solidFill>
+                <a:latin typeface="Public Sans"/>
+              </a:defRPr>
+            </a:pPr>
+            <a:r>
+              <a:rPr>
+                <a:solidFill>
+                  <a:srgbClr val="587068"/>
+                </a:solidFill>
+                <a:latin typeface="Public Sans"/>
+              </a:rPr>
               <a:t>Harmoni dua antarmuka yang terhubung secara real-time: Smartband Pasien &amp; Dashboard Perawat.</a:t>
             </a:r>
           </a:p>
@@ -5667,7 +6173,7 @@
           </a:solidFill>
           <a:ln w="12700">
             <a:solidFill>
-              <a:srgbClr val="DAE6E0"/>
+              <a:srgbClr val="D8E4DE"/>
             </a:solidFill>
           </a:ln>
         </p:spPr>
@@ -5708,7 +6214,7 @@
             <a:avLst/>
           </a:prstGeom>
           <a:solidFill>
-            <a:srgbClr val="E2F1EA"/>
+            <a:srgbClr val="E0EFE8"/>
           </a:solidFill>
           <a:ln>
             <a:noFill/>
@@ -5735,12 +6241,18 @@
             <a:pPr algn="ctr">
               <a:defRPr sz="800" b="1">
                 <a:solidFill>
-                  <a:srgbClr val="184438"/>
-                </a:solidFill>
-                <a:latin typeface="Public Sans"/>
-              </a:defRPr>
-            </a:pPr>
-            <a:r>
+                  <a:srgbClr val="164338"/>
+                </a:solidFill>
+                <a:latin typeface="Public Sans"/>
+              </a:defRPr>
+            </a:pPr>
+            <a:r>
+              <a:rPr b="1">
+                <a:solidFill>
+                  <a:srgbClr val="164338"/>
+                </a:solidFill>
+                <a:latin typeface="Public Sans"/>
+              </a:rPr>
               <a:t>SISI PASIEN: SMARTBAND TAKTIL</a:t>
             </a:r>
           </a:p>
@@ -5762,7 +6274,7 @@
         </p:blipFill>
         <p:spPr>
           <a:xfrm>
-            <a:off x="960120" y="2194560"/>
+            <a:off x="960120" y="2176272"/>
             <a:ext cx="4773168" cy="2011680"/>
           </a:xfrm>
           <a:prstGeom prst="rect">
@@ -5778,8 +6290,8 @@
         </p:nvSpPr>
         <p:spPr>
           <a:xfrm>
-            <a:off x="960120" y="4297680"/>
-            <a:ext cx="4773168" cy="1508760"/>
+            <a:off x="960120" y="4279392"/>
+            <a:ext cx="4773168" cy="1536192"/>
           </a:xfrm>
           <a:prstGeom prst="rect">
             <a:avLst/>
@@ -5800,7 +6312,7 @@
             <a:r>
               <a:rPr sz="950" b="1">
                 <a:solidFill>
-                  <a:srgbClr val="14342C"/>
+                  <a:srgbClr val="15362F"/>
                 </a:solidFill>
                 <a:latin typeface="Public Sans"/>
               </a:rPr>
@@ -5809,7 +6321,7 @@
             <a:r>
               <a:rPr sz="900">
                 <a:solidFill>
-                  <a:srgbClr val="60746D"/>
+                  <a:srgbClr val="587068"/>
                 </a:solidFill>
                 <a:latin typeface="Public Sans"/>
               </a:rPr>
@@ -5825,7 +6337,7 @@
             <a:r>
               <a:rPr sz="950" b="1">
                 <a:solidFill>
-                  <a:srgbClr val="14342C"/>
+                  <a:srgbClr val="15362F"/>
                 </a:solidFill>
                 <a:latin typeface="Public Sans"/>
               </a:rPr>
@@ -5834,7 +6346,7 @@
             <a:r>
               <a:rPr sz="900">
                 <a:solidFill>
-                  <a:srgbClr val="60746D"/>
+                  <a:srgbClr val="587068"/>
                 </a:solidFill>
                 <a:latin typeface="Public Sans"/>
               </a:rPr>
@@ -5850,7 +6362,7 @@
             <a:r>
               <a:rPr sz="950" b="1">
                 <a:solidFill>
-                  <a:srgbClr val="14342C"/>
+                  <a:srgbClr val="15362F"/>
                 </a:solidFill>
                 <a:latin typeface="Public Sans"/>
               </a:rPr>
@@ -5859,11 +6371,11 @@
             <a:r>
               <a:rPr sz="900">
                 <a:solidFill>
-                  <a:srgbClr val="60746D"/>
-                </a:solidFill>
-                <a:latin typeface="Public Sans"/>
-              </a:rPr>
-              <a:t>Casing 54×74 mm, strap silikon lembut 24 mm, LED status 3 warna, speaker empati, dan mikrofon terarah.</a:t>
+                  <a:srgbClr val="587068"/>
+                </a:solidFill>
+                <a:latin typeface="Public Sans"/>
+              </a:rPr>
+              <a:t>Casing 54×74 mm, strap silikon lembut 24 mm, LED status 3 warna, speaker empati, &amp; mic terarah.</a:t>
             </a:r>
           </a:p>
         </p:txBody>
@@ -5887,7 +6399,7 @@
           </a:solidFill>
           <a:ln w="12700">
             <a:solidFill>
-              <a:srgbClr val="DAE6E0"/>
+              <a:srgbClr val="D8E4DE"/>
             </a:solidFill>
           </a:ln>
         </p:spPr>
@@ -5909,130 +6421,178 @@
           <a:bodyPr rtlCol="0" anchor="ctr" wrap="square" lIns="228600" rIns="228600" tIns="502920"/>
           <a:lstStyle/>
           <a:p>
-            <a:pPr algn="ctr">
+            <a:pPr algn="l">
               <a:spcBef>
                 <a:spcPts val="800"/>
               </a:spcBef>
               <a:defRPr sz="1050" b="1">
                 <a:solidFill>
-                  <a:srgbClr val="14342C"/>
-                </a:solidFill>
-                <a:latin typeface="Public Sans"/>
-              </a:defRPr>
-            </a:pPr>
-            <a:r>
+                  <a:srgbClr val="15362F"/>
+                </a:solidFill>
+                <a:latin typeface="Public Sans"/>
+              </a:defRPr>
+            </a:pPr>
+            <a:r>
+              <a:rPr sz="1050" b="1">
+                <a:solidFill>
+                  <a:srgbClr val="15362F"/>
+                </a:solidFill>
+                <a:latin typeface="Public Sans"/>
+              </a:rPr>
               <a:t>• Timeline Kegiatan Real-Time</a:t>
             </a:r>
           </a:p>
           <a:p>
-            <a:pPr>
+            <a:pPr algn="l">
               <a:spcBef>
                 <a:spcPts val="200"/>
               </a:spcBef>
-              <a:defRPr sz="919">
-                <a:solidFill>
-                  <a:srgbClr val="60746D"/>
-                </a:solidFill>
-                <a:latin typeface="Public Sans"/>
-              </a:defRPr>
-            </a:pPr>
-            <a:r>
+              <a:defRPr sz="919" b="0">
+                <a:solidFill>
+                  <a:srgbClr val="587068"/>
+                </a:solidFill>
+                <a:latin typeface="Public Sans"/>
+              </a:defRPr>
+            </a:pPr>
+            <a:r>
+              <a:rPr sz="919" b="0">
+                <a:solidFill>
+                  <a:srgbClr val="587068"/>
+                </a:solidFill>
+                <a:latin typeface="Public Sans"/>
+              </a:rPr>
               <a:t>  Visualisasi jadwal harian dengan dot warna status otomatis: Nanti (Scheduled), Proses (Played), Butuh Persetujuan (Reported), Selesai (Confirmed), dan Terlewat (Missed).</a:t>
             </a:r>
           </a:p>
           <a:p>
-            <a:pPr>
+            <a:pPr algn="l">
               <a:spcBef>
                 <a:spcPts val="800"/>
               </a:spcBef>
               <a:defRPr sz="1050" b="1">
                 <a:solidFill>
-                  <a:srgbClr val="14342C"/>
-                </a:solidFill>
-                <a:latin typeface="Public Sans"/>
-              </a:defRPr>
-            </a:pPr>
-            <a:r>
+                  <a:srgbClr val="15362F"/>
+                </a:solidFill>
+                <a:latin typeface="Public Sans"/>
+              </a:defRPr>
+            </a:pPr>
+            <a:r>
+              <a:rPr sz="1050" b="1">
+                <a:solidFill>
+                  <a:srgbClr val="15362F"/>
+                </a:solidFill>
+                <a:latin typeface="Public Sans"/>
+              </a:rPr>
               <a:t>• Manajemen Inventori Barang (Item Tracker)</a:t>
             </a:r>
           </a:p>
           <a:p>
-            <a:pPr>
+            <a:pPr algn="l">
               <a:spcBef>
                 <a:spcPts val="200"/>
               </a:spcBef>
-              <a:defRPr sz="919">
-                <a:solidFill>
-                  <a:srgbClr val="60746D"/>
-                </a:solidFill>
-                <a:latin typeface="Public Sans"/>
-              </a:defRPr>
-            </a:pPr>
-            <a:r>
+              <a:defRPr sz="919" b="0">
+                <a:solidFill>
+                  <a:srgbClr val="587068"/>
+                </a:solidFill>
+                <a:latin typeface="Public Sans"/>
+              </a:defRPr>
+            </a:pPr>
+            <a:r>
+              <a:rPr sz="919" b="0">
+                <a:solidFill>
+                  <a:srgbClr val="587068"/>
+                </a:solidFill>
+                <a:latin typeface="Public Sans"/>
+              </a:rPr>
               <a:t>  Mencatat lokasi terakhir (last location) dan lokasi default barang pribadi pasien (kacamata, dompet, tongkat) yang dapat ditanyakan pasien ke AI secara langsung.</a:t>
             </a:r>
           </a:p>
           <a:p>
-            <a:pPr>
+            <a:pPr algn="l">
               <a:spcBef>
                 <a:spcPts val="800"/>
               </a:spcBef>
               <a:defRPr sz="1050" b="1">
                 <a:solidFill>
-                  <a:srgbClr val="14342C"/>
-                </a:solidFill>
-                <a:latin typeface="Public Sans"/>
-              </a:defRPr>
-            </a:pPr>
-            <a:r>
+                  <a:srgbClr val="15362F"/>
+                </a:solidFill>
+                <a:latin typeface="Public Sans"/>
+              </a:defRPr>
+            </a:pPr>
+            <a:r>
+              <a:rPr sz="1050" b="1">
+                <a:solidFill>
+                  <a:srgbClr val="15362F"/>
+                </a:solidFill>
+                <a:latin typeface="Public Sans"/>
+              </a:rPr>
               <a:t>• Antrean Panggilan Bantuan &amp; SLA 10 Detik</a:t>
             </a:r>
           </a:p>
           <a:p>
-            <a:pPr>
+            <a:pPr algn="l">
               <a:spcBef>
                 <a:spcPts val="200"/>
               </a:spcBef>
-              <a:defRPr sz="919">
-                <a:solidFill>
-                  <a:srgbClr val="60746D"/>
-                </a:solidFill>
-                <a:latin typeface="Public Sans"/>
-              </a:defRPr>
-            </a:pPr>
-            <a:r>
+              <a:defRPr sz="919" b="0">
+                <a:solidFill>
+                  <a:srgbClr val="587068"/>
+                </a:solidFill>
+                <a:latin typeface="Public Sans"/>
+              </a:defRPr>
+            </a:pPr>
+            <a:r>
+              <a:rPr sz="919" b="0">
+                <a:solidFill>
+                  <a:srgbClr val="587068"/>
+                </a:solidFill>
+                <a:latin typeface="Public Sans"/>
+              </a:rPr>
               <a:t>  Panggilan darurat berstatus PENDING dengan hitung mundur respon 10 detik. Jika perawat tidak merespons, tiket otomatis EXPIRED dan dieskalasi.</a:t>
             </a:r>
           </a:p>
           <a:p>
-            <a:pPr>
+            <a:pPr algn="l">
               <a:spcBef>
                 <a:spcPts val="800"/>
               </a:spcBef>
               <a:defRPr sz="1050" b="1">
                 <a:solidFill>
-                  <a:srgbClr val="14342C"/>
-                </a:solidFill>
-                <a:latin typeface="Public Sans"/>
-              </a:defRPr>
-            </a:pPr>
-            <a:r>
+                  <a:srgbClr val="15362F"/>
+                </a:solidFill>
+                <a:latin typeface="Public Sans"/>
+              </a:defRPr>
+            </a:pPr>
+            <a:r>
+              <a:rPr sz="1050" b="1">
+                <a:solidFill>
+                  <a:srgbClr val="15362F"/>
+                </a:solidFill>
+                <a:latin typeface="Public Sans"/>
+              </a:rPr>
               <a:t>• Multi-Patient Switcher &amp; Audit Trail</a:t>
             </a:r>
           </a:p>
           <a:p>
-            <a:pPr>
+            <a:pPr algn="l">
               <a:spcBef>
                 <a:spcPts val="200"/>
               </a:spcBef>
-              <a:defRPr sz="919">
-                <a:solidFill>
-                  <a:srgbClr val="60746D"/>
-                </a:solidFill>
-                <a:latin typeface="Public Sans"/>
-              </a:defRPr>
-            </a:pPr>
-            <a:r>
+              <a:defRPr sz="919" b="0">
+                <a:solidFill>
+                  <a:srgbClr val="587068"/>
+                </a:solidFill>
+                <a:latin typeface="Public Sans"/>
+              </a:defRPr>
+            </a:pPr>
+            <a:r>
+              <a:rPr sz="919" b="0">
+                <a:solidFill>
+                  <a:srgbClr val="587068"/>
+                </a:solidFill>
+                <a:latin typeface="Public Sans"/>
+              </a:rPr>
               <a:t>  Mendukung rasio 1 perawat : banyak pasien secara dinamis (Pak Arthur, Ibu Odette, Ibu Siti) lengkap dengan rekaman riwayat interaksi AI dan riwayat tugas.</a:t>
             </a:r>
           </a:p>
@@ -6053,7 +6613,7 @@
             <a:avLst/>
           </a:prstGeom>
           <a:solidFill>
-            <a:srgbClr val="F2F7F4"/>
+            <a:srgbClr val="F1F6F3"/>
           </a:solidFill>
           <a:ln>
             <a:noFill/>
@@ -6080,12 +6640,18 @@
             <a:pPr algn="ctr">
               <a:defRPr sz="800" b="1">
                 <a:solidFill>
-                  <a:srgbClr val="14342C"/>
-                </a:solidFill>
-                <a:latin typeface="Public Sans"/>
-              </a:defRPr>
-            </a:pPr>
-            <a:r>
+                  <a:srgbClr val="15362F"/>
+                </a:solidFill>
+                <a:latin typeface="Public Sans"/>
+              </a:defRPr>
+            </a:pPr>
+            <a:r>
+              <a:rPr b="1">
+                <a:solidFill>
+                  <a:srgbClr val="15362F"/>
+                </a:solidFill>
+                <a:latin typeface="Public Sans"/>
+              </a:rPr>
               <a:t>SISI PERAWAT: CAREGIVER COMMAND CENTER</a:t>
             </a:r>
           </a:p>
@@ -6106,7 +6672,7 @@
             <a:avLst/>
           </a:prstGeom>
           <a:solidFill>
-            <a:srgbClr val="14342C"/>
+            <a:srgbClr val="15362F"/>
           </a:solidFill>
           <a:ln>
             <a:noFill/>
@@ -6139,6 +6705,12 @@
               </a:defRPr>
             </a:pPr>
             <a:r>
+              <a:rPr b="1">
+                <a:solidFill>
+                  <a:srgbClr val="FFFFFF"/>
+                </a:solidFill>
+                <a:latin typeface="Public Sans"/>
+              </a:rPr>
               <a:t>Human-in-the-Loop: Pasien melapor via suara AI · Sistem mencatat ke audit trail · Perawat mengonfirmasi keputusan akhir.</a:t>
             </a:r>
           </a:p>
@@ -6177,7 +6749,7 @@
             <a:avLst/>
           </a:prstGeom>
           <a:solidFill>
-            <a:srgbClr val="FAFCFB"/>
+            <a:srgbClr val="F8FAF9"/>
           </a:solidFill>
           <a:ln>
             <a:noFill/>
@@ -6214,17 +6786,17 @@
         <p:spPr>
           <a:xfrm>
             <a:off x="731520" y="384048"/>
-            <a:ext cx="2926080" cy="292608"/>
+            <a:ext cx="3108960" cy="292608"/>
           </a:xfrm>
           <a:prstGeom prst="roundRect">
             <a:avLst/>
           </a:prstGeom>
           <a:solidFill>
-            <a:srgbClr val="E2F1EA"/>
+            <a:srgbClr val="E0EFE8"/>
           </a:solidFill>
           <a:ln w="9525">
             <a:solidFill>
-              <a:srgbClr val="DAE6E0"/>
+              <a:srgbClr val="D8E4DE"/>
             </a:solidFill>
           </a:ln>
         </p:spPr>
@@ -6249,12 +6821,18 @@
             <a:pPr algn="ctr">
               <a:defRPr sz="850" b="1">
                 <a:solidFill>
-                  <a:srgbClr val="184438"/>
-                </a:solidFill>
-                <a:latin typeface="Public Sans"/>
-              </a:defRPr>
-            </a:pPr>
-            <a:r>
+                  <a:srgbClr val="164338"/>
+                </a:solidFill>
+                <a:latin typeface="Public Sans"/>
+              </a:defRPr>
+            </a:pPr>
+            <a:r>
+              <a:rPr b="1">
+                <a:solidFill>
+                  <a:srgbClr val="164338"/>
+                </a:solidFill>
+                <a:latin typeface="Public Sans"/>
+              </a:rPr>
               <a:t>04 / ALUR KERJA SISTEM</a:t>
             </a:r>
           </a:p>
@@ -6268,8 +6846,8 @@
         </p:nvSpPr>
         <p:spPr>
           <a:xfrm>
-            <a:off x="8686800" y="347472"/>
-            <a:ext cx="2773375" cy="320040"/>
+            <a:off x="8412480" y="347472"/>
+            <a:ext cx="3047695" cy="320040"/>
           </a:xfrm>
           <a:prstGeom prst="rect">
             <a:avLst/>
@@ -6285,12 +6863,18 @@
             <a:pPr algn="r">
               <a:defRPr sz="950" b="1">
                 <a:solidFill>
-                  <a:srgbClr val="60746D"/>
-                </a:solidFill>
-                <a:latin typeface="Public Sans"/>
-              </a:defRPr>
-            </a:pPr>
-            <a:r>
+                  <a:srgbClr val="587068"/>
+                </a:solidFill>
+                <a:latin typeface="Public Sans"/>
+              </a:defRPr>
+            </a:pPr>
+            <a:r>
+              <a:rPr b="1">
+                <a:solidFill>
+                  <a:srgbClr val="587068"/>
+                </a:solidFill>
+                <a:latin typeface="Public Sans"/>
+              </a:rPr>
               <a:t>NARAE · INCEPTION 2026</a:t>
             </a:r>
           </a:p>
@@ -6321,12 +6905,18 @@
             <a:pPr>
               <a:defRPr sz="2300" b="1">
                 <a:solidFill>
-                  <a:srgbClr val="14342C"/>
-                </a:solidFill>
-                <a:latin typeface="Public Sans"/>
-              </a:defRPr>
-            </a:pPr>
-            <a:r>
+                  <a:srgbClr val="15362F"/>
+                </a:solidFill>
+                <a:latin typeface="Public Sans"/>
+              </a:defRPr>
+            </a:pPr>
+            <a:r>
+              <a:rPr b="1">
+                <a:solidFill>
+                  <a:srgbClr val="15362F"/>
+                </a:solidFill>
+                <a:latin typeface="Public Sans"/>
+              </a:rPr>
               <a:t>How It Works</a:t>
             </a:r>
           </a:p>
@@ -6337,12 +6927,18 @@
               </a:spcBef>
               <a:defRPr sz="1100">
                 <a:solidFill>
-                  <a:srgbClr val="60746D"/>
-                </a:solidFill>
-                <a:latin typeface="Public Sans"/>
-              </a:defRPr>
-            </a:pPr>
-            <a:r>
+                  <a:srgbClr val="587068"/>
+                </a:solidFill>
+                <a:latin typeface="Public Sans"/>
+              </a:defRPr>
+            </a:pPr>
+            <a:r>
+              <a:rPr>
+                <a:solidFill>
+                  <a:srgbClr val="587068"/>
+                </a:solidFill>
+                <a:latin typeface="Public Sans"/>
+              </a:rPr>
               <a:t>Alur interaksi seamless dari konfigurasi perawat, pengingat gelang, penalaran AI, hingga verifikasi.</a:t>
             </a:r>
           </a:p>
@@ -6363,11 +6959,11 @@
             <a:avLst/>
           </a:prstGeom>
           <a:solidFill>
-            <a:srgbClr val="F2F7F4"/>
+            <a:srgbClr val="F1F6F3"/>
           </a:solidFill>
           <a:ln w="12700">
             <a:solidFill>
-              <a:srgbClr val="DAE6E0"/>
+              <a:srgbClr val="D8E4DE"/>
             </a:solidFill>
           </a:ln>
         </p:spPr>
@@ -6389,63 +6985,90 @@
           <a:bodyPr rtlCol="0" anchor="ctr" wrap="square" lIns="146304" rIns="146304" tIns="182880"/>
           <a:lstStyle/>
           <a:p>
-            <a:pPr algn="ctr">
+            <a:pPr algn="l">
+              <a:spcBef>
+                <a:spcPts val="0"/>
+              </a:spcBef>
               <a:defRPr sz="2800" b="1">
                 <a:solidFill>
-                  <a:srgbClr val="14342C"/>
-                </a:solidFill>
-                <a:latin typeface="Public Sans"/>
-              </a:defRPr>
-            </a:pPr>
-            <a:r>
+                  <a:srgbClr val="15362F"/>
+                </a:solidFill>
+                <a:latin typeface="Public Sans"/>
+              </a:defRPr>
+            </a:pPr>
+            <a:r>
+              <a:rPr sz="2800" b="1">
+                <a:solidFill>
+                  <a:srgbClr val="15362F"/>
+                </a:solidFill>
+                <a:latin typeface="Public Sans"/>
+              </a:rPr>
               <a:t>01</a:t>
             </a:r>
           </a:p>
           <a:p>
-            <a:pPr>
+            <a:pPr algn="l">
               <a:spcBef>
                 <a:spcPts val="200"/>
               </a:spcBef>
               <a:defRPr sz="850" b="1">
                 <a:solidFill>
-                  <a:srgbClr val="14342C"/>
-                </a:solidFill>
-                <a:latin typeface="Public Sans"/>
-              </a:defRPr>
-            </a:pPr>
-            <a:r>
+                  <a:srgbClr val="15362F"/>
+                </a:solidFill>
+                <a:latin typeface="Public Sans"/>
+              </a:defRPr>
+            </a:pPr>
+            <a:r>
+              <a:rPr sz="850" b="1">
+                <a:solidFill>
+                  <a:srgbClr val="15362F"/>
+                </a:solidFill>
+                <a:latin typeface="Public Sans"/>
+              </a:rPr>
               <a:t>PERAWAT</a:t>
             </a:r>
           </a:p>
           <a:p>
-            <a:pPr>
+            <a:pPr algn="l">
               <a:spcBef>
                 <a:spcPts val="800"/>
               </a:spcBef>
               <a:defRPr sz="1200" b="1">
                 <a:solidFill>
-                  <a:srgbClr val="14342C"/>
-                </a:solidFill>
-                <a:latin typeface="Public Sans"/>
-              </a:defRPr>
-            </a:pPr>
-            <a:r>
+                  <a:srgbClr val="15362F"/>
+                </a:solidFill>
+                <a:latin typeface="Public Sans"/>
+              </a:defRPr>
+            </a:pPr>
+            <a:r>
+              <a:rPr sz="1200" b="1">
+                <a:solidFill>
+                  <a:srgbClr val="15362F"/>
+                </a:solidFill>
+                <a:latin typeface="Public Sans"/>
+              </a:rPr>
               <a:t>Setup Jadwal &amp; Inventori</a:t>
             </a:r>
           </a:p>
           <a:p>
-            <a:pPr>
+            <a:pPr algn="l">
               <a:spcBef>
                 <a:spcPts val="600"/>
               </a:spcBef>
-              <a:defRPr sz="950">
-                <a:solidFill>
-                  <a:srgbClr val="60746D"/>
-                </a:solidFill>
-                <a:latin typeface="Public Sans"/>
-              </a:defRPr>
-            </a:pPr>
-            <a:r>
+              <a:defRPr sz="950" b="0">
+                <a:solidFill>
+                  <a:srgbClr val="587068"/>
+                </a:solidFill>
+                <a:latin typeface="Public Sans"/>
+              </a:defRPr>
+            </a:pPr>
+            <a:r>
+              <a:rPr sz="950" b="0">
+                <a:solidFill>
+                  <a:srgbClr val="587068"/>
+                </a:solidFill>
+                <a:latin typeface="Public Sans"/>
+              </a:rPr>
               <a:t>Perawat mengatur jadwal rutin/sekali jalan &amp; lokasi barang pasien di dashboard web/mobile.</a:t>
             </a:r>
           </a:p>
@@ -6470,7 +7093,7 @@
           </a:solidFill>
           <a:ln w="12700">
             <a:solidFill>
-              <a:srgbClr val="DAE6E0"/>
+              <a:srgbClr val="D8E4DE"/>
             </a:solidFill>
           </a:ln>
         </p:spPr>
@@ -6492,63 +7115,90 @@
           <a:bodyPr rtlCol="0" anchor="ctr" wrap="square" lIns="146304" rIns="146304" tIns="182880"/>
           <a:lstStyle/>
           <a:p>
-            <a:pPr algn="ctr">
+            <a:pPr algn="l">
+              <a:spcBef>
+                <a:spcPts val="0"/>
+              </a:spcBef>
               <a:defRPr sz="2800" b="1">
                 <a:solidFill>
-                  <a:srgbClr val="204A40"/>
-                </a:solidFill>
-                <a:latin typeface="Public Sans"/>
-              </a:defRPr>
-            </a:pPr>
-            <a:r>
+                  <a:srgbClr val="234E44"/>
+                </a:solidFill>
+                <a:latin typeface="Public Sans"/>
+              </a:defRPr>
+            </a:pPr>
+            <a:r>
+              <a:rPr sz="2800" b="1">
+                <a:solidFill>
+                  <a:srgbClr val="234E44"/>
+                </a:solidFill>
+                <a:latin typeface="Public Sans"/>
+              </a:rPr>
               <a:t>02</a:t>
             </a:r>
           </a:p>
           <a:p>
-            <a:pPr>
+            <a:pPr algn="l">
               <a:spcBef>
                 <a:spcPts val="200"/>
               </a:spcBef>
               <a:defRPr sz="850" b="1">
                 <a:solidFill>
-                  <a:srgbClr val="204A40"/>
-                </a:solidFill>
-                <a:latin typeface="Public Sans"/>
-              </a:defRPr>
-            </a:pPr>
-            <a:r>
+                  <a:srgbClr val="234E44"/>
+                </a:solidFill>
+                <a:latin typeface="Public Sans"/>
+              </a:defRPr>
+            </a:pPr>
+            <a:r>
+              <a:rPr sz="850" b="1">
+                <a:solidFill>
+                  <a:srgbClr val="234E44"/>
+                </a:solidFill>
+                <a:latin typeface="Public Sans"/>
+              </a:rPr>
               <a:t>GELANG</a:t>
             </a:r>
           </a:p>
           <a:p>
-            <a:pPr>
+            <a:pPr algn="l">
               <a:spcBef>
                 <a:spcPts val="800"/>
               </a:spcBef>
               <a:defRPr sz="1200" b="1">
                 <a:solidFill>
-                  <a:srgbClr val="14342C"/>
-                </a:solidFill>
-                <a:latin typeface="Public Sans"/>
-              </a:defRPr>
-            </a:pPr>
-            <a:r>
+                  <a:srgbClr val="15362F"/>
+                </a:solidFill>
+                <a:latin typeface="Public Sans"/>
+              </a:defRPr>
+            </a:pPr>
+            <a:r>
+              <a:rPr sz="1200" b="1">
+                <a:solidFill>
+                  <a:srgbClr val="15362F"/>
+                </a:solidFill>
+                <a:latin typeface="Public Sans"/>
+              </a:rPr>
               <a:t>Pengingat Otomatis</a:t>
             </a:r>
           </a:p>
           <a:p>
-            <a:pPr>
+            <a:pPr algn="l">
               <a:spcBef>
                 <a:spcPts val="600"/>
               </a:spcBef>
-              <a:defRPr sz="950">
-                <a:solidFill>
-                  <a:srgbClr val="60746D"/>
-                </a:solidFill>
-                <a:latin typeface="Public Sans"/>
-              </a:defRPr>
-            </a:pPr>
-            <a:r>
+              <a:defRPr sz="950" b="0">
+                <a:solidFill>
+                  <a:srgbClr val="587068"/>
+                </a:solidFill>
+                <a:latin typeface="Public Sans"/>
+              </a:defRPr>
+            </a:pPr>
+            <a:r>
+              <a:rPr sz="950" b="0">
+                <a:solidFill>
+                  <a:srgbClr val="587068"/>
+                </a:solidFill>
+                <a:latin typeface="Public Sans"/>
+              </a:rPr>
               <a:t>Alarm getar &amp; instruksi suara berbunyi tepat waktu sesuai zona waktu WIB secara lokal (offline-safe).</a:t>
             </a:r>
           </a:p>
@@ -6569,11 +7219,11 @@
             <a:avLst/>
           </a:prstGeom>
           <a:solidFill>
-            <a:srgbClr val="FEF2EF"/>
+            <a:srgbClr val="FDF1EE"/>
           </a:solidFill>
           <a:ln w="12700">
             <a:solidFill>
-              <a:srgbClr val="DAE6E0"/>
+              <a:srgbClr val="D8E4DE"/>
             </a:solidFill>
           </a:ln>
         </p:spPr>
@@ -6595,63 +7245,90 @@
           <a:bodyPr rtlCol="0" anchor="ctr" wrap="square" lIns="146304" rIns="146304" tIns="182880"/>
           <a:lstStyle/>
           <a:p>
-            <a:pPr algn="ctr">
+            <a:pPr algn="l">
+              <a:spcBef>
+                <a:spcPts val="0"/>
+              </a:spcBef>
               <a:defRPr sz="2800" b="1">
                 <a:solidFill>
-                  <a:srgbClr val="CC4C38"/>
-                </a:solidFill>
-                <a:latin typeface="Public Sans"/>
-              </a:defRPr>
-            </a:pPr>
-            <a:r>
+                  <a:srgbClr val="C84E38"/>
+                </a:solidFill>
+                <a:latin typeface="Public Sans"/>
+              </a:defRPr>
+            </a:pPr>
+            <a:r>
+              <a:rPr sz="2800" b="1">
+                <a:solidFill>
+                  <a:srgbClr val="C84E38"/>
+                </a:solidFill>
+                <a:latin typeface="Public Sans"/>
+              </a:rPr>
               <a:t>03</a:t>
             </a:r>
           </a:p>
           <a:p>
-            <a:pPr>
+            <a:pPr algn="l">
               <a:spcBef>
                 <a:spcPts val="200"/>
               </a:spcBef>
               <a:defRPr sz="850" b="1">
                 <a:solidFill>
-                  <a:srgbClr val="CC4C38"/>
-                </a:solidFill>
-                <a:latin typeface="Public Sans"/>
-              </a:defRPr>
-            </a:pPr>
-            <a:r>
+                  <a:srgbClr val="C84E38"/>
+                </a:solidFill>
+                <a:latin typeface="Public Sans"/>
+              </a:defRPr>
+            </a:pPr>
+            <a:r>
+              <a:rPr sz="850" b="1">
+                <a:solidFill>
+                  <a:srgbClr val="C84E38"/>
+                </a:solidFill>
+                <a:latin typeface="Public Sans"/>
+              </a:rPr>
               <a:t>PASIEN</a:t>
             </a:r>
           </a:p>
           <a:p>
-            <a:pPr>
+            <a:pPr algn="l">
               <a:spcBef>
                 <a:spcPts val="800"/>
               </a:spcBef>
               <a:defRPr sz="1200" b="1">
                 <a:solidFill>
-                  <a:srgbClr val="14342C"/>
-                </a:solidFill>
-                <a:latin typeface="Public Sans"/>
-              </a:defRPr>
-            </a:pPr>
-            <a:r>
+                  <a:srgbClr val="15362F"/>
+                </a:solidFill>
+                <a:latin typeface="Public Sans"/>
+              </a:defRPr>
+            </a:pPr>
+            <a:r>
+              <a:rPr sz="1200" b="1">
+                <a:solidFill>
+                  <a:srgbClr val="15362F"/>
+                </a:solidFill>
+                <a:latin typeface="Public Sans"/>
+              </a:rPr>
               <a:t>Interaksi Taktil Suara</a:t>
             </a:r>
           </a:p>
           <a:p>
-            <a:pPr>
+            <a:pPr algn="l">
               <a:spcBef>
                 <a:spcPts val="600"/>
               </a:spcBef>
-              <a:defRPr sz="950">
-                <a:solidFill>
-                  <a:srgbClr val="60746D"/>
-                </a:solidFill>
-                <a:latin typeface="Public Sans"/>
-              </a:defRPr>
-            </a:pPr>
-            <a:r>
+              <a:defRPr sz="950" b="0">
+                <a:solidFill>
+                  <a:srgbClr val="587068"/>
+                </a:solidFill>
+                <a:latin typeface="Public Sans"/>
+              </a:defRPr>
+            </a:pPr>
+            <a:r>
+              <a:rPr sz="950" b="0">
+                <a:solidFill>
+                  <a:srgbClr val="587068"/>
+                </a:solidFill>
+                <a:latin typeface="Public Sans"/>
+              </a:rPr>
               <a:t>Pasien menekan tombol Bantuan: 'Kacamata saya di mana?' atau 'Saya sudah minum obat'.</a:t>
             </a:r>
           </a:p>
@@ -6672,11 +7349,11 @@
             <a:avLst/>
           </a:prstGeom>
           <a:solidFill>
-            <a:srgbClr val="E2F1EA"/>
+            <a:srgbClr val="E0EFE8"/>
           </a:solidFill>
           <a:ln w="12700">
             <a:solidFill>
-              <a:srgbClr val="DAE6E0"/>
+              <a:srgbClr val="D8E4DE"/>
             </a:solidFill>
           </a:ln>
         </p:spPr>
@@ -6698,63 +7375,90 @@
           <a:bodyPr rtlCol="0" anchor="ctr" wrap="square" lIns="146304" rIns="146304" tIns="182880"/>
           <a:lstStyle/>
           <a:p>
-            <a:pPr algn="ctr">
+            <a:pPr algn="l">
+              <a:spcBef>
+                <a:spcPts val="0"/>
+              </a:spcBef>
               <a:defRPr sz="2800" b="1">
                 <a:solidFill>
-                  <a:srgbClr val="184438"/>
-                </a:solidFill>
-                <a:latin typeface="Public Sans"/>
-              </a:defRPr>
-            </a:pPr>
-            <a:r>
+                  <a:srgbClr val="164338"/>
+                </a:solidFill>
+                <a:latin typeface="Public Sans"/>
+              </a:defRPr>
+            </a:pPr>
+            <a:r>
+              <a:rPr sz="2800" b="1">
+                <a:solidFill>
+                  <a:srgbClr val="164338"/>
+                </a:solidFill>
+                <a:latin typeface="Public Sans"/>
+              </a:rPr>
               <a:t>04</a:t>
             </a:r>
           </a:p>
           <a:p>
-            <a:pPr>
+            <a:pPr algn="l">
               <a:spcBef>
                 <a:spcPts val="200"/>
               </a:spcBef>
               <a:defRPr sz="850" b="1">
                 <a:solidFill>
-                  <a:srgbClr val="184438"/>
-                </a:solidFill>
-                <a:latin typeface="Public Sans"/>
-              </a:defRPr>
-            </a:pPr>
-            <a:r>
+                  <a:srgbClr val="164338"/>
+                </a:solidFill>
+                <a:latin typeface="Public Sans"/>
+              </a:defRPr>
+            </a:pPr>
+            <a:r>
+              <a:rPr sz="850" b="1">
+                <a:solidFill>
+                  <a:srgbClr val="164338"/>
+                </a:solidFill>
+                <a:latin typeface="Public Sans"/>
+              </a:rPr>
               <a:t>AI CORE</a:t>
             </a:r>
           </a:p>
           <a:p>
-            <a:pPr>
+            <a:pPr algn="l">
               <a:spcBef>
                 <a:spcPts val="800"/>
               </a:spcBef>
               <a:defRPr sz="1200" b="1">
                 <a:solidFill>
-                  <a:srgbClr val="14342C"/>
-                </a:solidFill>
-                <a:latin typeface="Public Sans"/>
-              </a:defRPr>
-            </a:pPr>
-            <a:r>
+                  <a:srgbClr val="15362F"/>
+                </a:solidFill>
+                <a:latin typeface="Public Sans"/>
+              </a:defRPr>
+            </a:pPr>
+            <a:r>
+              <a:rPr sz="1200" b="1">
+                <a:solidFill>
+                  <a:srgbClr val="15362F"/>
+                </a:solidFill>
+                <a:latin typeface="Public Sans"/>
+              </a:rPr>
               <a:t>Gemini Function Calling</a:t>
             </a:r>
           </a:p>
           <a:p>
-            <a:pPr>
+            <a:pPr algn="l">
               <a:spcBef>
                 <a:spcPts val="600"/>
               </a:spcBef>
-              <a:defRPr sz="950">
-                <a:solidFill>
-                  <a:srgbClr val="60746D"/>
-                </a:solidFill>
-                <a:latin typeface="Public Sans"/>
-              </a:defRPr>
-            </a:pPr>
-            <a:r>
+              <a:defRPr sz="950" b="0">
+                <a:solidFill>
+                  <a:srgbClr val="587068"/>
+                </a:solidFill>
+                <a:latin typeface="Public Sans"/>
+              </a:defRPr>
+            </a:pPr>
+            <a:r>
+              <a:rPr sz="950" b="0">
+                <a:solidFill>
+                  <a:srgbClr val="587068"/>
+                </a:solidFill>
+                <a:latin typeface="Public Sans"/>
+              </a:rPr>
               <a:t>AI memanggil tool spesifik (closed-world) &amp; merangkai jawaban ramah TTS Indonesia (1–2 kalimat).</a:t>
             </a:r>
           </a:p>
@@ -6779,7 +7483,7 @@
           </a:solidFill>
           <a:ln w="12700">
             <a:solidFill>
-              <a:srgbClr val="DAE6E0"/>
+              <a:srgbClr val="D8E4DE"/>
             </a:solidFill>
           </a:ln>
         </p:spPr>
@@ -6801,63 +7505,90 @@
           <a:bodyPr rtlCol="0" anchor="ctr" wrap="square" lIns="146304" rIns="146304" tIns="182880"/>
           <a:lstStyle/>
           <a:p>
-            <a:pPr algn="ctr">
+            <a:pPr algn="l">
+              <a:spcBef>
+                <a:spcPts val="0"/>
+              </a:spcBef>
               <a:defRPr sz="2800" b="1">
                 <a:solidFill>
-                  <a:srgbClr val="14342C"/>
-                </a:solidFill>
-                <a:latin typeface="Public Sans"/>
-              </a:defRPr>
-            </a:pPr>
-            <a:r>
+                  <a:srgbClr val="15362F"/>
+                </a:solidFill>
+                <a:latin typeface="Public Sans"/>
+              </a:defRPr>
+            </a:pPr>
+            <a:r>
+              <a:rPr sz="2800" b="1">
+                <a:solidFill>
+                  <a:srgbClr val="15362F"/>
+                </a:solidFill>
+                <a:latin typeface="Public Sans"/>
+              </a:rPr>
               <a:t>05</a:t>
             </a:r>
           </a:p>
           <a:p>
-            <a:pPr>
+            <a:pPr algn="l">
               <a:spcBef>
                 <a:spcPts val="200"/>
               </a:spcBef>
               <a:defRPr sz="850" b="1">
                 <a:solidFill>
-                  <a:srgbClr val="14342C"/>
-                </a:solidFill>
-                <a:latin typeface="Public Sans"/>
-              </a:defRPr>
-            </a:pPr>
-            <a:r>
+                  <a:srgbClr val="15362F"/>
+                </a:solidFill>
+                <a:latin typeface="Public Sans"/>
+              </a:defRPr>
+            </a:pPr>
+            <a:r>
+              <a:rPr sz="850" b="1">
+                <a:solidFill>
+                  <a:srgbClr val="15362F"/>
+                </a:solidFill>
+                <a:latin typeface="Public Sans"/>
+              </a:rPr>
               <a:t>COMMAND</a:t>
             </a:r>
           </a:p>
           <a:p>
-            <a:pPr>
+            <a:pPr algn="l">
               <a:spcBef>
                 <a:spcPts val="800"/>
               </a:spcBef>
               <a:defRPr sz="1200" b="1">
                 <a:solidFill>
-                  <a:srgbClr val="14342C"/>
-                </a:solidFill>
-                <a:latin typeface="Public Sans"/>
-              </a:defRPr>
-            </a:pPr>
-            <a:r>
-              <a:t>Validasi &amp; Eskalasi Cepat</a:t>
-            </a:r>
-          </a:p>
-          <a:p>
-            <a:pPr>
+                  <a:srgbClr val="15362F"/>
+                </a:solidFill>
+                <a:latin typeface="Public Sans"/>
+              </a:defRPr>
+            </a:pPr>
+            <a:r>
+              <a:rPr sz="1200" b="1">
+                <a:solidFill>
+                  <a:srgbClr val="15362F"/>
+                </a:solidFill>
+                <a:latin typeface="Public Sans"/>
+              </a:rPr>
+              <a:t>Validasi &amp; Respons Cepat</a:t>
+            </a:r>
+          </a:p>
+          <a:p>
+            <a:pPr algn="l">
               <a:spcBef>
                 <a:spcPts val="600"/>
               </a:spcBef>
-              <a:defRPr sz="950">
-                <a:solidFill>
-                  <a:srgbClr val="60746D"/>
-                </a:solidFill>
-                <a:latin typeface="Public Sans"/>
-              </a:defRPr>
-            </a:pPr>
-            <a:r>
+              <a:defRPr sz="950" b="0">
+                <a:solidFill>
+                  <a:srgbClr val="587068"/>
+                </a:solidFill>
+                <a:latin typeface="Public Sans"/>
+              </a:defRPr>
+            </a:pPr>
+            <a:r>
+              <a:rPr sz="950" b="0">
+                <a:solidFill>
+                  <a:srgbClr val="587068"/>
+                </a:solidFill>
+                <a:latin typeface="Public Sans"/>
+              </a:rPr>
               <a:t>Laporan masuk ke status 'Butuh Persetujuan'. Panggilan darurat ditangani dengan SLA 10 detik.</a:t>
             </a:r>
           </a:p>
@@ -6878,11 +7609,11 @@
             <a:avLst/>
           </a:prstGeom>
           <a:solidFill>
-            <a:srgbClr val="F2F7F4"/>
+            <a:srgbClr val="F1F6F3"/>
           </a:solidFill>
           <a:ln w="12700">
             <a:solidFill>
-              <a:srgbClr val="DAE6E0"/>
+              <a:srgbClr val="D8E4DE"/>
             </a:solidFill>
           </a:ln>
         </p:spPr>
@@ -6908,7 +7639,7 @@
             <a:r>
               <a:rPr sz="1050" b="1">
                 <a:solidFill>
-                  <a:srgbClr val="14342C"/>
+                  <a:srgbClr val="15362F"/>
                 </a:solidFill>
                 <a:latin typeface="Public Sans"/>
               </a:rPr>
@@ -6917,7 +7648,7 @@
             <a:r>
               <a:rPr sz="1000">
                 <a:solidFill>
-                  <a:srgbClr val="182621"/>
+                  <a:srgbClr val="162621"/>
                 </a:solidFill>
                 <a:latin typeface="Public Sans"/>
               </a:rPr>
@@ -6925,18 +7656,24 @@
             </a:r>
           </a:p>
           <a:p>
-            <a:pPr>
+            <a:pPr algn="l">
               <a:spcBef>
                 <a:spcPts val="300"/>
               </a:spcBef>
-              <a:defRPr sz="950">
-                <a:solidFill>
-                  <a:srgbClr val="60746D"/>
-                </a:solidFill>
-                <a:latin typeface="Public Sans"/>
-              </a:defRPr>
-            </a:pPr>
-            <a:r>
+              <a:defRPr sz="950" b="0">
+                <a:solidFill>
+                  <a:srgbClr val="587068"/>
+                </a:solidFill>
+                <a:latin typeface="Public Sans"/>
+              </a:defRPr>
+            </a:pPr>
+            <a:r>
+              <a:rPr sz="950" b="0">
+                <a:solidFill>
+                  <a:srgbClr val="587068"/>
+                </a:solidFill>
+                <a:latin typeface="Public Sans"/>
+              </a:rPr>
               <a:t>Pemrosesan audio memanfaatkan Web Speech API (id-ID) dengan pemilihan suara Indonesia terbaik di browser pengguna secara otomatis.</a:t>
             </a:r>
           </a:p>
@@ -6975,7 +7712,7 @@
             <a:avLst/>
           </a:prstGeom>
           <a:solidFill>
-            <a:srgbClr val="FAFCFB"/>
+            <a:srgbClr val="F8FAF9"/>
           </a:solidFill>
           <a:ln>
             <a:noFill/>
@@ -7012,17 +7749,17 @@
         <p:spPr>
           <a:xfrm>
             <a:off x="731520" y="384048"/>
-            <a:ext cx="2926080" cy="292608"/>
+            <a:ext cx="3108960" cy="292608"/>
           </a:xfrm>
           <a:prstGeom prst="roundRect">
             <a:avLst/>
           </a:prstGeom>
           <a:solidFill>
-            <a:srgbClr val="E2F1EA"/>
+            <a:srgbClr val="E0EFE8"/>
           </a:solidFill>
           <a:ln w="9525">
             <a:solidFill>
-              <a:srgbClr val="DAE6E0"/>
+              <a:srgbClr val="D8E4DE"/>
             </a:solidFill>
           </a:ln>
         </p:spPr>
@@ -7047,12 +7784,18 @@
             <a:pPr algn="ctr">
               <a:defRPr sz="850" b="1">
                 <a:solidFill>
-                  <a:srgbClr val="184438"/>
-                </a:solidFill>
-                <a:latin typeface="Public Sans"/>
-              </a:defRPr>
-            </a:pPr>
-            <a:r>
+                  <a:srgbClr val="164338"/>
+                </a:solidFill>
+                <a:latin typeface="Public Sans"/>
+              </a:defRPr>
+            </a:pPr>
+            <a:r>
+              <a:rPr b="1">
+                <a:solidFill>
+                  <a:srgbClr val="164338"/>
+                </a:solidFill>
+                <a:latin typeface="Public Sans"/>
+              </a:rPr>
               <a:t>05 / FITUR UNGGULAN &amp; IMPLEMENTASI</a:t>
             </a:r>
           </a:p>
@@ -7066,8 +7809,8 @@
         </p:nvSpPr>
         <p:spPr>
           <a:xfrm>
-            <a:off x="8686800" y="347472"/>
-            <a:ext cx="2773375" cy="320040"/>
+            <a:off x="8412480" y="347472"/>
+            <a:ext cx="3047695" cy="320040"/>
           </a:xfrm>
           <a:prstGeom prst="rect">
             <a:avLst/>
@@ -7083,12 +7826,18 @@
             <a:pPr algn="r">
               <a:defRPr sz="950" b="1">
                 <a:solidFill>
-                  <a:srgbClr val="60746D"/>
-                </a:solidFill>
-                <a:latin typeface="Public Sans"/>
-              </a:defRPr>
-            </a:pPr>
-            <a:r>
+                  <a:srgbClr val="587068"/>
+                </a:solidFill>
+                <a:latin typeface="Public Sans"/>
+              </a:defRPr>
+            </a:pPr>
+            <a:r>
+              <a:rPr b="1">
+                <a:solidFill>
+                  <a:srgbClr val="587068"/>
+                </a:solidFill>
+                <a:latin typeface="Public Sans"/>
+              </a:rPr>
               <a:t>NARAE · INCEPTION 2026</a:t>
             </a:r>
           </a:p>
@@ -7119,12 +7868,18 @@
             <a:pPr>
               <a:defRPr sz="2300" b="1">
                 <a:solidFill>
-                  <a:srgbClr val="14342C"/>
-                </a:solidFill>
-                <a:latin typeface="Public Sans"/>
-              </a:defRPr>
-            </a:pPr>
-            <a:r>
+                  <a:srgbClr val="15362F"/>
+                </a:solidFill>
+                <a:latin typeface="Public Sans"/>
+              </a:defRPr>
+            </a:pPr>
+            <a:r>
+              <a:rPr b="1">
+                <a:solidFill>
+                  <a:srgbClr val="15362F"/>
+                </a:solidFill>
+                <a:latin typeface="Public Sans"/>
+              </a:rPr>
               <a:t>Key Features</a:t>
             </a:r>
           </a:p>
@@ -7135,12 +7890,18 @@
               </a:spcBef>
               <a:defRPr sz="1100">
                 <a:solidFill>
-                  <a:srgbClr val="60746D"/>
-                </a:solidFill>
-                <a:latin typeface="Public Sans"/>
-              </a:defRPr>
-            </a:pPr>
-            <a:r>
+                  <a:srgbClr val="587068"/>
+                </a:solidFill>
+                <a:latin typeface="Public Sans"/>
+              </a:defRPr>
+            </a:pPr>
+            <a:r>
+              <a:rPr>
+                <a:solidFill>
+                  <a:srgbClr val="587068"/>
+                </a:solidFill>
+                <a:latin typeface="Public Sans"/>
+              </a:rPr>
               <a:t>Empat pilar keunggulan teknis yang telah diimplementasikan konkret pada repositori kode NARAE.</a:t>
             </a:r>
           </a:p>
@@ -7165,7 +7926,7 @@
           </a:solidFill>
           <a:ln w="12700">
             <a:solidFill>
-              <a:srgbClr val="DAE6E0"/>
+              <a:srgbClr val="D8E4DE"/>
             </a:solidFill>
           </a:ln>
         </p:spPr>
@@ -7184,84 +7945,10 @@
           </a:fontRef>
         </p:style>
         <p:txBody>
-          <a:bodyPr rtlCol="0" anchor="ctr" wrap="square" lIns="228600" rIns="228600" tIns="457200"/>
-          <a:lstStyle/>
-          <a:p>
-            <a:pPr algn="ctr">
-              <a:defRPr sz="1300" b="1">
-                <a:solidFill>
-                  <a:srgbClr val="14342C"/>
-                </a:solidFill>
-                <a:latin typeface="Public Sans"/>
-              </a:defRPr>
-            </a:pPr>
-            <a:r>
-              <a:t>Simulasi Perangkat Fisik (Three.js Engine)</a:t>
-            </a:r>
-          </a:p>
-          <a:p>
-            <a:pPr>
-              <a:spcBef>
-                <a:spcPts val="200"/>
-              </a:spcBef>
-              <a:defRPr sz="880">
-                <a:solidFill>
-                  <a:srgbClr val="60746D"/>
-                </a:solidFill>
-                <a:latin typeface="Public Sans"/>
-              </a:defRPr>
-            </a:pPr>
-            <a:r>
-              <a:t>• Model 3D prosedural lengkap: tombol Bantuan (merah), Jadwal (biru), LED 3-warna, speaker, &amp; mic.</a:t>
-            </a:r>
-          </a:p>
-          <a:p>
-            <a:pPr>
-              <a:spcBef>
-                <a:spcPts val="200"/>
-              </a:spcBef>
-              <a:defRPr sz="880">
-                <a:solidFill>
-                  <a:srgbClr val="60746D"/>
-                </a:solidFill>
-                <a:latin typeface="Public Sans"/>
-              </a:defRPr>
-            </a:pPr>
-            <a:r>
-              <a:t>• OrbitControls interaktif: rotasi kamera 360°, zoom, reset sudut depan/atas, &amp; auto-rotation.</a:t>
-            </a:r>
-          </a:p>
-          <a:p>
-            <a:pPr>
-              <a:spcBef>
-                <a:spcPts val="200"/>
-              </a:spcBef>
-              <a:defRPr sz="880">
-                <a:solidFill>
-                  <a:srgbClr val="60746D"/>
-                </a:solidFill>
-                <a:latin typeface="Public Sans"/>
-              </a:defRPr>
-            </a:pPr>
-            <a:r>
-              <a:t>• Mode Exploded View (Pecah Komponen) untuk inspeksi struktur arsitektur internal perangkat keras.</a:t>
-            </a:r>
-          </a:p>
-          <a:p>
-            <a:pPr>
-              <a:spcBef>
-                <a:spcPts val="200"/>
-              </a:spcBef>
-              <a:defRPr sz="880">
-                <a:solidFill>
-                  <a:srgbClr val="60746D"/>
-                </a:solidFill>
-                <a:latin typeface="Public Sans"/>
-              </a:defRPr>
-            </a:pPr>
-            <a:r>
-              <a:t>• Web Speech API (STT &amp; TTS id-ID) terintegrasi langsung pada aksi klik tombol 3D.</a:t>
-            </a:r>
+          <a:bodyPr rtlCol="0" anchor="ctr"/>
+          <a:lstStyle/>
+          <a:p>
+            <a:pPr algn="ctr"/>
           </a:p>
         </p:txBody>
       </p:sp>
@@ -7280,7 +7967,7 @@
             <a:avLst/>
           </a:prstGeom>
           <a:solidFill>
-            <a:srgbClr val="E2F1EA"/>
+            <a:srgbClr val="E0EFE8"/>
           </a:solidFill>
           <a:ln>
             <a:noFill/>
@@ -7307,12 +7994,18 @@
             <a:pPr algn="ctr">
               <a:defRPr sz="800" b="1">
                 <a:solidFill>
-                  <a:srgbClr val="184438"/>
-                </a:solidFill>
-                <a:latin typeface="Public Sans"/>
-              </a:defRPr>
-            </a:pPr>
-            <a:r>
+                  <a:srgbClr val="164338"/>
+                </a:solidFill>
+                <a:latin typeface="Public Sans"/>
+              </a:defRPr>
+            </a:pPr>
+            <a:r>
+              <a:rPr b="1">
+                <a:solidFill>
+                  <a:srgbClr val="164338"/>
+                </a:solidFill>
+                <a:latin typeface="Public Sans"/>
+              </a:rPr>
               <a:t>01 / 3D BRACELET SIMULATOR</a:t>
             </a:r>
           </a:p>
@@ -7320,7 +8013,164 @@
       </p:sp>
       <p:sp>
         <p:nvSpPr>
-          <p:cNvPr id="8" name="Rounded Rectangle 7"/>
+          <p:cNvPr id="8" name="TextBox 7"/>
+          <p:cNvSpPr txBox="1"/>
+          <p:nvPr/>
+        </p:nvSpPr>
+        <p:spPr>
+          <a:xfrm>
+            <a:off x="914400" y="2130552"/>
+            <a:ext cx="3108960" cy="1691640"/>
+          </a:xfrm>
+          <a:prstGeom prst="rect">
+            <a:avLst/>
+          </a:prstGeom>
+          <a:noFill/>
+        </p:spPr>
+        <p:txBody>
+          <a:bodyPr wrap="square" lIns="0" tIns="0">
+            <a:spAutoFit/>
+          </a:bodyPr>
+          <a:lstStyle/>
+          <a:p>
+            <a:pPr algn="l">
+              <a:spcBef>
+                <a:spcPts val="0"/>
+              </a:spcBef>
+              <a:defRPr sz="1250" b="1">
+                <a:solidFill>
+                  <a:srgbClr val="15362F"/>
+                </a:solidFill>
+                <a:latin typeface="Public Sans"/>
+              </a:defRPr>
+            </a:pPr>
+            <a:r>
+              <a:rPr sz="1250" b="1">
+                <a:solidFill>
+                  <a:srgbClr val="15362F"/>
+                </a:solidFill>
+                <a:latin typeface="Public Sans"/>
+              </a:rPr>
+              <a:t>Three.js 3D Web Engine</a:t>
+            </a:r>
+          </a:p>
+          <a:p>
+            <a:pPr algn="l">
+              <a:spcBef>
+                <a:spcPts val="200"/>
+              </a:spcBef>
+              <a:defRPr sz="850" b="0">
+                <a:solidFill>
+                  <a:srgbClr val="587068"/>
+                </a:solidFill>
+                <a:latin typeface="Public Sans"/>
+              </a:defRPr>
+            </a:pPr>
+            <a:r>
+              <a:rPr sz="850" b="0">
+                <a:solidFill>
+                  <a:srgbClr val="587068"/>
+                </a:solidFill>
+                <a:latin typeface="Public Sans"/>
+              </a:rPr>
+              <a:t>• Simulasi 3D gelang interaktif di browser (Three.js r128).</a:t>
+            </a:r>
+          </a:p>
+          <a:p>
+            <a:pPr algn="l">
+              <a:spcBef>
+                <a:spcPts val="200"/>
+              </a:spcBef>
+              <a:defRPr sz="850" b="0">
+                <a:solidFill>
+                  <a:srgbClr val="587068"/>
+                </a:solidFill>
+                <a:latin typeface="Public Sans"/>
+              </a:defRPr>
+            </a:pPr>
+            <a:r>
+              <a:rPr sz="850" b="0">
+                <a:solidFill>
+                  <a:srgbClr val="587068"/>
+                </a:solidFill>
+                <a:latin typeface="Public Sans"/>
+              </a:rPr>
+              <a:t>• Tombol Bantuan &amp; Jadwal terhubung Web Speech API.</a:t>
+            </a:r>
+          </a:p>
+          <a:p>
+            <a:pPr algn="l">
+              <a:spcBef>
+                <a:spcPts val="200"/>
+              </a:spcBef>
+              <a:defRPr sz="850" b="0">
+                <a:solidFill>
+                  <a:srgbClr val="587068"/>
+                </a:solidFill>
+                <a:latin typeface="Public Sans"/>
+              </a:defRPr>
+            </a:pPr>
+            <a:r>
+              <a:rPr sz="850" b="0">
+                <a:solidFill>
+                  <a:srgbClr val="587068"/>
+                </a:solidFill>
+                <a:latin typeface="Public Sans"/>
+              </a:rPr>
+              <a:t>• OrbitControls 360°, zoom, &amp; mode Exploded View.</a:t>
+            </a:r>
+          </a:p>
+          <a:p>
+            <a:pPr algn="l">
+              <a:spcBef>
+                <a:spcPts val="200"/>
+              </a:spcBef>
+              <a:defRPr sz="850" b="0">
+                <a:solidFill>
+                  <a:srgbClr val="587068"/>
+                </a:solidFill>
+                <a:latin typeface="Public Sans"/>
+              </a:defRPr>
+            </a:pPr>
+            <a:r>
+              <a:rPr sz="850" b="0">
+                <a:solidFill>
+                  <a:srgbClr val="587068"/>
+                </a:solidFill>
+                <a:latin typeface="Public Sans"/>
+              </a:rPr>
+              <a:t>• Dropdown ganti pasien live tanpa refresh.</a:t>
+            </a:r>
+          </a:p>
+        </p:txBody>
+      </p:sp>
+      <p:pic>
+        <p:nvPicPr>
+          <p:cNvPr id="9" name="Picture 8" descr="sim_cropped.png"/>
+          <p:cNvPicPr>
+            <a:picLocks noChangeAspect="1"/>
+          </p:cNvPicPr>
+          <p:nvPr/>
+        </p:nvPicPr>
+        <p:blipFill>
+          <a:blip r:embed="rId2"/>
+          <a:stretch>
+            <a:fillRect/>
+          </a:stretch>
+        </p:blipFill>
+        <p:spPr>
+          <a:xfrm>
+            <a:off x="4133088" y="2194560"/>
+            <a:ext cx="1645920" cy="1463040"/>
+          </a:xfrm>
+          <a:prstGeom prst="rect">
+            <a:avLst/>
+          </a:prstGeom>
+        </p:spPr>
+      </p:pic>
+      <p:sp>
+        <p:nvSpPr>
+          <p:cNvPr id="10" name="Rounded Rectangle 9"/>
           <p:cNvSpPr/>
           <p:nvPr/>
         </p:nvSpPr>
@@ -7337,7 +8187,7 @@
           </a:solidFill>
           <a:ln w="12700">
             <a:solidFill>
-              <a:srgbClr val="DAE6E0"/>
+              <a:srgbClr val="D8E4DE"/>
             </a:solidFill>
           </a:ln>
         </p:spPr>
@@ -7359,79 +8209,112 @@
           <a:bodyPr rtlCol="0" anchor="ctr" wrap="square" lIns="228600" rIns="228600" tIns="457200"/>
           <a:lstStyle/>
           <a:p>
-            <a:pPr algn="ctr">
+            <a:pPr algn="l">
+              <a:spcBef>
+                <a:spcPts val="0"/>
+              </a:spcBef>
               <a:defRPr sz="1300" b="1">
                 <a:solidFill>
-                  <a:srgbClr val="14342C"/>
-                </a:solidFill>
-                <a:latin typeface="Public Sans"/>
-              </a:defRPr>
-            </a:pPr>
-            <a:r>
+                  <a:srgbClr val="15362F"/>
+                </a:solidFill>
+                <a:latin typeface="Public Sans"/>
+              </a:defRPr>
+            </a:pPr>
+            <a:r>
+              <a:rPr sz="1300" b="1">
+                <a:solidFill>
+                  <a:srgbClr val="15362F"/>
+                </a:solidFill>
+                <a:latin typeface="Public Sans"/>
+              </a:rPr>
               <a:t>Google Gemini Function Calling Loop</a:t>
             </a:r>
           </a:p>
           <a:p>
-            <a:pPr>
+            <a:pPr algn="l">
               <a:spcBef>
                 <a:spcPts val="200"/>
               </a:spcBef>
-              <a:defRPr sz="880">
-                <a:solidFill>
-                  <a:srgbClr val="60746D"/>
-                </a:solidFill>
-                <a:latin typeface="Public Sans"/>
-              </a:defRPr>
-            </a:pPr>
-            <a:r>
+              <a:defRPr sz="880" b="0">
+                <a:solidFill>
+                  <a:srgbClr val="587068"/>
+                </a:solidFill>
+                <a:latin typeface="Public Sans"/>
+              </a:defRPr>
+            </a:pPr>
+            <a:r>
+              <a:rPr sz="880" b="0">
+                <a:solidFill>
+                  <a:srgbClr val="587068"/>
+                </a:solidFill>
+                <a:latin typeface="Public Sans"/>
+              </a:rPr>
               <a:t>• 6 Tools Modular: get_patient_tasks, get_current_datetime, get_belongings, get_belongings_summary, report_task_complete, request_nurse_call.</a:t>
             </a:r>
           </a:p>
           <a:p>
-            <a:pPr>
+            <a:pPr algn="l">
               <a:spcBef>
                 <a:spcPts val="200"/>
               </a:spcBef>
-              <a:defRPr sz="880">
-                <a:solidFill>
-                  <a:srgbClr val="60746D"/>
-                </a:solidFill>
-                <a:latin typeface="Public Sans"/>
-              </a:defRPr>
-            </a:pPr>
-            <a:r>
+              <a:defRPr sz="880" b="0">
+                <a:solidFill>
+                  <a:srgbClr val="587068"/>
+                </a:solidFill>
+                <a:latin typeface="Public Sans"/>
+              </a:defRPr>
+            </a:pPr>
+            <a:r>
+              <a:rPr sz="880" b="0">
+                <a:solidFill>
+                  <a:srgbClr val="587068"/>
+                </a:solidFill>
+                <a:latin typeface="Public Sans"/>
+              </a:rPr>
               <a:t>• Just-In-Time Context Injection (jitContext.ts): Memasukkan nama pasien, perawat pendamping, &amp; catatan klinis secara aman.</a:t>
             </a:r>
           </a:p>
           <a:p>
-            <a:pPr>
+            <a:pPr algn="l">
               <a:spcBef>
                 <a:spcPts val="200"/>
               </a:spcBef>
-              <a:defRPr sz="880">
-                <a:solidFill>
-                  <a:srgbClr val="60746D"/>
-                </a:solidFill>
-                <a:latin typeface="Public Sans"/>
-              </a:defRPr>
-            </a:pPr>
-            <a:r>
+              <a:defRPr sz="880" b="0">
+                <a:solidFill>
+                  <a:srgbClr val="587068"/>
+                </a:solidFill>
+                <a:latin typeface="Public Sans"/>
+              </a:defRPr>
+            </a:pPr>
+            <a:r>
+              <a:rPr sz="880" b="0">
+                <a:solidFill>
+                  <a:srgbClr val="587068"/>
+                </a:solidFill>
+                <a:latin typeface="Public Sans"/>
+              </a:rPr>
               <a:t>• Strict Guardrails: Closed-world assumption, dilarang memberi saran medis/dosis obat.</a:t>
             </a:r>
           </a:p>
           <a:p>
-            <a:pPr>
+            <a:pPr algn="l">
               <a:spcBef>
                 <a:spcPts val="200"/>
               </a:spcBef>
-              <a:defRPr sz="880">
-                <a:solidFill>
-                  <a:srgbClr val="60746D"/>
-                </a:solidFill>
-                <a:latin typeface="Public Sans"/>
-              </a:defRPr>
-            </a:pPr>
-            <a:r>
+              <a:defRPr sz="880" b="0">
+                <a:solidFill>
+                  <a:srgbClr val="587068"/>
+                </a:solidFill>
+                <a:latin typeface="Public Sans"/>
+              </a:defRPr>
+            </a:pPr>
+            <a:r>
+              <a:rPr sz="880" b="0">
+                <a:solidFill>
+                  <a:srgbClr val="587068"/>
+                </a:solidFill>
+                <a:latin typeface="Public Sans"/>
+              </a:rPr>
               <a:t>• Jawaban ringkas maksimal 1–2 kalimat siap dibacakan oleh mesin TTS.</a:t>
             </a:r>
           </a:p>
@@ -7439,7 +8322,7 @@
       </p:sp>
       <p:sp>
         <p:nvSpPr>
-          <p:cNvPr id="9" name="Rounded Rectangle 8"/>
+          <p:cNvPr id="11" name="Rounded Rectangle 10"/>
           <p:cNvSpPr/>
           <p:nvPr/>
         </p:nvSpPr>
@@ -7452,7 +8335,7 @@
             <a:avLst/>
           </a:prstGeom>
           <a:solidFill>
-            <a:srgbClr val="F2F7F4"/>
+            <a:srgbClr val="F1F6F3"/>
           </a:solidFill>
           <a:ln>
             <a:noFill/>
@@ -7479,12 +8362,18 @@
             <a:pPr algn="ctr">
               <a:defRPr sz="800" b="1">
                 <a:solidFill>
-                  <a:srgbClr val="14342C"/>
-                </a:solidFill>
-                <a:latin typeface="Public Sans"/>
-              </a:defRPr>
-            </a:pPr>
-            <a:r>
+                  <a:srgbClr val="15362F"/>
+                </a:solidFill>
+                <a:latin typeface="Public Sans"/>
+              </a:defRPr>
+            </a:pPr>
+            <a:r>
+              <a:rPr b="1">
+                <a:solidFill>
+                  <a:srgbClr val="15362F"/>
+                </a:solidFill>
+                <a:latin typeface="Public Sans"/>
+              </a:rPr>
               <a:t>02 / AI COMPANION (GEMINI)</a:t>
             </a:r>
           </a:p>
@@ -7492,7 +8381,7 @@
       </p:sp>
       <p:sp>
         <p:nvSpPr>
-          <p:cNvPr id="10" name="Rounded Rectangle 9"/>
+          <p:cNvPr id="12" name="Rounded Rectangle 11"/>
           <p:cNvSpPr/>
           <p:nvPr/>
         </p:nvSpPr>
@@ -7509,7 +8398,7 @@
           </a:solidFill>
           <a:ln w="12700">
             <a:solidFill>
-              <a:srgbClr val="DAE6E0"/>
+              <a:srgbClr val="D8E4DE"/>
             </a:solidFill>
           </a:ln>
         </p:spPr>
@@ -7531,79 +8420,112 @@
           <a:bodyPr rtlCol="0" anchor="ctr" wrap="square" lIns="228600" rIns="228600" tIns="457200"/>
           <a:lstStyle/>
           <a:p>
-            <a:pPr algn="ctr">
+            <a:pPr algn="l">
+              <a:spcBef>
+                <a:spcPts val="0"/>
+              </a:spcBef>
               <a:defRPr sz="1300" b="1">
                 <a:solidFill>
-                  <a:srgbClr val="14342C"/>
-                </a:solidFill>
-                <a:latin typeface="Public Sans"/>
-              </a:defRPr>
-            </a:pPr>
-            <a:r>
+                  <a:srgbClr val="15362F"/>
+                </a:solidFill>
+                <a:latin typeface="Public Sans"/>
+              </a:defRPr>
+            </a:pPr>
+            <a:r>
+              <a:rPr sz="1300" b="1">
+                <a:solidFill>
+                  <a:srgbClr val="15362F"/>
+                </a:solidFill>
+                <a:latin typeface="Public Sans"/>
+              </a:rPr>
               <a:t>Dashboard &amp; Manajemen Konflik Jadwal</a:t>
             </a:r>
           </a:p>
           <a:p>
-            <a:pPr>
+            <a:pPr algn="l">
               <a:spcBef>
                 <a:spcPts val="200"/>
               </a:spcBef>
-              <a:defRPr sz="880">
-                <a:solidFill>
-                  <a:srgbClr val="60746D"/>
-                </a:solidFill>
-                <a:latin typeface="Public Sans"/>
-              </a:defRPr>
-            </a:pPr>
-            <a:r>
+              <a:defRPr sz="880" b="0">
+                <a:solidFill>
+                  <a:srgbClr val="587068"/>
+                </a:solidFill>
+                <a:latin typeface="Public Sans"/>
+              </a:defRPr>
+            </a:pPr>
+            <a:r>
+              <a:rPr sz="880" b="0">
+                <a:solidFill>
+                  <a:srgbClr val="587068"/>
+                </a:solidFill>
+                <a:latin typeface="Public Sans"/>
+              </a:rPr>
               <a:t>• Mockup Mobile Shell berbingkai ponsel di atas dark workbench modern (#141820).</a:t>
             </a:r>
           </a:p>
           <a:p>
-            <a:pPr>
+            <a:pPr algn="l">
               <a:spcBef>
                 <a:spcPts val="200"/>
               </a:spcBef>
-              <a:defRPr sz="880">
-                <a:solidFill>
-                  <a:srgbClr val="60746D"/>
-                </a:solidFill>
-                <a:latin typeface="Public Sans"/>
-              </a:defRPr>
-            </a:pPr>
-            <a:r>
+              <a:defRPr sz="880" b="0">
+                <a:solidFill>
+                  <a:srgbClr val="587068"/>
+                </a:solidFill>
+                <a:latin typeface="Public Sans"/>
+              </a:defRPr>
+            </a:pPr>
+            <a:r>
+              <a:rPr sz="880" b="0">
+                <a:solidFill>
+                  <a:srgbClr val="587068"/>
+                </a:solidFill>
+                <a:latin typeface="Public Sans"/>
+              </a:rPr>
               <a:t>• Deteksi Bentrok Jadwal Otomatis (TaskConflictSheet) dengan opsi geser jam atau nonaktifkan.</a:t>
             </a:r>
           </a:p>
           <a:p>
-            <a:pPr>
+            <a:pPr algn="l">
               <a:spcBef>
                 <a:spcPts val="200"/>
               </a:spcBef>
-              <a:defRPr sz="880">
-                <a:solidFill>
-                  <a:srgbClr val="60746D"/>
-                </a:solidFill>
-                <a:latin typeface="Public Sans"/>
-              </a:defRPr>
-            </a:pPr>
-            <a:r>
+              <a:defRPr sz="880" b="0">
+                <a:solidFill>
+                  <a:srgbClr val="587068"/>
+                </a:solidFill>
+                <a:latin typeface="Public Sans"/>
+              </a:defRPr>
+            </a:pPr>
+            <a:r>
+              <a:rPr sz="880" b="0">
+                <a:solidFill>
+                  <a:srgbClr val="587068"/>
+                </a:solidFill>
+                <a:latin typeface="Public Sans"/>
+              </a:rPr>
               <a:t>• Verifikasi Laporan Pasien 1-Klik: Menyetujui klaim suara pasien menjadi status Selesai.</a:t>
             </a:r>
           </a:p>
           <a:p>
-            <a:pPr>
+            <a:pPr algn="l">
               <a:spcBef>
                 <a:spcPts val="200"/>
               </a:spcBef>
-              <a:defRPr sz="880">
-                <a:solidFill>
-                  <a:srgbClr val="60746D"/>
-                </a:solidFill>
-                <a:latin typeface="Public Sans"/>
-              </a:defRPr>
-            </a:pPr>
-            <a:r>
+              <a:defRPr sz="880" b="0">
+                <a:solidFill>
+                  <a:srgbClr val="587068"/>
+                </a:solidFill>
+                <a:latin typeface="Public Sans"/>
+              </a:defRPr>
+            </a:pPr>
+            <a:r>
+              <a:rPr sz="880" b="0">
+                <a:solidFill>
+                  <a:srgbClr val="587068"/>
+                </a:solidFill>
+                <a:latin typeface="Public Sans"/>
+              </a:rPr>
               <a:t>• Audit Trail Lengkap: Riwayat perubahan status kegiatan &amp; transkrip percakapan AI harian.</a:t>
             </a:r>
           </a:p>
@@ -7611,7 +8533,7 @@
       </p:sp>
       <p:sp>
         <p:nvSpPr>
-          <p:cNvPr id="11" name="Rounded Rectangle 10"/>
+          <p:cNvPr id="13" name="Rounded Rectangle 12"/>
           <p:cNvSpPr/>
           <p:nvPr/>
         </p:nvSpPr>
@@ -7624,7 +8546,7 @@
             <a:avLst/>
           </a:prstGeom>
           <a:solidFill>
-            <a:srgbClr val="F2F7F4"/>
+            <a:srgbClr val="F1F6F3"/>
           </a:solidFill>
           <a:ln>
             <a:noFill/>
@@ -7651,12 +8573,18 @@
             <a:pPr algn="ctr">
               <a:defRPr sz="800" b="1">
                 <a:solidFill>
-                  <a:srgbClr val="14342C"/>
-                </a:solidFill>
-                <a:latin typeface="Public Sans"/>
-              </a:defRPr>
-            </a:pPr>
-            <a:r>
+                  <a:srgbClr val="15362F"/>
+                </a:solidFill>
+                <a:latin typeface="Public Sans"/>
+              </a:defRPr>
+            </a:pPr>
+            <a:r>
+              <a:rPr b="1">
+                <a:solidFill>
+                  <a:srgbClr val="15362F"/>
+                </a:solidFill>
+                <a:latin typeface="Public Sans"/>
+              </a:rPr>
               <a:t>03 / CAREGIVER HUB</a:t>
             </a:r>
           </a:p>
@@ -7664,7 +8592,7 @@
       </p:sp>
       <p:sp>
         <p:nvSpPr>
-          <p:cNvPr id="12" name="Rounded Rectangle 11"/>
+          <p:cNvPr id="14" name="Rounded Rectangle 13"/>
           <p:cNvSpPr/>
           <p:nvPr/>
         </p:nvSpPr>
@@ -7681,7 +8609,7 @@
           </a:solidFill>
           <a:ln w="12700">
             <a:solidFill>
-              <a:srgbClr val="DAE6E0"/>
+              <a:srgbClr val="D8E4DE"/>
             </a:solidFill>
           </a:ln>
         </p:spPr>
@@ -7703,79 +8631,112 @@
           <a:bodyPr rtlCol="0" anchor="ctr" wrap="square" lIns="228600" rIns="228600" tIns="457200"/>
           <a:lstStyle/>
           <a:p>
-            <a:pPr algn="ctr">
+            <a:pPr algn="l">
+              <a:spcBef>
+                <a:spcPts val="0"/>
+              </a:spcBef>
               <a:defRPr sz="1300" b="1">
                 <a:solidFill>
-                  <a:srgbClr val="14342C"/>
-                </a:solidFill>
-                <a:latin typeface="Public Sans"/>
-              </a:defRPr>
-            </a:pPr>
-            <a:r>
+                  <a:srgbClr val="15362F"/>
+                </a:solidFill>
+                <a:latin typeface="Public Sans"/>
+              </a:defRPr>
+            </a:pPr>
+            <a:r>
+              <a:rPr sz="1300" b="1">
+                <a:solidFill>
+                  <a:srgbClr val="15362F"/>
+                </a:solidFill>
+                <a:latin typeface="Public Sans"/>
+              </a:rPr>
               <a:t>Multi-Tenant &amp; Evaluasi Waktu Konsisten</a:t>
             </a:r>
           </a:p>
           <a:p>
-            <a:pPr>
+            <a:pPr algn="l">
               <a:spcBef>
                 <a:spcPts val="200"/>
               </a:spcBef>
-              <a:defRPr sz="880">
-                <a:solidFill>
-                  <a:srgbClr val="60746D"/>
-                </a:solidFill>
-                <a:latin typeface="Public Sans"/>
-              </a:defRPr>
-            </a:pPr>
-            <a:r>
+              <a:defRPr sz="880" b="0">
+                <a:solidFill>
+                  <a:srgbClr val="587068"/>
+                </a:solidFill>
+                <a:latin typeface="Public Sans"/>
+              </a:defRPr>
+            </a:pPr>
+            <a:r>
+              <a:rPr sz="880" b="0">
+                <a:solidFill>
+                  <a:srgbClr val="587068"/>
+                </a:solidFill>
+                <a:latin typeface="Public Sans"/>
+              </a:rPr>
               <a:t>• Dukungan skenario 1 Perawat : 1 Pasien (suster.satu) &amp; 1 Perawat : Banyak Pasien (suster.banyak).</a:t>
             </a:r>
           </a:p>
           <a:p>
-            <a:pPr>
+            <a:pPr algn="l">
               <a:spcBef>
                 <a:spcPts val="200"/>
               </a:spcBef>
-              <a:defRPr sz="880">
-                <a:solidFill>
-                  <a:srgbClr val="60746D"/>
-                </a:solidFill>
-                <a:latin typeface="Public Sans"/>
-              </a:defRPr>
-            </a:pPr>
-            <a:r>
+              <a:defRPr sz="880" b="0">
+                <a:solidFill>
+                  <a:srgbClr val="587068"/>
+                </a:solidFill>
+                <a:latin typeface="Public Sans"/>
+              </a:defRPr>
+            </a:pPr>
+            <a:r>
+              <a:rPr sz="880" b="0">
+                <a:solidFill>
+                  <a:srgbClr val="587068"/>
+                </a:solidFill>
+                <a:latin typeface="Public Sans"/>
+              </a:rPr>
               <a:t>• Sinkronisasi simulator &amp; dashboard instan saat berganti pasien via patient switcher.</a:t>
             </a:r>
           </a:p>
           <a:p>
-            <a:pPr>
+            <a:pPr algn="l">
               <a:spcBef>
                 <a:spcPts val="200"/>
               </a:spcBef>
-              <a:defRPr sz="880">
-                <a:solidFill>
-                  <a:srgbClr val="60746D"/>
-                </a:solidFill>
-                <a:latin typeface="Public Sans"/>
-              </a:defRPr>
-            </a:pPr>
-            <a:r>
+              <a:defRPr sz="880" b="0">
+                <a:solidFill>
+                  <a:srgbClr val="587068"/>
+                </a:solidFill>
+                <a:latin typeface="Public Sans"/>
+              </a:defRPr>
+            </a:pPr>
+            <a:r>
+              <a:rPr sz="880" b="0">
+                <a:solidFill>
+                  <a:srgbClr val="587068"/>
+                </a:solidFill>
+                <a:latin typeface="Public Sans"/>
+              </a:rPr>
               <a:t>• Evaluasi Waktu Berbasis WIB (Asia/Jakarta): Custom SQL DATE parser mencegah pergeseran zona waktu.</a:t>
             </a:r>
           </a:p>
           <a:p>
-            <a:pPr>
+            <a:pPr algn="l">
               <a:spcBef>
                 <a:spcPts val="200"/>
               </a:spcBef>
-              <a:defRPr sz="880">
-                <a:solidFill>
-                  <a:srgbClr val="60746D"/>
-                </a:solidFill>
-                <a:latin typeface="Public Sans"/>
-              </a:defRPr>
-            </a:pPr>
-            <a:r>
+              <a:defRPr sz="880" b="0">
+                <a:solidFill>
+                  <a:srgbClr val="587068"/>
+                </a:solidFill>
+                <a:latin typeface="Public Sans"/>
+              </a:defRPr>
+            </a:pPr>
+            <a:r>
+              <a:rPr sz="880" b="0">
+                <a:solidFill>
+                  <a:srgbClr val="587068"/>
+                </a:solidFill>
+                <a:latin typeface="Public Sans"/>
+              </a:rPr>
               <a:t>• Otomasi Status MISSED: Menandai tugas terlewat jika melewati jam mulai + durasi aktivitas.</a:t>
             </a:r>
           </a:p>
@@ -7783,7 +8744,7 @@
       </p:sp>
       <p:sp>
         <p:nvSpPr>
-          <p:cNvPr id="13" name="Rounded Rectangle 12"/>
+          <p:cNvPr id="15" name="Rounded Rectangle 14"/>
           <p:cNvSpPr/>
           <p:nvPr/>
         </p:nvSpPr>
@@ -7796,7 +8757,7 @@
             <a:avLst/>
           </a:prstGeom>
           <a:solidFill>
-            <a:srgbClr val="E2F1EA"/>
+            <a:srgbClr val="E0EFE8"/>
           </a:solidFill>
           <a:ln>
             <a:noFill/>
@@ -7823,12 +8784,18 @@
             <a:pPr algn="ctr">
               <a:defRPr sz="800" b="1">
                 <a:solidFill>
-                  <a:srgbClr val="184438"/>
-                </a:solidFill>
-                <a:latin typeface="Public Sans"/>
-              </a:defRPr>
-            </a:pPr>
-            <a:r>
+                  <a:srgbClr val="164338"/>
+                </a:solidFill>
+                <a:latin typeface="Public Sans"/>
+              </a:defRPr>
+            </a:pPr>
+            <a:r>
+              <a:rPr b="1">
+                <a:solidFill>
+                  <a:srgbClr val="164338"/>
+                </a:solidFill>
+                <a:latin typeface="Public Sans"/>
+              </a:rPr>
               <a:t>04 / MULTI-TENANT &amp; TIMEZONE</a:t>
             </a:r>
           </a:p>
@@ -7867,7 +8834,7 @@
             <a:avLst/>
           </a:prstGeom>
           <a:solidFill>
-            <a:srgbClr val="FAFCFB"/>
+            <a:srgbClr val="F8FAF9"/>
           </a:solidFill>
           <a:ln>
             <a:noFill/>
@@ -7904,17 +8871,17 @@
         <p:spPr>
           <a:xfrm>
             <a:off x="731520" y="384048"/>
-            <a:ext cx="2926080" cy="292608"/>
+            <a:ext cx="3108960" cy="292608"/>
           </a:xfrm>
           <a:prstGeom prst="roundRect">
             <a:avLst/>
           </a:prstGeom>
           <a:solidFill>
-            <a:srgbClr val="E2F1EA"/>
+            <a:srgbClr val="E0EFE8"/>
           </a:solidFill>
           <a:ln w="9525">
             <a:solidFill>
-              <a:srgbClr val="DAE6E0"/>
+              <a:srgbClr val="D8E4DE"/>
             </a:solidFill>
           </a:ln>
         </p:spPr>
@@ -7939,12 +8906,18 @@
             <a:pPr algn="ctr">
               <a:defRPr sz="850" b="1">
                 <a:solidFill>
-                  <a:srgbClr val="184438"/>
-                </a:solidFill>
-                <a:latin typeface="Public Sans"/>
-              </a:defRPr>
-            </a:pPr>
-            <a:r>
+                  <a:srgbClr val="164338"/>
+                </a:solidFill>
+                <a:latin typeface="Public Sans"/>
+              </a:defRPr>
+            </a:pPr>
+            <a:r>
+              <a:rPr b="1">
+                <a:solidFill>
+                  <a:srgbClr val="164338"/>
+                </a:solidFill>
+                <a:latin typeface="Public Sans"/>
+              </a:rPr>
               <a:t>06 / ARSITEKTUR &amp; TEKNOLOGI</a:t>
             </a:r>
           </a:p>
@@ -7958,8 +8931,8 @@
         </p:nvSpPr>
         <p:spPr>
           <a:xfrm>
-            <a:off x="8686800" y="347472"/>
-            <a:ext cx="2773375" cy="320040"/>
+            <a:off x="8412480" y="347472"/>
+            <a:ext cx="3047695" cy="320040"/>
           </a:xfrm>
           <a:prstGeom prst="rect">
             <a:avLst/>
@@ -7975,12 +8948,18 @@
             <a:pPr algn="r">
               <a:defRPr sz="950" b="1">
                 <a:solidFill>
-                  <a:srgbClr val="60746D"/>
-                </a:solidFill>
-                <a:latin typeface="Public Sans"/>
-              </a:defRPr>
-            </a:pPr>
-            <a:r>
+                  <a:srgbClr val="587068"/>
+                </a:solidFill>
+                <a:latin typeface="Public Sans"/>
+              </a:defRPr>
+            </a:pPr>
+            <a:r>
+              <a:rPr b="1">
+                <a:solidFill>
+                  <a:srgbClr val="587068"/>
+                </a:solidFill>
+                <a:latin typeface="Public Sans"/>
+              </a:rPr>
               <a:t>NARAE · INCEPTION 2026</a:t>
             </a:r>
           </a:p>
@@ -8011,12 +8990,18 @@
             <a:pPr>
               <a:defRPr sz="2300" b="1">
                 <a:solidFill>
-                  <a:srgbClr val="14342C"/>
-                </a:solidFill>
-                <a:latin typeface="Public Sans"/>
-              </a:defRPr>
-            </a:pPr>
-            <a:r>
+                  <a:srgbClr val="15362F"/>
+                </a:solidFill>
+                <a:latin typeface="Public Sans"/>
+              </a:defRPr>
+            </a:pPr>
+            <a:r>
+              <a:rPr b="1">
+                <a:solidFill>
+                  <a:srgbClr val="15362F"/>
+                </a:solidFill>
+                <a:latin typeface="Public Sans"/>
+              </a:rPr>
               <a:t>Technology &amp; Architecture</a:t>
             </a:r>
           </a:p>
@@ -8027,12 +9012,18 @@
               </a:spcBef>
               <a:defRPr sz="1100">
                 <a:solidFill>
-                  <a:srgbClr val="60746D"/>
-                </a:solidFill>
-                <a:latin typeface="Public Sans"/>
-              </a:defRPr>
-            </a:pPr>
-            <a:r>
+                  <a:srgbClr val="587068"/>
+                </a:solidFill>
+                <a:latin typeface="Public Sans"/>
+              </a:defRPr>
+            </a:pPr>
+            <a:r>
+              <a:rPr>
+                <a:solidFill>
+                  <a:srgbClr val="587068"/>
+                </a:solidFill>
+                <a:latin typeface="Public Sans"/>
+              </a:rPr>
               <a:t>Arsitektur berlapis berstandar produksi dengan modul AI terisolasi dan orkestrasi Docker.</a:t>
             </a:r>
           </a:p>
@@ -8047,7 +9038,7 @@
         <p:spPr>
           <a:xfrm>
             <a:off x="731520" y="1691640"/>
-            <a:ext cx="5486400" cy="4572000"/>
+            <a:ext cx="5486400" cy="4663440"/>
           </a:xfrm>
           <a:prstGeom prst="roundRect">
             <a:avLst/>
@@ -8057,7 +9048,7 @@
           </a:solidFill>
           <a:ln w="12700">
             <a:solidFill>
-              <a:srgbClr val="DAE6E0"/>
+              <a:srgbClr val="D8E4DE"/>
             </a:solidFill>
           </a:ln>
         </p:spPr>
@@ -8081,22 +9072,6 @@
           <a:p>
             <a:pPr algn="ctr"/>
           </a:p>
-          <a:p>
-            <a:pPr>
-              <a:spcBef>
-                <a:spcPts val="29500"/>
-              </a:spcBef>
-              <a:defRPr sz="850">
-                <a:solidFill>
-                  <a:srgbClr val="60746D"/>
-                </a:solidFill>
-                <a:latin typeface="Public Sans"/>
-              </a:defRPr>
-            </a:pPr>
-            <a:r>
-              <a:t>Arsitektur berlapis: Simulator 3D &amp; Frontend memanggil API Express berlapis, terhubung ke modul @narae/agent dan PostgreSQL 16.</a:t>
-            </a:r>
-          </a:p>
         </p:txBody>
       </p:sp>
       <p:sp>
@@ -8114,7 +9089,7 @@
             <a:avLst/>
           </a:prstGeom>
           <a:solidFill>
-            <a:srgbClr val="E2F1EA"/>
+            <a:srgbClr val="E0EFE8"/>
           </a:solidFill>
           <a:ln>
             <a:noFill/>
@@ -8141,12 +9116,18 @@
             <a:pPr algn="ctr">
               <a:defRPr sz="800" b="1">
                 <a:solidFill>
-                  <a:srgbClr val="184438"/>
-                </a:solidFill>
-                <a:latin typeface="Public Sans"/>
-              </a:defRPr>
-            </a:pPr>
-            <a:r>
+                  <a:srgbClr val="164338"/>
+                </a:solidFill>
+                <a:latin typeface="Public Sans"/>
+              </a:defRPr>
+            </a:pPr>
+            <a:r>
+              <a:rPr b="1">
+                <a:solidFill>
+                  <a:srgbClr val="164338"/>
+                </a:solidFill>
+                <a:latin typeface="Public Sans"/>
+              </a:rPr>
               <a:t>DIAGRAM ARSITEKTUR END-TO-END</a:t>
             </a:r>
           </a:p>
@@ -8168,8 +9149,8 @@
         </p:blipFill>
         <p:spPr>
           <a:xfrm>
-            <a:off x="868680" y="2194560"/>
-            <a:ext cx="5212080" cy="3291840"/>
+            <a:off x="868680" y="2148840"/>
+            <a:ext cx="5212080" cy="3383280"/>
           </a:xfrm>
           <a:prstGeom prst="rect">
             <a:avLst/>
@@ -8178,7 +9159,52 @@
       </p:pic>
       <p:sp>
         <p:nvSpPr>
-          <p:cNvPr id="9" name="Rounded Rectangle 8"/>
+          <p:cNvPr id="9" name="TextBox 8"/>
+          <p:cNvSpPr txBox="1"/>
+          <p:nvPr/>
+        </p:nvSpPr>
+        <p:spPr>
+          <a:xfrm>
+            <a:off x="868680" y="5623560"/>
+            <a:ext cx="5212080" cy="594360"/>
+          </a:xfrm>
+          <a:prstGeom prst="rect">
+            <a:avLst/>
+          </a:prstGeom>
+          <a:noFill/>
+        </p:spPr>
+        <p:txBody>
+          <a:bodyPr wrap="square" tIns="0" lIns="0">
+            <a:spAutoFit/>
+          </a:bodyPr>
+          <a:lstStyle/>
+          <a:p>
+            <a:pPr algn="l">
+              <a:spcBef>
+                <a:spcPts val="0"/>
+              </a:spcBef>
+              <a:defRPr sz="850" b="0">
+                <a:solidFill>
+                  <a:srgbClr val="587068"/>
+                </a:solidFill>
+                <a:latin typeface="Public Sans"/>
+              </a:defRPr>
+            </a:pPr>
+            <a:r>
+              <a:rPr sz="850" b="0">
+                <a:solidFill>
+                  <a:srgbClr val="587068"/>
+                </a:solidFill>
+                <a:latin typeface="Public Sans"/>
+              </a:rPr>
+              <a:t>Arsitektur berlapis: Simulator 3D &amp; Frontend memanggil Express API berlapis, terhubung ke modul @narae/agent dan PostgreSQL 16.</a:t>
+            </a:r>
+          </a:p>
+        </p:txBody>
+      </p:sp>
+      <p:sp>
+        <p:nvSpPr>
+          <p:cNvPr id="10" name="Rounded Rectangle 9"/>
           <p:cNvSpPr/>
           <p:nvPr/>
         </p:nvSpPr>
@@ -8195,7 +9221,7 @@
           </a:solidFill>
           <a:ln w="12700">
             <a:solidFill>
-              <a:srgbClr val="DAE6E0"/>
+              <a:srgbClr val="D8E4DE"/>
             </a:solidFill>
           </a:ln>
         </p:spPr>
@@ -8214,50 +9240,71 @@
           </a:fontRef>
         </p:style>
         <p:txBody>
-          <a:bodyPr rtlCol="0" anchor="ctr" wrap="square" lIns="182880" rIns="182880" tIns="91440"/>
-          <a:lstStyle/>
-          <a:p>
-            <a:pPr algn="ctr">
+          <a:bodyPr rtlCol="0" anchor="ctr" wrap="square" lIns="182880" rIns="182880" tIns="109728"/>
+          <a:lstStyle/>
+          <a:p>
+            <a:pPr algn="l">
+              <a:spcBef>
+                <a:spcPts val="0"/>
+              </a:spcBef>
               <a:defRPr sz="1100" b="1">
                 <a:solidFill>
-                  <a:srgbClr val="14342C"/>
-                </a:solidFill>
-                <a:latin typeface="Public Sans"/>
-              </a:defRPr>
-            </a:pPr>
-            <a:r>
+                  <a:srgbClr val="15362F"/>
+                </a:solidFill>
+                <a:latin typeface="Public Sans"/>
+              </a:defRPr>
+            </a:pPr>
+            <a:r>
+              <a:rPr sz="1100" b="1">
+                <a:solidFill>
+                  <a:srgbClr val="15362F"/>
+                </a:solidFill>
+                <a:latin typeface="Public Sans"/>
+              </a:rPr>
               <a:t>Frontend &amp; 3D Engine</a:t>
             </a:r>
           </a:p>
           <a:p>
-            <a:pPr>
+            <a:pPr algn="l">
               <a:spcBef>
                 <a:spcPts val="100"/>
               </a:spcBef>
               <a:defRPr sz="950" b="1">
                 <a:solidFill>
-                  <a:srgbClr val="204A40"/>
-                </a:solidFill>
-                <a:latin typeface="Public Sans"/>
-              </a:defRPr>
-            </a:pPr>
-            <a:r>
+                  <a:srgbClr val="234E44"/>
+                </a:solidFill>
+                <a:latin typeface="Public Sans"/>
+              </a:defRPr>
+            </a:pPr>
+            <a:r>
+              <a:rPr sz="950" b="1">
+                <a:solidFill>
+                  <a:srgbClr val="234E44"/>
+                </a:solidFill>
+                <a:latin typeface="Public Sans"/>
+              </a:rPr>
               <a:t>React 18 · TypeScript 5 · Vite 5 · Tailwind CSS v4 · Three.js r128</a:t>
             </a:r>
           </a:p>
           <a:p>
-            <a:pPr>
+            <a:pPr algn="l">
               <a:spcBef>
                 <a:spcPts val="200"/>
               </a:spcBef>
-              <a:defRPr sz="880">
-                <a:solidFill>
-                  <a:srgbClr val="60746D"/>
-                </a:solidFill>
-                <a:latin typeface="Public Sans"/>
-              </a:defRPr>
-            </a:pPr>
-            <a:r>
+              <a:defRPr sz="880" b="0">
+                <a:solidFill>
+                  <a:srgbClr val="587068"/>
+                </a:solidFill>
+                <a:latin typeface="Public Sans"/>
+              </a:defRPr>
+            </a:pPr>
+            <a:r>
+              <a:rPr sz="880" b="0">
+                <a:solidFill>
+                  <a:srgbClr val="587068"/>
+                </a:solidFill>
+                <a:latin typeface="Public Sans"/>
+              </a:rPr>
               <a:t>Mobile shell berbingkai HP, visualisasi 3D gelang prosedural, Web Speech API (STT &amp; TTS id-ID).</a:t>
             </a:r>
           </a:p>
@@ -8265,13 +9312,13 @@
       </p:sp>
       <p:sp>
         <p:nvSpPr>
-          <p:cNvPr id="10" name="Rounded Rectangle 9"/>
+          <p:cNvPr id="11" name="Rounded Rectangle 10"/>
           <p:cNvSpPr/>
           <p:nvPr/>
         </p:nvSpPr>
         <p:spPr>
           <a:xfrm>
-            <a:off x="6400800" y="2852928"/>
+            <a:off x="6400800" y="2871216"/>
             <a:ext cx="5059375" cy="1051560"/>
           </a:xfrm>
           <a:prstGeom prst="roundRect">
@@ -8282,7 +9329,7 @@
           </a:solidFill>
           <a:ln w="12700">
             <a:solidFill>
-              <a:srgbClr val="DAE6E0"/>
+              <a:srgbClr val="D8E4DE"/>
             </a:solidFill>
           </a:ln>
         </p:spPr>
@@ -8301,50 +9348,71 @@
           </a:fontRef>
         </p:style>
         <p:txBody>
-          <a:bodyPr rtlCol="0" anchor="ctr" wrap="square" lIns="182880" rIns="182880" tIns="91440"/>
-          <a:lstStyle/>
-          <a:p>
-            <a:pPr algn="ctr">
+          <a:bodyPr rtlCol="0" anchor="ctr" wrap="square" lIns="182880" rIns="182880" tIns="109728"/>
+          <a:lstStyle/>
+          <a:p>
+            <a:pPr algn="l">
+              <a:spcBef>
+                <a:spcPts val="0"/>
+              </a:spcBef>
               <a:defRPr sz="1100" b="1">
                 <a:solidFill>
-                  <a:srgbClr val="14342C"/>
-                </a:solidFill>
-                <a:latin typeface="Public Sans"/>
-              </a:defRPr>
-            </a:pPr>
-            <a:r>
+                  <a:srgbClr val="15362F"/>
+                </a:solidFill>
+                <a:latin typeface="Public Sans"/>
+              </a:defRPr>
+            </a:pPr>
+            <a:r>
+              <a:rPr sz="1100" b="1">
+                <a:solidFill>
+                  <a:srgbClr val="15362F"/>
+                </a:solidFill>
+                <a:latin typeface="Public Sans"/>
+              </a:rPr>
               <a:t>Backend API &amp; Logic</a:t>
             </a:r>
           </a:p>
           <a:p>
-            <a:pPr>
+            <a:pPr algn="l">
               <a:spcBef>
                 <a:spcPts val="100"/>
               </a:spcBef>
               <a:defRPr sz="950" b="1">
                 <a:solidFill>
-                  <a:srgbClr val="204A40"/>
-                </a:solidFill>
-                <a:latin typeface="Public Sans"/>
-              </a:defRPr>
-            </a:pPr>
-            <a:r>
+                  <a:srgbClr val="234E44"/>
+                </a:solidFill>
+                <a:latin typeface="Public Sans"/>
+              </a:defRPr>
+            </a:pPr>
+            <a:r>
+              <a:rPr sz="950" b="1">
+                <a:solidFill>
+                  <a:srgbClr val="234E44"/>
+                </a:solidFill>
+                <a:latin typeface="Public Sans"/>
+              </a:rPr>
               <a:t>Node.js 20 · Express 4 · TypeScript 5 · pg (PostgreSQL Client)</a:t>
             </a:r>
           </a:p>
           <a:p>
-            <a:pPr>
+            <a:pPr algn="l">
               <a:spcBef>
                 <a:spcPts val="200"/>
               </a:spcBef>
-              <a:defRPr sz="880">
-                <a:solidFill>
-                  <a:srgbClr val="60746D"/>
-                </a:solidFill>
-                <a:latin typeface="Public Sans"/>
-              </a:defRPr>
-            </a:pPr>
-            <a:r>
+              <a:defRPr sz="880" b="0">
+                <a:solidFill>
+                  <a:srgbClr val="587068"/>
+                </a:solidFill>
+                <a:latin typeface="Public Sans"/>
+              </a:defRPr>
+            </a:pPr>
+            <a:r>
+              <a:rPr sz="880" b="0">
+                <a:solidFill>
+                  <a:srgbClr val="587068"/>
+                </a:solidFill>
+                <a:latin typeface="Public Sans"/>
+              </a:rPr>
               <a:t>Arsitektur 4-lapis bersih (Routes → Controllers → Services → Repositories). Raw SQL berparameter aman.</a:t>
             </a:r>
           </a:p>
@@ -8352,13 +9420,13 @@
       </p:sp>
       <p:sp>
         <p:nvSpPr>
-          <p:cNvPr id="11" name="Rounded Rectangle 10"/>
+          <p:cNvPr id="12" name="Rounded Rectangle 11"/>
           <p:cNvSpPr/>
           <p:nvPr/>
         </p:nvSpPr>
         <p:spPr>
           <a:xfrm>
-            <a:off x="6400800" y="4014216"/>
+            <a:off x="6400800" y="4050792"/>
             <a:ext cx="5059375" cy="1051560"/>
           </a:xfrm>
           <a:prstGeom prst="roundRect">
@@ -8369,7 +9437,7 @@
           </a:solidFill>
           <a:ln w="12700">
             <a:solidFill>
-              <a:srgbClr val="DAE6E0"/>
+              <a:srgbClr val="D8E4DE"/>
             </a:solidFill>
           </a:ln>
         </p:spPr>
@@ -8388,50 +9456,71 @@
           </a:fontRef>
         </p:style>
         <p:txBody>
-          <a:bodyPr rtlCol="0" anchor="ctr" wrap="square" lIns="182880" rIns="182880" tIns="91440"/>
-          <a:lstStyle/>
-          <a:p>
-            <a:pPr algn="ctr">
+          <a:bodyPr rtlCol="0" anchor="ctr" wrap="square" lIns="182880" rIns="182880" tIns="109728"/>
+          <a:lstStyle/>
+          <a:p>
+            <a:pPr algn="l">
+              <a:spcBef>
+                <a:spcPts val="0"/>
+              </a:spcBef>
               <a:defRPr sz="1100" b="1">
                 <a:solidFill>
-                  <a:srgbClr val="14342C"/>
-                </a:solidFill>
-                <a:latin typeface="Public Sans"/>
-              </a:defRPr>
-            </a:pPr>
-            <a:r>
+                  <a:srgbClr val="15362F"/>
+                </a:solidFill>
+                <a:latin typeface="Public Sans"/>
+              </a:defRPr>
+            </a:pPr>
+            <a:r>
+              <a:rPr sz="1100" b="1">
+                <a:solidFill>
+                  <a:srgbClr val="15362F"/>
+                </a:solidFill>
+                <a:latin typeface="Public Sans"/>
+              </a:rPr>
               <a:t>AI Agentic Package</a:t>
             </a:r>
           </a:p>
           <a:p>
-            <a:pPr>
+            <a:pPr algn="l">
               <a:spcBef>
                 <a:spcPts val="100"/>
               </a:spcBef>
               <a:defRPr sz="950" b="1">
                 <a:solidFill>
-                  <a:srgbClr val="204A40"/>
-                </a:solidFill>
-                <a:latin typeface="Public Sans"/>
-              </a:defRPr>
-            </a:pPr>
-            <a:r>
+                  <a:srgbClr val="234E44"/>
+                </a:solidFill>
+                <a:latin typeface="Public Sans"/>
+              </a:defRPr>
+            </a:pPr>
+            <a:r>
+              <a:rPr sz="950" b="1">
+                <a:solidFill>
+                  <a:srgbClr val="234E44"/>
+                </a:solidFill>
+                <a:latin typeface="Public Sans"/>
+              </a:rPr>
               <a:t>Google Gemini SDK (@google/genai) · gemini-2.0-flash</a:t>
             </a:r>
           </a:p>
           <a:p>
-            <a:pPr>
+            <a:pPr algn="l">
               <a:spcBef>
                 <a:spcPts val="200"/>
               </a:spcBef>
-              <a:defRPr sz="880">
-                <a:solidFill>
-                  <a:srgbClr val="60746D"/>
-                </a:solidFill>
-                <a:latin typeface="Public Sans"/>
-              </a:defRPr>
-            </a:pPr>
-            <a:r>
+              <a:defRPr sz="880" b="0">
+                <a:solidFill>
+                  <a:srgbClr val="587068"/>
+                </a:solidFill>
+                <a:latin typeface="Public Sans"/>
+              </a:defRPr>
+            </a:pPr>
+            <a:r>
+              <a:rPr sz="880" b="0">
+                <a:solidFill>
+                  <a:srgbClr val="587068"/>
+                </a:solidFill>
+                <a:latin typeface="Public Sans"/>
+              </a:rPr>
               <a:t>Paket @narae/agent terisolasi dari database melalui AgentDataProvider. Function Calling loop (maks 4 ronde).</a:t>
             </a:r>
           </a:p>
@@ -8439,13 +9528,13 @@
       </p:sp>
       <p:sp>
         <p:nvSpPr>
-          <p:cNvPr id="12" name="Rounded Rectangle 11"/>
+          <p:cNvPr id="13" name="Rounded Rectangle 12"/>
           <p:cNvSpPr/>
           <p:nvPr/>
         </p:nvSpPr>
         <p:spPr>
           <a:xfrm>
-            <a:off x="6400800" y="5175504"/>
+            <a:off x="6400800" y="5230368"/>
             <a:ext cx="5059375" cy="1051560"/>
           </a:xfrm>
           <a:prstGeom prst="roundRect">
@@ -8456,7 +9545,7 @@
           </a:solidFill>
           <a:ln w="12700">
             <a:solidFill>
-              <a:srgbClr val="DAE6E0"/>
+              <a:srgbClr val="D8E4DE"/>
             </a:solidFill>
           </a:ln>
         </p:spPr>
@@ -8475,50 +9564,71 @@
           </a:fontRef>
         </p:style>
         <p:txBody>
-          <a:bodyPr rtlCol="0" anchor="ctr" wrap="square" lIns="182880" rIns="182880" tIns="91440"/>
-          <a:lstStyle/>
-          <a:p>
-            <a:pPr algn="ctr">
+          <a:bodyPr rtlCol="0" anchor="ctr" wrap="square" lIns="182880" rIns="182880" tIns="109728"/>
+          <a:lstStyle/>
+          <a:p>
+            <a:pPr algn="l">
+              <a:spcBef>
+                <a:spcPts val="0"/>
+              </a:spcBef>
               <a:defRPr sz="1100" b="1">
                 <a:solidFill>
-                  <a:srgbClr val="14342C"/>
-                </a:solidFill>
-                <a:latin typeface="Public Sans"/>
-              </a:defRPr>
-            </a:pPr>
-            <a:r>
+                  <a:srgbClr val="15362F"/>
+                </a:solidFill>
+                <a:latin typeface="Public Sans"/>
+              </a:defRPr>
+            </a:pPr>
+            <a:r>
+              <a:rPr sz="1100" b="1">
+                <a:solidFill>
+                  <a:srgbClr val="15362F"/>
+                </a:solidFill>
+                <a:latin typeface="Public Sans"/>
+              </a:rPr>
               <a:t>Database &amp; Infrastructure</a:t>
             </a:r>
           </a:p>
           <a:p>
-            <a:pPr>
+            <a:pPr algn="l">
               <a:spcBef>
                 <a:spcPts val="100"/>
               </a:spcBef>
               <a:defRPr sz="950" b="1">
                 <a:solidFill>
-                  <a:srgbClr val="204A40"/>
-                </a:solidFill>
-                <a:latin typeface="Public Sans"/>
-              </a:defRPr>
-            </a:pPr>
-            <a:r>
+                  <a:srgbClr val="234E44"/>
+                </a:solidFill>
+                <a:latin typeface="Public Sans"/>
+              </a:defRPr>
+            </a:pPr>
+            <a:r>
+              <a:rPr sz="950" b="1">
+                <a:solidFill>
+                  <a:srgbClr val="234E44"/>
+                </a:solidFill>
+                <a:latin typeface="Public Sans"/>
+              </a:rPr>
               <a:t>PostgreSQL 16 · Docker · Docker Compose · Timezone WIB</a:t>
             </a:r>
           </a:p>
           <a:p>
-            <a:pPr>
+            <a:pPr algn="l">
               <a:spcBef>
                 <a:spcPts val="200"/>
               </a:spcBef>
-              <a:defRPr sz="880">
-                <a:solidFill>
-                  <a:srgbClr val="60746D"/>
-                </a:solidFill>
-                <a:latin typeface="Public Sans"/>
-              </a:defRPr>
-            </a:pPr>
-            <a:r>
+              <a:defRPr sz="880" b="0">
+                <a:solidFill>
+                  <a:srgbClr val="587068"/>
+                </a:solidFill>
+                <a:latin typeface="Public Sans"/>
+              </a:defRPr>
+            </a:pPr>
+            <a:r>
+              <a:rPr sz="880" b="0">
+                <a:solidFill>
+                  <a:srgbClr val="587068"/>
+                </a:solidFill>
+                <a:latin typeface="Public Sans"/>
+              </a:rPr>
               <a:t>Custom parser SQL DATE (mencegah bug zona waktu JS), audit trail historis, serta skrip otomatis db/init.sql.</a:t>
             </a:r>
           </a:p>
@@ -8557,7 +9667,7 @@
             <a:avLst/>
           </a:prstGeom>
           <a:solidFill>
-            <a:srgbClr val="FAFCFB"/>
+            <a:srgbClr val="F8FAF9"/>
           </a:solidFill>
           <a:ln>
             <a:noFill/>
@@ -8594,17 +9704,17 @@
         <p:spPr>
           <a:xfrm>
             <a:off x="731520" y="384048"/>
-            <a:ext cx="2926080" cy="292608"/>
+            <a:ext cx="3108960" cy="292608"/>
           </a:xfrm>
           <a:prstGeom prst="roundRect">
             <a:avLst/>
           </a:prstGeom>
           <a:solidFill>
-            <a:srgbClr val="E2F1EA"/>
+            <a:srgbClr val="E0EFE8"/>
           </a:solidFill>
           <a:ln w="9525">
             <a:solidFill>
-              <a:srgbClr val="DAE6E0"/>
+              <a:srgbClr val="D8E4DE"/>
             </a:solidFill>
           </a:ln>
         </p:spPr>
@@ -8629,12 +9739,18 @@
             <a:pPr algn="ctr">
               <a:defRPr sz="850" b="1">
                 <a:solidFill>
-                  <a:srgbClr val="184438"/>
-                </a:solidFill>
-                <a:latin typeface="Public Sans"/>
-              </a:defRPr>
-            </a:pPr>
-            <a:r>
+                  <a:srgbClr val="164338"/>
+                </a:solidFill>
+                <a:latin typeface="Public Sans"/>
+              </a:defRPr>
+            </a:pPr>
+            <a:r>
+              <a:rPr b="1">
+                <a:solidFill>
+                  <a:srgbClr val="164338"/>
+                </a:solidFill>
+                <a:latin typeface="Public Sans"/>
+              </a:rPr>
               <a:t>07 / DAMPAK &amp; ROADMAP</a:t>
             </a:r>
           </a:p>
@@ -8648,8 +9764,8 @@
         </p:nvSpPr>
         <p:spPr>
           <a:xfrm>
-            <a:off x="8686800" y="347472"/>
-            <a:ext cx="2773375" cy="320040"/>
+            <a:off x="8412480" y="347472"/>
+            <a:ext cx="3047695" cy="320040"/>
           </a:xfrm>
           <a:prstGeom prst="rect">
             <a:avLst/>
@@ -8665,12 +9781,18 @@
             <a:pPr algn="r">
               <a:defRPr sz="950" b="1">
                 <a:solidFill>
-                  <a:srgbClr val="60746D"/>
-                </a:solidFill>
-                <a:latin typeface="Public Sans"/>
-              </a:defRPr>
-            </a:pPr>
-            <a:r>
+                  <a:srgbClr val="587068"/>
+                </a:solidFill>
+                <a:latin typeface="Public Sans"/>
+              </a:defRPr>
+            </a:pPr>
+            <a:r>
+              <a:rPr b="1">
+                <a:solidFill>
+                  <a:srgbClr val="587068"/>
+                </a:solidFill>
+                <a:latin typeface="Public Sans"/>
+              </a:rPr>
               <a:t>NARAE · INCEPTION 2026</a:t>
             </a:r>
           </a:p>
@@ -8701,12 +9823,18 @@
             <a:pPr>
               <a:defRPr sz="2300" b="1">
                 <a:solidFill>
-                  <a:srgbClr val="14342C"/>
-                </a:solidFill>
-                <a:latin typeface="Public Sans"/>
-              </a:defRPr>
-            </a:pPr>
-            <a:r>
+                  <a:srgbClr val="15362F"/>
+                </a:solidFill>
+                <a:latin typeface="Public Sans"/>
+              </a:defRPr>
+            </a:pPr>
+            <a:r>
+              <a:rPr b="1">
+                <a:solidFill>
+                  <a:srgbClr val="15362F"/>
+                </a:solidFill>
+                <a:latin typeface="Public Sans"/>
+              </a:rPr>
               <a:t>Impact &amp; Future Vision</a:t>
             </a:r>
           </a:p>
@@ -8717,12 +9845,18 @@
               </a:spcBef>
               <a:defRPr sz="1100">
                 <a:solidFill>
-                  <a:srgbClr val="60746D"/>
-                </a:solidFill>
-                <a:latin typeface="Public Sans"/>
-              </a:defRPr>
-            </a:pPr>
-            <a:r>
+                  <a:srgbClr val="587068"/>
+                </a:solidFill>
+                <a:latin typeface="Public Sans"/>
+              </a:defRPr>
+            </a:pPr>
+            <a:r>
+              <a:rPr>
+                <a:solidFill>
+                  <a:srgbClr val="587068"/>
+                </a:solidFill>
+                <a:latin typeface="Public Sans"/>
+              </a:rPr>
               <a:t>Dampak terukur pada kualitas hidup pasien &amp; caregiver, serta peta jalan pengembangan jangka panjang.</a:t>
             </a:r>
           </a:p>
@@ -8747,7 +9881,7 @@
           </a:solidFill>
           <a:ln w="12700">
             <a:solidFill>
-              <a:srgbClr val="DAE6E0"/>
+              <a:srgbClr val="D8E4DE"/>
             </a:solidFill>
           </a:ln>
         </p:spPr>
@@ -8769,31 +9903,46 @@
           <a:bodyPr rtlCol="0" anchor="ctr" wrap="square" lIns="182880" rIns="182880" tIns="438912"/>
           <a:lstStyle/>
           <a:p>
-            <a:pPr algn="ctr">
+            <a:pPr algn="l">
+              <a:spcBef>
+                <a:spcPts val="0"/>
+              </a:spcBef>
               <a:defRPr sz="1300" b="1">
                 <a:solidFill>
-                  <a:srgbClr val="14342C"/>
-                </a:solidFill>
-                <a:latin typeface="Public Sans"/>
-              </a:defRPr>
-            </a:pPr>
-            <a:r>
+                  <a:srgbClr val="15362F"/>
+                </a:solidFill>
+                <a:latin typeface="Public Sans"/>
+              </a:defRPr>
+            </a:pPr>
+            <a:r>
+              <a:rPr sz="1300" b="1">
+                <a:solidFill>
+                  <a:srgbClr val="15362F"/>
+                </a:solidFill>
+                <a:latin typeface="Public Sans"/>
+              </a:rPr>
               <a:t>Kemandirian Pasien</a:t>
             </a:r>
           </a:p>
           <a:p>
-            <a:pPr>
+            <a:pPr algn="l">
               <a:spcBef>
                 <a:spcPts val="400"/>
               </a:spcBef>
-              <a:defRPr sz="950">
-                <a:solidFill>
-                  <a:srgbClr val="60746D"/>
-                </a:solidFill>
-                <a:latin typeface="Public Sans"/>
-              </a:defRPr>
-            </a:pPr>
-            <a:r>
+              <a:defRPr sz="950" b="0">
+                <a:solidFill>
+                  <a:srgbClr val="587068"/>
+                </a:solidFill>
+                <a:latin typeface="Public Sans"/>
+              </a:defRPr>
+            </a:pPr>
+            <a:r>
+              <a:rPr sz="950" b="0">
+                <a:solidFill>
+                  <a:srgbClr val="587068"/>
+                </a:solidFill>
+                <a:latin typeface="Public Sans"/>
+              </a:rPr>
               <a:t>Membantu lansia menyelesaikan rutinitas harian secara mandiri melalui panduan suara empati tanpa takut lupa atau merasa dihakimi.</a:t>
             </a:r>
           </a:p>
@@ -8814,7 +9963,7 @@
             <a:avLst/>
           </a:prstGeom>
           <a:solidFill>
-            <a:srgbClr val="E2F1EA"/>
+            <a:srgbClr val="E0EFE8"/>
           </a:solidFill>
           <a:ln>
             <a:noFill/>
@@ -8841,12 +9990,18 @@
             <a:pPr algn="ctr">
               <a:defRPr sz="800" b="1">
                 <a:solidFill>
-                  <a:srgbClr val="184438"/>
-                </a:solidFill>
-                <a:latin typeface="Public Sans"/>
-              </a:defRPr>
-            </a:pPr>
-            <a:r>
+                  <a:srgbClr val="164338"/>
+                </a:solidFill>
+                <a:latin typeface="Public Sans"/>
+              </a:defRPr>
+            </a:pPr>
+            <a:r>
+              <a:rPr b="1">
+                <a:solidFill>
+                  <a:srgbClr val="164338"/>
+                </a:solidFill>
+                <a:latin typeface="Public Sans"/>
+              </a:rPr>
               <a:t>ENHANCING INDEPENDENCE</a:t>
             </a:r>
           </a:p>
@@ -8871,7 +10026,7 @@
           </a:solidFill>
           <a:ln w="12700">
             <a:solidFill>
-              <a:srgbClr val="DAE6E0"/>
+              <a:srgbClr val="D8E4DE"/>
             </a:solidFill>
           </a:ln>
         </p:spPr>
@@ -8893,31 +10048,46 @@
           <a:bodyPr rtlCol="0" anchor="ctr" wrap="square" lIns="182880" rIns="182880" tIns="438912"/>
           <a:lstStyle/>
           <a:p>
-            <a:pPr algn="ctr">
+            <a:pPr algn="l">
+              <a:spcBef>
+                <a:spcPts val="0"/>
+              </a:spcBef>
               <a:defRPr sz="1300" b="1">
                 <a:solidFill>
-                  <a:srgbClr val="14342C"/>
-                </a:solidFill>
-                <a:latin typeface="Public Sans"/>
-              </a:defRPr>
-            </a:pPr>
-            <a:r>
+                  <a:srgbClr val="15362F"/>
+                </a:solidFill>
+                <a:latin typeface="Public Sans"/>
+              </a:defRPr>
+            </a:pPr>
+            <a:r>
+              <a:rPr sz="1300" b="1">
+                <a:solidFill>
+                  <a:srgbClr val="15362F"/>
+                </a:solidFill>
+                <a:latin typeface="Public Sans"/>
+              </a:rPr>
               <a:t>Efisiensi Caregiver</a:t>
             </a:r>
           </a:p>
           <a:p>
-            <a:pPr>
+            <a:pPr algn="l">
               <a:spcBef>
                 <a:spcPts val="400"/>
               </a:spcBef>
-              <a:defRPr sz="950">
-                <a:solidFill>
-                  <a:srgbClr val="60746D"/>
-                </a:solidFill>
-                <a:latin typeface="Public Sans"/>
-              </a:defRPr>
-            </a:pPr>
-            <a:r>
+              <a:defRPr sz="950" b="0">
+                <a:solidFill>
+                  <a:srgbClr val="587068"/>
+                </a:solidFill>
+                <a:latin typeface="Public Sans"/>
+              </a:defRPr>
+            </a:pPr>
+            <a:r>
+              <a:rPr sz="950" b="0">
+                <a:solidFill>
+                  <a:srgbClr val="587068"/>
+                </a:solidFill>
+                <a:latin typeface="Public Sans"/>
+              </a:rPr>
               <a:t>Memangkas hingga 50-60% pengulangan instruksi manual harian dan mendeteksi jadwal obat terlewat secara otomatis.</a:t>
             </a:r>
           </a:p>
@@ -8938,7 +10108,7 @@
             <a:avLst/>
           </a:prstGeom>
           <a:solidFill>
-            <a:srgbClr val="F2F7F4"/>
+            <a:srgbClr val="F1F6F3"/>
           </a:solidFill>
           <a:ln>
             <a:noFill/>
@@ -8965,12 +10135,18 @@
             <a:pPr algn="ctr">
               <a:defRPr sz="800" b="1">
                 <a:solidFill>
-                  <a:srgbClr val="14342C"/>
-                </a:solidFill>
-                <a:latin typeface="Public Sans"/>
-              </a:defRPr>
-            </a:pPr>
-            <a:r>
+                  <a:srgbClr val="15362F"/>
+                </a:solidFill>
+                <a:latin typeface="Public Sans"/>
+              </a:defRPr>
+            </a:pPr>
+            <a:r>
+              <a:rPr b="1">
+                <a:solidFill>
+                  <a:srgbClr val="15362F"/>
+                </a:solidFill>
+                <a:latin typeface="Public Sans"/>
+              </a:rPr>
               <a:t>REDUCING CAREGIVER BURDEN</a:t>
             </a:r>
           </a:p>
@@ -8995,7 +10171,7 @@
           </a:solidFill>
           <a:ln w="12700">
             <a:solidFill>
-              <a:srgbClr val="DAE6E0"/>
+              <a:srgbClr val="D8E4DE"/>
             </a:solidFill>
           </a:ln>
         </p:spPr>
@@ -9017,31 +10193,46 @@
           <a:bodyPr rtlCol="0" anchor="ctr" wrap="square" lIns="182880" rIns="182880" tIns="438912"/>
           <a:lstStyle/>
           <a:p>
-            <a:pPr algn="ctr">
+            <a:pPr algn="l">
+              <a:spcBef>
+                <a:spcPts val="0"/>
+              </a:spcBef>
               <a:defRPr sz="1300" b="1">
                 <a:solidFill>
-                  <a:srgbClr val="14342C"/>
-                </a:solidFill>
-                <a:latin typeface="Public Sans"/>
-              </a:defRPr>
-            </a:pPr>
-            <a:r>
+                  <a:srgbClr val="15362F"/>
+                </a:solidFill>
+                <a:latin typeface="Public Sans"/>
+              </a:defRPr>
+            </a:pPr>
+            <a:r>
+              <a:rPr sz="1300" b="1">
+                <a:solidFill>
+                  <a:srgbClr val="15362F"/>
+                </a:solidFill>
+                <a:latin typeface="Public Sans"/>
+              </a:rPr>
               <a:t>Ketenangan Keluarga</a:t>
             </a:r>
           </a:p>
           <a:p>
-            <a:pPr>
+            <a:pPr algn="l">
               <a:spcBef>
                 <a:spcPts val="400"/>
               </a:spcBef>
-              <a:defRPr sz="950">
-                <a:solidFill>
-                  <a:srgbClr val="60746D"/>
-                </a:solidFill>
-                <a:latin typeface="Public Sans"/>
-              </a:defRPr>
-            </a:pPr>
-            <a:r>
+              <a:defRPr sz="950" b="0">
+                <a:solidFill>
+                  <a:srgbClr val="587068"/>
+                </a:solidFill>
+                <a:latin typeface="Public Sans"/>
+              </a:defRPr>
+            </a:pPr>
+            <a:r>
+              <a:rPr sz="950" b="0">
+                <a:solidFill>
+                  <a:srgbClr val="587068"/>
+                </a:solidFill>
+                <a:latin typeface="Public Sans"/>
+              </a:rPr>
               <a:t>Memberikan kepastian dan visibilitas transparan kepada keluarga mengenai kondisi dan penyelesaian kegiatan orang tua mereka.</a:t>
             </a:r>
           </a:p>
@@ -9062,7 +10253,7 @@
             <a:avLst/>
           </a:prstGeom>
           <a:solidFill>
-            <a:srgbClr val="E2F1EA"/>
+            <a:srgbClr val="E0EFE8"/>
           </a:solidFill>
           <a:ln>
             <a:noFill/>
@@ -9089,12 +10280,18 @@
             <a:pPr algn="ctr">
               <a:defRPr sz="800" b="1">
                 <a:solidFill>
-                  <a:srgbClr val="184438"/>
-                </a:solidFill>
-                <a:latin typeface="Public Sans"/>
-              </a:defRPr>
-            </a:pPr>
-            <a:r>
+                  <a:srgbClr val="164338"/>
+                </a:solidFill>
+                <a:latin typeface="Public Sans"/>
+              </a:defRPr>
+            </a:pPr>
+            <a:r>
+              <a:rPr b="1">
+                <a:solidFill>
+                  <a:srgbClr val="164338"/>
+                </a:solidFill>
+                <a:latin typeface="Public Sans"/>
+              </a:rPr>
               <a:t>STRUCTURED FAMILY CARE</a:t>
             </a:r>
           </a:p>
@@ -9115,11 +10312,11 @@
             <a:avLst/>
           </a:prstGeom>
           <a:solidFill>
-            <a:srgbClr val="F2F7F4"/>
+            <a:srgbClr val="F1F6F3"/>
           </a:solidFill>
           <a:ln w="12700">
             <a:solidFill>
-              <a:srgbClr val="DAE6E0"/>
+              <a:srgbClr val="D8E4DE"/>
             </a:solidFill>
           </a:ln>
         </p:spPr>
@@ -9141,79 +10338,112 @@
           <a:bodyPr rtlCol="0" anchor="ctr" wrap="square" lIns="182880" rIns="182880" tIns="164592"/>
           <a:lstStyle/>
           <a:p>
-            <a:pPr algn="ctr">
+            <a:pPr algn="l">
+              <a:spcBef>
+                <a:spcPts val="0"/>
+              </a:spcBef>
               <a:defRPr sz="850" b="1">
                 <a:solidFill>
-                  <a:srgbClr val="2A7662"/>
-                </a:solidFill>
-                <a:latin typeface="Public Sans"/>
-              </a:defRPr>
-            </a:pPr>
-            <a:r>
+                  <a:srgbClr val="2B7865"/>
+                </a:solidFill>
+                <a:latin typeface="Public Sans"/>
+              </a:defRPr>
+            </a:pPr>
+            <a:r>
+              <a:rPr sz="850" b="1">
+                <a:solidFill>
+                  <a:srgbClr val="2B7865"/>
+                </a:solidFill>
+                <a:latin typeface="Public Sans"/>
+              </a:rPr>
               <a:t>PHASE 1: HARDWARE MVP</a:t>
             </a:r>
           </a:p>
           <a:p>
-            <a:pPr>
+            <a:pPr algn="l">
               <a:spcBef>
                 <a:spcPts val="200"/>
               </a:spcBef>
               <a:defRPr sz="1200" b="1">
                 <a:solidFill>
-                  <a:srgbClr val="14342C"/>
-                </a:solidFill>
-                <a:latin typeface="Public Sans"/>
-              </a:defRPr>
-            </a:pPr>
-            <a:r>
+                  <a:srgbClr val="15362F"/>
+                </a:solidFill>
+                <a:latin typeface="Public Sans"/>
+              </a:defRPr>
+            </a:pPr>
+            <a:r>
+              <a:rPr sz="1200" b="1">
+                <a:solidFill>
+                  <a:srgbClr val="15362F"/>
+                </a:solidFill>
+                <a:latin typeface="Public Sans"/>
+              </a:rPr>
               <a:t>Integrasi Perangkat Keras Fisik</a:t>
             </a:r>
           </a:p>
           <a:p>
-            <a:pPr>
+            <a:pPr algn="l">
               <a:spcBef>
                 <a:spcPts val="300"/>
               </a:spcBef>
-              <a:defRPr sz="880">
-                <a:solidFill>
-                  <a:srgbClr val="60746D"/>
-                </a:solidFill>
-                <a:latin typeface="Public Sans"/>
-              </a:defRPr>
-            </a:pPr>
-            <a:r>
+              <a:defRPr sz="880" b="0">
+                <a:solidFill>
+                  <a:srgbClr val="587068"/>
+                </a:solidFill>
+                <a:latin typeface="Public Sans"/>
+              </a:defRPr>
+            </a:pPr>
+            <a:r>
+              <a:rPr sz="880" b="0">
+                <a:solidFill>
+                  <a:srgbClr val="587068"/>
+                </a:solidFill>
+                <a:latin typeface="Public Sans"/>
+              </a:rPr>
               <a:t>• Implementasi mikrokontroler wearable nyata (ESP32 / RP2040).</a:t>
             </a:r>
           </a:p>
           <a:p>
-            <a:pPr>
+            <a:pPr algn="l">
               <a:spcBef>
                 <a:spcPts val="300"/>
               </a:spcBef>
-              <a:defRPr sz="880">
-                <a:solidFill>
-                  <a:srgbClr val="60746D"/>
-                </a:solidFill>
-                <a:latin typeface="Public Sans"/>
-              </a:defRPr>
-            </a:pPr>
-            <a:r>
+              <a:defRPr sz="880" b="0">
+                <a:solidFill>
+                  <a:srgbClr val="587068"/>
+                </a:solidFill>
+                <a:latin typeface="Public Sans"/>
+              </a:defRPr>
+            </a:pPr>
+            <a:r>
+              <a:rPr sz="880" b="0">
+                <a:solidFill>
+                  <a:srgbClr val="587068"/>
+                </a:solidFill>
+                <a:latin typeface="Public Sans"/>
+              </a:rPr>
               <a:t>• Modul audio I2S, mikrofon terarah, dan motor getar haptik.</a:t>
             </a:r>
           </a:p>
           <a:p>
-            <a:pPr>
+            <a:pPr algn="l">
               <a:spcBef>
                 <a:spcPts val="300"/>
               </a:spcBef>
-              <a:defRPr sz="880">
-                <a:solidFill>
-                  <a:srgbClr val="60746D"/>
-                </a:solidFill>
-                <a:latin typeface="Public Sans"/>
-              </a:defRPr>
-            </a:pPr>
-            <a:r>
+              <a:defRPr sz="880" b="0">
+                <a:solidFill>
+                  <a:srgbClr val="587068"/>
+                </a:solidFill>
+                <a:latin typeface="Public Sans"/>
+              </a:defRPr>
+            </a:pPr>
+            <a:r>
+              <a:rPr sz="880" b="0">
+                <a:solidFill>
+                  <a:srgbClr val="587068"/>
+                </a:solidFill>
+                <a:latin typeface="Public Sans"/>
+              </a:rPr>
               <a:t>• Casing silikon medis tahan percikan air ramah kulit lansia.</a:t>
             </a:r>
           </a:p>
@@ -9234,11 +10464,11 @@
             <a:avLst/>
           </a:prstGeom>
           <a:solidFill>
-            <a:srgbClr val="F2F7F4"/>
+            <a:srgbClr val="F1F6F3"/>
           </a:solidFill>
           <a:ln w="12700">
             <a:solidFill>
-              <a:srgbClr val="DAE6E0"/>
+              <a:srgbClr val="D8E4DE"/>
             </a:solidFill>
           </a:ln>
         </p:spPr>
@@ -9260,79 +10490,112 @@
           <a:bodyPr rtlCol="0" anchor="ctr" wrap="square" lIns="182880" rIns="182880" tIns="164592"/>
           <a:lstStyle/>
           <a:p>
-            <a:pPr algn="ctr">
+            <a:pPr algn="l">
+              <a:spcBef>
+                <a:spcPts val="0"/>
+              </a:spcBef>
               <a:defRPr sz="850" b="1">
                 <a:solidFill>
-                  <a:srgbClr val="2A7662"/>
-                </a:solidFill>
-                <a:latin typeface="Public Sans"/>
-              </a:defRPr>
-            </a:pPr>
-            <a:r>
+                  <a:srgbClr val="2B7865"/>
+                </a:solidFill>
+                <a:latin typeface="Public Sans"/>
+              </a:defRPr>
+            </a:pPr>
+            <a:r>
+              <a:rPr sz="850" b="1">
+                <a:solidFill>
+                  <a:srgbClr val="2B7865"/>
+                </a:solidFill>
+                <a:latin typeface="Public Sans"/>
+              </a:rPr>
               <a:t>PHASE 2: PERSONALIZED VOICE</a:t>
             </a:r>
           </a:p>
           <a:p>
-            <a:pPr>
+            <a:pPr algn="l">
               <a:spcBef>
                 <a:spcPts val="200"/>
               </a:spcBef>
               <a:defRPr sz="1200" b="1">
                 <a:solidFill>
-                  <a:srgbClr val="14342C"/>
-                </a:solidFill>
-                <a:latin typeface="Public Sans"/>
-              </a:defRPr>
-            </a:pPr>
-            <a:r>
+                  <a:srgbClr val="15362F"/>
+                </a:solidFill>
+                <a:latin typeface="Public Sans"/>
+              </a:defRPr>
+            </a:pPr>
+            <a:r>
+              <a:rPr sz="1200" b="1">
+                <a:solidFill>
+                  <a:srgbClr val="15362F"/>
+                </a:solidFill>
+                <a:latin typeface="Public Sans"/>
+              </a:rPr>
               <a:t>Kloning Profil Suara Keluarga</a:t>
             </a:r>
           </a:p>
           <a:p>
-            <a:pPr>
+            <a:pPr algn="l">
               <a:spcBef>
                 <a:spcPts val="300"/>
               </a:spcBef>
-              <a:defRPr sz="880">
-                <a:solidFill>
-                  <a:srgbClr val="60746D"/>
-                </a:solidFill>
-                <a:latin typeface="Public Sans"/>
-              </a:defRPr>
-            </a:pPr>
-            <a:r>
+              <a:defRPr sz="880" b="0">
+                <a:solidFill>
+                  <a:srgbClr val="587068"/>
+                </a:solidFill>
+                <a:latin typeface="Public Sans"/>
+              </a:defRPr>
+            </a:pPr>
+            <a:r>
+              <a:rPr sz="880" b="0">
+                <a:solidFill>
+                  <a:srgbClr val="587068"/>
+                </a:solidFill>
+                <a:latin typeface="Public Sans"/>
+              </a:rPr>
               <a:t>• Kloning suara anggota keluarga atau perawat tercinta (custom TTS).</a:t>
             </a:r>
           </a:p>
           <a:p>
-            <a:pPr>
+            <a:pPr algn="l">
               <a:spcBef>
                 <a:spcPts val="300"/>
               </a:spcBef>
-              <a:defRPr sz="880">
-                <a:solidFill>
-                  <a:srgbClr val="60746D"/>
-                </a:solidFill>
-                <a:latin typeface="Public Sans"/>
-              </a:defRPr>
-            </a:pPr>
-            <a:r>
+              <a:defRPr sz="880" b="0">
+                <a:solidFill>
+                  <a:srgbClr val="587068"/>
+                </a:solidFill>
+                <a:latin typeface="Public Sans"/>
+              </a:defRPr>
+            </a:pPr>
+            <a:r>
+              <a:rPr sz="880" b="0">
+                <a:solidFill>
+                  <a:srgbClr val="587068"/>
+                </a:solidFill>
+                <a:latin typeface="Public Sans"/>
+              </a:rPr>
               <a:t>• Pengingat terdengar familiar dan hangat, meredakan kecemasan pasien.</a:t>
             </a:r>
           </a:p>
           <a:p>
-            <a:pPr>
+            <a:pPr algn="l">
               <a:spcBef>
                 <a:spcPts val="300"/>
               </a:spcBef>
-              <a:defRPr sz="880">
-                <a:solidFill>
-                  <a:srgbClr val="60746D"/>
-                </a:solidFill>
-                <a:latin typeface="Public Sans"/>
-              </a:defRPr>
-            </a:pPr>
-            <a:r>
+              <a:defRPr sz="880" b="0">
+                <a:solidFill>
+                  <a:srgbClr val="587068"/>
+                </a:solidFill>
+                <a:latin typeface="Public Sans"/>
+              </a:defRPr>
+            </a:pPr>
+            <a:r>
+              <a:rPr sz="880" b="0">
+                <a:solidFill>
+                  <a:srgbClr val="587068"/>
+                </a:solidFill>
+                <a:latin typeface="Public Sans"/>
+              </a:rPr>
               <a:t>• Pengaturan nada bicara empati adaptif sesuai suasana hati lansia.</a:t>
             </a:r>
           </a:p>
@@ -9353,11 +10616,11 @@
             <a:avLst/>
           </a:prstGeom>
           <a:solidFill>
-            <a:srgbClr val="F2F7F4"/>
+            <a:srgbClr val="F1F6F3"/>
           </a:solidFill>
           <a:ln w="12700">
             <a:solidFill>
-              <a:srgbClr val="DAE6E0"/>
+              <a:srgbClr val="D8E4DE"/>
             </a:solidFill>
           </a:ln>
         </p:spPr>
@@ -9379,79 +10642,112 @@
           <a:bodyPr rtlCol="0" anchor="ctr" wrap="square" lIns="182880" rIns="182880" tIns="164592"/>
           <a:lstStyle/>
           <a:p>
-            <a:pPr algn="ctr">
+            <a:pPr algn="l">
+              <a:spcBef>
+                <a:spcPts val="0"/>
+              </a:spcBef>
               <a:defRPr sz="850" b="1">
                 <a:solidFill>
-                  <a:srgbClr val="2A7662"/>
-                </a:solidFill>
-                <a:latin typeface="Public Sans"/>
-              </a:defRPr>
-            </a:pPr>
-            <a:r>
+                  <a:srgbClr val="2B7865"/>
+                </a:solidFill>
+                <a:latin typeface="Public Sans"/>
+              </a:defRPr>
+            </a:pPr>
+            <a:r>
+              <a:rPr sz="850" b="1">
+                <a:solidFill>
+                  <a:srgbClr val="2B7865"/>
+                </a:solidFill>
+                <a:latin typeface="Public Sans"/>
+              </a:rPr>
               <a:t>PHASE 3: SMART ECOSYSTEM</a:t>
             </a:r>
           </a:p>
           <a:p>
-            <a:pPr>
+            <a:pPr algn="l">
               <a:spcBef>
                 <a:spcPts val="200"/>
               </a:spcBef>
               <a:defRPr sz="1200" b="1">
                 <a:solidFill>
-                  <a:srgbClr val="14342C"/>
-                </a:solidFill>
-                <a:latin typeface="Public Sans"/>
-              </a:defRPr>
-            </a:pPr>
-            <a:r>
+                  <a:srgbClr val="15362F"/>
+                </a:solidFill>
+                <a:latin typeface="Public Sans"/>
+              </a:defRPr>
+            </a:pPr>
+            <a:r>
+              <a:rPr sz="1200" b="1">
+                <a:solidFill>
+                  <a:srgbClr val="15362F"/>
+                </a:solidFill>
+                <a:latin typeface="Public Sans"/>
+              </a:rPr>
               <a:t>Portal Keluarga &amp; Analitik Prediktif</a:t>
             </a:r>
           </a:p>
           <a:p>
-            <a:pPr>
+            <a:pPr algn="l">
               <a:spcBef>
                 <a:spcPts val="300"/>
               </a:spcBef>
-              <a:defRPr sz="880">
-                <a:solidFill>
-                  <a:srgbClr val="60746D"/>
-                </a:solidFill>
-                <a:latin typeface="Public Sans"/>
-              </a:defRPr>
-            </a:pPr>
-            <a:r>
+              <a:defRPr sz="880" b="0">
+                <a:solidFill>
+                  <a:srgbClr val="587068"/>
+                </a:solidFill>
+                <a:latin typeface="Public Sans"/>
+              </a:defRPr>
+            </a:pPr>
+            <a:r>
+              <a:rPr sz="880" b="0">
+                <a:solidFill>
+                  <a:srgbClr val="587068"/>
+                </a:solidFill>
+                <a:latin typeface="Public Sans"/>
+              </a:rPr>
               <a:t>• Peluncuran aplikasi mobile khusus keluarga untuk pemantauan jarak jauh.</a:t>
             </a:r>
           </a:p>
           <a:p>
-            <a:pPr>
+            <a:pPr algn="l">
               <a:spcBef>
                 <a:spcPts val="300"/>
               </a:spcBef>
-              <a:defRPr sz="880">
-                <a:solidFill>
-                  <a:srgbClr val="60746D"/>
-                </a:solidFill>
-                <a:latin typeface="Public Sans"/>
-              </a:defRPr>
-            </a:pPr>
-            <a:r>
+              <a:defRPr sz="880" b="0">
+                <a:solidFill>
+                  <a:srgbClr val="587068"/>
+                </a:solidFill>
+                <a:latin typeface="Public Sans"/>
+              </a:defRPr>
+            </a:pPr>
+            <a:r>
+              <a:rPr sz="880" b="0">
+                <a:solidFill>
+                  <a:srgbClr val="587068"/>
+                </a:solidFill>
+                <a:latin typeface="Public Sans"/>
+              </a:rPr>
               <a:t>• Analitik prediktif deteksi dini degradasi kognitif berbasis pola bicara.</a:t>
             </a:r>
           </a:p>
           <a:p>
-            <a:pPr>
+            <a:pPr algn="l">
               <a:spcBef>
                 <a:spcPts val="300"/>
               </a:spcBef>
-              <a:defRPr sz="880">
-                <a:solidFill>
-                  <a:srgbClr val="60746D"/>
-                </a:solidFill>
-                <a:latin typeface="Public Sans"/>
-              </a:defRPr>
-            </a:pPr>
-            <a:r>
+              <a:defRPr sz="880" b="0">
+                <a:solidFill>
+                  <a:srgbClr val="587068"/>
+                </a:solidFill>
+                <a:latin typeface="Public Sans"/>
+              </a:defRPr>
+            </a:pPr>
+            <a:r>
+              <a:rPr sz="880" b="0">
+                <a:solidFill>
+                  <a:srgbClr val="587068"/>
+                </a:solidFill>
+                <a:latin typeface="Public Sans"/>
+              </a:rPr>
               <a:t>• Integrasi sistem rekam medis fasilitas kesehatan dan panti lansia.</a:t>
             </a:r>
           </a:p>
@@ -9490,7 +10786,7 @@
             <a:avLst/>
           </a:prstGeom>
           <a:solidFill>
-            <a:srgbClr val="FAFCFB"/>
+            <a:srgbClr val="F8FAF9"/>
           </a:solidFill>
           <a:ln>
             <a:noFill/>
@@ -9527,17 +10823,17 @@
         <p:spPr>
           <a:xfrm>
             <a:off x="731520" y="384048"/>
-            <a:ext cx="2926080" cy="292608"/>
+            <a:ext cx="3108960" cy="292608"/>
           </a:xfrm>
           <a:prstGeom prst="roundRect">
             <a:avLst/>
           </a:prstGeom>
           <a:solidFill>
-            <a:srgbClr val="E2F1EA"/>
+            <a:srgbClr val="E0EFE8"/>
           </a:solidFill>
           <a:ln w="9525">
             <a:solidFill>
-              <a:srgbClr val="DAE6E0"/>
+              <a:srgbClr val="D8E4DE"/>
             </a:solidFill>
           </a:ln>
         </p:spPr>
@@ -9562,12 +10858,18 @@
             <a:pPr algn="ctr">
               <a:defRPr sz="850" b="1">
                 <a:solidFill>
-                  <a:srgbClr val="184438"/>
-                </a:solidFill>
-                <a:latin typeface="Public Sans"/>
-              </a:defRPr>
-            </a:pPr>
-            <a:r>
+                  <a:srgbClr val="164338"/>
+                </a:solidFill>
+                <a:latin typeface="Public Sans"/>
+              </a:defRPr>
+            </a:pPr>
+            <a:r>
+              <a:rPr b="1">
+                <a:solidFill>
+                  <a:srgbClr val="164338"/>
+                </a:solidFill>
+                <a:latin typeface="Public Sans"/>
+              </a:rPr>
               <a:t>08 / TENTANG TIM</a:t>
             </a:r>
           </a:p>
@@ -9581,8 +10883,8 @@
         </p:nvSpPr>
         <p:spPr>
           <a:xfrm>
-            <a:off x="8686800" y="347472"/>
-            <a:ext cx="2773375" cy="320040"/>
+            <a:off x="8412480" y="347472"/>
+            <a:ext cx="3047695" cy="320040"/>
           </a:xfrm>
           <a:prstGeom prst="rect">
             <a:avLst/>
@@ -9598,12 +10900,18 @@
             <a:pPr algn="r">
               <a:defRPr sz="950" b="1">
                 <a:solidFill>
-                  <a:srgbClr val="60746D"/>
-                </a:solidFill>
-                <a:latin typeface="Public Sans"/>
-              </a:defRPr>
-            </a:pPr>
-            <a:r>
+                  <a:srgbClr val="587068"/>
+                </a:solidFill>
+                <a:latin typeface="Public Sans"/>
+              </a:defRPr>
+            </a:pPr>
+            <a:r>
+              <a:rPr b="1">
+                <a:solidFill>
+                  <a:srgbClr val="587068"/>
+                </a:solidFill>
+                <a:latin typeface="Public Sans"/>
+              </a:rPr>
               <a:t>NARAE · INCEPTION 2026</a:t>
             </a:r>
           </a:p>
@@ -9634,12 +10942,18 @@
             <a:pPr>
               <a:defRPr sz="2300" b="1">
                 <a:solidFill>
-                  <a:srgbClr val="14342C"/>
-                </a:solidFill>
-                <a:latin typeface="Public Sans"/>
-              </a:defRPr>
-            </a:pPr>
-            <a:r>
+                  <a:srgbClr val="15362F"/>
+                </a:solidFill>
+                <a:latin typeface="Public Sans"/>
+              </a:defRPr>
+            </a:pPr>
+            <a:r>
+              <a:rPr b="1">
+                <a:solidFill>
+                  <a:srgbClr val="15362F"/>
+                </a:solidFill>
+                <a:latin typeface="Public Sans"/>
+              </a:rPr>
               <a:t>Meet the Team</a:t>
             </a:r>
           </a:p>
@@ -9650,12 +10964,18 @@
               </a:spcBef>
               <a:defRPr sz="1100">
                 <a:solidFill>
-                  <a:srgbClr val="60746D"/>
-                </a:solidFill>
-                <a:latin typeface="Public Sans"/>
-              </a:defRPr>
-            </a:pPr>
-            <a:r>
+                  <a:srgbClr val="587068"/>
+                </a:solidFill>
+                <a:latin typeface="Public Sans"/>
+              </a:defRPr>
+            </a:pPr>
+            <a:r>
+              <a:rPr>
+                <a:solidFill>
+                  <a:srgbClr val="587068"/>
+                </a:solidFill>
+                <a:latin typeface="Public Sans"/>
+              </a:rPr>
               <a:t>Kolaborasi multidisiplin Tim Mie Ayam Kopma di ajang Hacking Day INCEPTION 2026.</a:t>
             </a:r>
           </a:p>
@@ -9680,7 +11000,7 @@
           </a:solidFill>
           <a:ln w="12700">
             <a:solidFill>
-              <a:srgbClr val="DAE6E0"/>
+              <a:srgbClr val="D8E4DE"/>
             </a:solidFill>
           </a:ln>
         </p:spPr>
@@ -9702,79 +11022,112 @@
           <a:bodyPr rtlCol="0" anchor="ctr" wrap="square" lIns="182880" rIns="182880" tIns="914400"/>
           <a:lstStyle/>
           <a:p>
-            <a:pPr algn="ctr">
+            <a:pPr algn="l">
+              <a:spcBef>
+                <a:spcPts val="0"/>
+              </a:spcBef>
               <a:defRPr sz="850" b="1">
                 <a:solidFill>
-                  <a:srgbClr val="2A7662"/>
-                </a:solidFill>
-                <a:latin typeface="Public Sans"/>
-              </a:defRPr>
-            </a:pPr>
-            <a:r>
+                  <a:srgbClr val="2B7865"/>
+                </a:solidFill>
+                <a:latin typeface="Public Sans"/>
+              </a:defRPr>
+            </a:pPr>
+            <a:r>
+              <a:rPr sz="850" b="1">
+                <a:solidFill>
+                  <a:srgbClr val="2B7865"/>
+                </a:solidFill>
+                <a:latin typeface="Public Sans"/>
+              </a:rPr>
               <a:t>KONTRIBUSI UTAMA :</a:t>
             </a:r>
           </a:p>
           <a:p>
-            <a:pPr>
+            <a:pPr algn="l">
               <a:spcBef>
                 <a:spcPts val="300"/>
               </a:spcBef>
-              <a:defRPr sz="880">
-                <a:solidFill>
-                  <a:srgbClr val="60746D"/>
-                </a:solidFill>
-                <a:latin typeface="Public Sans"/>
-              </a:defRPr>
-            </a:pPr>
-            <a:r>
+              <a:defRPr sz="880" b="0">
+                <a:solidFill>
+                  <a:srgbClr val="587068"/>
+                </a:solidFill>
+                <a:latin typeface="Public Sans"/>
+              </a:defRPr>
+            </a:pPr>
+            <a:r>
+              <a:rPr sz="880" b="0">
+                <a:solidFill>
+                  <a:srgbClr val="587068"/>
+                </a:solidFill>
+                <a:latin typeface="Public Sans"/>
+              </a:rPr>
               <a:t>• Riset kebutuhan klinis penderita demensia tahap awal &amp; beban kerja perawat.</a:t>
             </a:r>
           </a:p>
           <a:p>
-            <a:pPr>
+            <a:pPr algn="l">
               <a:spcBef>
                 <a:spcPts val="300"/>
               </a:spcBef>
-              <a:defRPr sz="880">
-                <a:solidFill>
-                  <a:srgbClr val="60746D"/>
-                </a:solidFill>
-                <a:latin typeface="Public Sans"/>
-              </a:defRPr>
-            </a:pPr>
-            <a:r>
+              <a:defRPr sz="880" b="0">
+                <a:solidFill>
+                  <a:srgbClr val="587068"/>
+                </a:solidFill>
+                <a:latin typeface="Public Sans"/>
+              </a:defRPr>
+            </a:pPr>
+            <a:r>
+              <a:rPr sz="880" b="0">
+                <a:solidFill>
+                  <a:srgbClr val="587068"/>
+                </a:solidFill>
+                <a:latin typeface="Public Sans"/>
+              </a:rPr>
               <a:t>• Perancangan sistem antarmuka dashboard mobile caregiver &amp; design token.</a:t>
             </a:r>
           </a:p>
           <a:p>
-            <a:pPr>
+            <a:pPr algn="l">
               <a:spcBef>
                 <a:spcPts val="300"/>
               </a:spcBef>
-              <a:defRPr sz="880">
-                <a:solidFill>
-                  <a:srgbClr val="60746D"/>
-                </a:solidFill>
-                <a:latin typeface="Public Sans"/>
-              </a:defRPr>
-            </a:pPr>
-            <a:r>
+              <a:defRPr sz="880" b="0">
+                <a:solidFill>
+                  <a:srgbClr val="587068"/>
+                </a:solidFill>
+                <a:latin typeface="Public Sans"/>
+              </a:defRPr>
+            </a:pPr>
+            <a:r>
+              <a:rPr sz="880" b="0">
+                <a:solidFill>
+                  <a:srgbClr val="587068"/>
+                </a:solidFill>
+                <a:latin typeface="Public Sans"/>
+              </a:rPr>
               <a:t>• Konseptualisasi desain fisik tombol taktil gelang &amp; antarmuka simulator 3D.</a:t>
             </a:r>
           </a:p>
           <a:p>
-            <a:pPr>
+            <a:pPr algn="l">
               <a:spcBef>
                 <a:spcPts val="300"/>
               </a:spcBef>
-              <a:defRPr sz="880">
-                <a:solidFill>
-                  <a:srgbClr val="60746D"/>
-                </a:solidFill>
-                <a:latin typeface="Public Sans"/>
-              </a:defRPr>
-            </a:pPr>
-            <a:r>
+              <a:defRPr sz="880" b="0">
+                <a:solidFill>
+                  <a:srgbClr val="587068"/>
+                </a:solidFill>
+                <a:latin typeface="Public Sans"/>
+              </a:defRPr>
+            </a:pPr>
+            <a:r>
+              <a:rPr sz="880" b="0">
+                <a:solidFill>
+                  <a:srgbClr val="587068"/>
+                </a:solidFill>
+                <a:latin typeface="Public Sans"/>
+              </a:rPr>
               <a:t>• Perancangan alur respon darurat dan identitas visual brand NARAE.</a:t>
             </a:r>
           </a:p>
@@ -9795,11 +11148,11 @@
             <a:avLst/>
           </a:prstGeom>
           <a:solidFill>
-            <a:srgbClr val="E2F1EA"/>
+            <a:srgbClr val="E0EFE8"/>
           </a:solidFill>
           <a:ln w="12700">
             <a:solidFill>
-              <a:srgbClr val="2A7662"/>
+              <a:srgbClr val="2B7865"/>
             </a:solidFill>
           </a:ln>
         </p:spPr>
@@ -9824,12 +11177,18 @@
             <a:pPr algn="ctr">
               <a:defRPr sz="1300" b="1">
                 <a:solidFill>
-                  <a:srgbClr val="14342C"/>
-                </a:solidFill>
-                <a:latin typeface="Public Sans"/>
-              </a:defRPr>
-            </a:pPr>
-            <a:r>
+                  <a:srgbClr val="15362F"/>
+                </a:solidFill>
+                <a:latin typeface="Public Sans"/>
+              </a:defRPr>
+            </a:pPr>
+            <a:r>
+              <a:rPr b="1">
+                <a:solidFill>
+                  <a:srgbClr val="15362F"/>
+                </a:solidFill>
+                <a:latin typeface="Public Sans"/>
+              </a:rPr>
               <a:t>RR</a:t>
             </a:r>
           </a:p>
@@ -9857,31 +11216,46 @@
           </a:bodyPr>
           <a:lstStyle/>
           <a:p>
-            <a:pPr>
+            <a:pPr algn="l">
+              <a:spcBef>
+                <a:spcPts val="0"/>
+              </a:spcBef>
               <a:defRPr sz="1200" b="1">
                 <a:solidFill>
-                  <a:srgbClr val="14342C"/>
-                </a:solidFill>
-                <a:latin typeface="Public Sans"/>
-              </a:defRPr>
-            </a:pPr>
-            <a:r>
+                  <a:srgbClr val="15362F"/>
+                </a:solidFill>
+                <a:latin typeface="Public Sans"/>
+              </a:defRPr>
+            </a:pPr>
+            <a:r>
+              <a:rPr sz="1200" b="1">
+                <a:solidFill>
+                  <a:srgbClr val="15362F"/>
+                </a:solidFill>
+                <a:latin typeface="Public Sans"/>
+              </a:rPr>
               <a:t>Radhitya Rasta Pramoja</a:t>
             </a:r>
           </a:p>
           <a:p>
-            <a:pPr>
+            <a:pPr algn="l">
               <a:spcBef>
                 <a:spcPts val="200"/>
               </a:spcBef>
               <a:defRPr sz="900" b="1">
                 <a:solidFill>
-                  <a:srgbClr val="204A40"/>
-                </a:solidFill>
-                <a:latin typeface="Public Sans"/>
-              </a:defRPr>
-            </a:pPr>
-            <a:r>
+                  <a:srgbClr val="234E44"/>
+                </a:solidFill>
+                <a:latin typeface="Public Sans"/>
+              </a:defRPr>
+            </a:pPr>
+            <a:r>
+              <a:rPr sz="900" b="1">
+                <a:solidFill>
+                  <a:srgbClr val="234E44"/>
+                </a:solidFill>
+                <a:latin typeface="Public Sans"/>
+              </a:rPr>
               <a:t>UI / UX Designer &amp; Product Strategy</a:t>
             </a:r>
           </a:p>
@@ -9906,7 +11280,7 @@
           </a:solidFill>
           <a:ln w="12700">
             <a:solidFill>
-              <a:srgbClr val="DAE6E0"/>
+              <a:srgbClr val="D8E4DE"/>
             </a:solidFill>
           </a:ln>
         </p:spPr>
@@ -9928,79 +11302,112 @@
           <a:bodyPr rtlCol="0" anchor="ctr" wrap="square" lIns="182880" rIns="182880" tIns="914400"/>
           <a:lstStyle/>
           <a:p>
-            <a:pPr algn="ctr">
+            <a:pPr algn="l">
+              <a:spcBef>
+                <a:spcPts val="0"/>
+              </a:spcBef>
               <a:defRPr sz="850" b="1">
                 <a:solidFill>
-                  <a:srgbClr val="2A7662"/>
-                </a:solidFill>
-                <a:latin typeface="Public Sans"/>
-              </a:defRPr>
-            </a:pPr>
-            <a:r>
+                  <a:srgbClr val="2B7865"/>
+                </a:solidFill>
+                <a:latin typeface="Public Sans"/>
+              </a:defRPr>
+            </a:pPr>
+            <a:r>
+              <a:rPr sz="850" b="1">
+                <a:solidFill>
+                  <a:srgbClr val="2B7865"/>
+                </a:solidFill>
+                <a:latin typeface="Public Sans"/>
+              </a:rPr>
               <a:t>KONTRIBUSI UTAMA :</a:t>
             </a:r>
           </a:p>
           <a:p>
-            <a:pPr>
+            <a:pPr algn="l">
               <a:spcBef>
                 <a:spcPts val="300"/>
               </a:spcBef>
-              <a:defRPr sz="880">
-                <a:solidFill>
-                  <a:srgbClr val="60746D"/>
-                </a:solidFill>
-                <a:latin typeface="Public Sans"/>
-              </a:defRPr>
-            </a:pPr>
-            <a:r>
+              <a:defRPr sz="880" b="0">
+                <a:solidFill>
+                  <a:srgbClr val="587068"/>
+                </a:solidFill>
+                <a:latin typeface="Public Sans"/>
+              </a:defRPr>
+            </a:pPr>
+            <a:r>
+              <a:rPr sz="880" b="0">
+                <a:solidFill>
+                  <a:srgbClr val="587068"/>
+                </a:solidFill>
+                <a:latin typeface="Public Sans"/>
+              </a:rPr>
               <a:t>• Pengembangan antarmuka web responsif React 18, TypeScript, &amp; Tailwind CSS v4.</a:t>
             </a:r>
           </a:p>
           <a:p>
-            <a:pPr>
+            <a:pPr algn="l">
               <a:spcBef>
                 <a:spcPts val="300"/>
               </a:spcBef>
-              <a:defRPr sz="880">
-                <a:solidFill>
-                  <a:srgbClr val="60746D"/>
-                </a:solidFill>
-                <a:latin typeface="Public Sans"/>
-              </a:defRPr>
-            </a:pPr>
-            <a:r>
+              <a:defRPr sz="880" b="0">
+                <a:solidFill>
+                  <a:srgbClr val="587068"/>
+                </a:solidFill>
+                <a:latin typeface="Public Sans"/>
+              </a:defRPr>
+            </a:pPr>
+            <a:r>
+              <a:rPr sz="880" b="0">
+                <a:solidFill>
+                  <a:srgbClr val="587068"/>
+                </a:solidFill>
+                <a:latin typeface="Public Sans"/>
+              </a:rPr>
               <a:t>• Implementasi simulator gelang 3D prosedural menggunakan Three.js &amp; OrbitControls.</a:t>
             </a:r>
           </a:p>
           <a:p>
-            <a:pPr>
+            <a:pPr algn="l">
               <a:spcBef>
                 <a:spcPts val="300"/>
               </a:spcBef>
-              <a:defRPr sz="880">
-                <a:solidFill>
-                  <a:srgbClr val="60746D"/>
-                </a:solidFill>
-                <a:latin typeface="Public Sans"/>
-              </a:defRPr>
-            </a:pPr>
-            <a:r>
+              <a:defRPr sz="880" b="0">
+                <a:solidFill>
+                  <a:srgbClr val="587068"/>
+                </a:solidFill>
+                <a:latin typeface="Public Sans"/>
+              </a:defRPr>
+            </a:pPr>
+            <a:r>
+              <a:rPr sz="880" b="0">
+                <a:solidFill>
+                  <a:srgbClr val="587068"/>
+                </a:solidFill>
+                <a:latin typeface="Public Sans"/>
+              </a:rPr>
               <a:t>• Integrasi Web Speech API (Speech-to-Text &amp; Text-to-Speech id-ID) pada gelang.</a:t>
             </a:r>
           </a:p>
           <a:p>
-            <a:pPr>
+            <a:pPr algn="l">
               <a:spcBef>
                 <a:spcPts val="300"/>
               </a:spcBef>
-              <a:defRPr sz="880">
-                <a:solidFill>
-                  <a:srgbClr val="60746D"/>
-                </a:solidFill>
-                <a:latin typeface="Public Sans"/>
-              </a:defRPr>
-            </a:pPr>
-            <a:r>
+              <a:defRPr sz="880" b="0">
+                <a:solidFill>
+                  <a:srgbClr val="587068"/>
+                </a:solidFill>
+                <a:latin typeface="Public Sans"/>
+              </a:defRPr>
+            </a:pPr>
+            <a:r>
+              <a:rPr sz="880" b="0">
+                <a:solidFill>
+                  <a:srgbClr val="587068"/>
+                </a:solidFill>
+                <a:latin typeface="Public Sans"/>
+              </a:rPr>
               <a:t>• Implementasi layout split-screen terpadu dan switcher multi-pasien real-time.</a:t>
             </a:r>
           </a:p>
@@ -10021,11 +11428,11 @@
             <a:avLst/>
           </a:prstGeom>
           <a:solidFill>
-            <a:srgbClr val="E2F1EA"/>
+            <a:srgbClr val="E0EFE8"/>
           </a:solidFill>
           <a:ln w="12700">
             <a:solidFill>
-              <a:srgbClr val="2A7662"/>
+              <a:srgbClr val="2B7865"/>
             </a:solidFill>
           </a:ln>
         </p:spPr>
@@ -10050,12 +11457,18 @@
             <a:pPr algn="ctr">
               <a:defRPr sz="1300" b="1">
                 <a:solidFill>
-                  <a:srgbClr val="14342C"/>
-                </a:solidFill>
-                <a:latin typeface="Public Sans"/>
-              </a:defRPr>
-            </a:pPr>
-            <a:r>
+                  <a:srgbClr val="15362F"/>
+                </a:solidFill>
+                <a:latin typeface="Public Sans"/>
+              </a:defRPr>
+            </a:pPr>
+            <a:r>
+              <a:rPr b="1">
+                <a:solidFill>
+                  <a:srgbClr val="15362F"/>
+                </a:solidFill>
+                <a:latin typeface="Public Sans"/>
+              </a:rPr>
               <a:t>NN</a:t>
             </a:r>
           </a:p>
@@ -10083,31 +11496,46 @@
           </a:bodyPr>
           <a:lstStyle/>
           <a:p>
-            <a:pPr>
+            <a:pPr algn="l">
+              <a:spcBef>
+                <a:spcPts val="0"/>
+              </a:spcBef>
               <a:defRPr sz="1200" b="1">
                 <a:solidFill>
-                  <a:srgbClr val="14342C"/>
-                </a:solidFill>
-                <a:latin typeface="Public Sans"/>
-              </a:defRPr>
-            </a:pPr>
-            <a:r>
+                  <a:srgbClr val="15362F"/>
+                </a:solidFill>
+                <a:latin typeface="Public Sans"/>
+              </a:defRPr>
+            </a:pPr>
+            <a:r>
+              <a:rPr sz="1200" b="1">
+                <a:solidFill>
+                  <a:srgbClr val="15362F"/>
+                </a:solidFill>
+                <a:latin typeface="Public Sans"/>
+              </a:rPr>
               <a:t>Nicolaus Narindra</a:t>
             </a:r>
           </a:p>
           <a:p>
-            <a:pPr>
+            <a:pPr algn="l">
               <a:spcBef>
                 <a:spcPts val="200"/>
               </a:spcBef>
               <a:defRPr sz="900" b="1">
                 <a:solidFill>
-                  <a:srgbClr val="204A40"/>
-                </a:solidFill>
-                <a:latin typeface="Public Sans"/>
-              </a:defRPr>
-            </a:pPr>
-            <a:r>
+                  <a:srgbClr val="234E44"/>
+                </a:solidFill>
+                <a:latin typeface="Public Sans"/>
+              </a:defRPr>
+            </a:pPr>
+            <a:r>
+              <a:rPr sz="900" b="1">
+                <a:solidFill>
+                  <a:srgbClr val="234E44"/>
+                </a:solidFill>
+                <a:latin typeface="Public Sans"/>
+              </a:rPr>
               <a:t>Front-End &amp; 3D Interactive Engineer</a:t>
             </a:r>
           </a:p>
@@ -10132,7 +11560,7 @@
           </a:solidFill>
           <a:ln w="12700">
             <a:solidFill>
-              <a:srgbClr val="DAE6E0"/>
+              <a:srgbClr val="D8E4DE"/>
             </a:solidFill>
           </a:ln>
         </p:spPr>
@@ -10154,79 +11582,112 @@
           <a:bodyPr rtlCol="0" anchor="ctr" wrap="square" lIns="182880" rIns="182880" tIns="914400"/>
           <a:lstStyle/>
           <a:p>
-            <a:pPr algn="ctr">
+            <a:pPr algn="l">
+              <a:spcBef>
+                <a:spcPts val="0"/>
+              </a:spcBef>
               <a:defRPr sz="850" b="1">
                 <a:solidFill>
-                  <a:srgbClr val="2A7662"/>
-                </a:solidFill>
-                <a:latin typeface="Public Sans"/>
-              </a:defRPr>
-            </a:pPr>
-            <a:r>
+                  <a:srgbClr val="2B7865"/>
+                </a:solidFill>
+                <a:latin typeface="Public Sans"/>
+              </a:defRPr>
+            </a:pPr>
+            <a:r>
+              <a:rPr sz="850" b="1">
+                <a:solidFill>
+                  <a:srgbClr val="2B7865"/>
+                </a:solidFill>
+                <a:latin typeface="Public Sans"/>
+              </a:rPr>
               <a:t>KONTRIBUSI UTAMA :</a:t>
             </a:r>
           </a:p>
           <a:p>
-            <a:pPr>
+            <a:pPr algn="l">
               <a:spcBef>
                 <a:spcPts val="300"/>
               </a:spcBef>
-              <a:defRPr sz="880">
-                <a:solidFill>
-                  <a:srgbClr val="60746D"/>
-                </a:solidFill>
-                <a:latin typeface="Public Sans"/>
-              </a:defRPr>
-            </a:pPr>
-            <a:r>
+              <a:defRPr sz="880" b="0">
+                <a:solidFill>
+                  <a:srgbClr val="587068"/>
+                </a:solidFill>
+                <a:latin typeface="Public Sans"/>
+              </a:defRPr>
+            </a:pPr>
+            <a:r>
+              <a:rPr sz="880" b="0">
+                <a:solidFill>
+                  <a:srgbClr val="587068"/>
+                </a:solidFill>
+                <a:latin typeface="Public Sans"/>
+              </a:rPr>
               <a:t>• Perancangan backend RESTful API berlapis dengan Node.js Express 4 &amp; TypeScript 5.</a:t>
             </a:r>
           </a:p>
           <a:p>
-            <a:pPr>
+            <a:pPr algn="l">
               <a:spcBef>
                 <a:spcPts val="300"/>
               </a:spcBef>
-              <a:defRPr sz="880">
-                <a:solidFill>
-                  <a:srgbClr val="60746D"/>
-                </a:solidFill>
-                <a:latin typeface="Public Sans"/>
-              </a:defRPr>
-            </a:pPr>
-            <a:r>
+              <a:defRPr sz="880" b="0">
+                <a:solidFill>
+                  <a:srgbClr val="587068"/>
+                </a:solidFill>
+                <a:latin typeface="Public Sans"/>
+              </a:defRPr>
+            </a:pPr>
+            <a:r>
+              <a:rPr sz="880" b="0">
+                <a:solidFill>
+                  <a:srgbClr val="587068"/>
+                </a:solidFill>
+                <a:latin typeface="Public Sans"/>
+              </a:rPr>
               <a:t>• Integrasi AI Agent Google Gemini (@google/genai) dengan Function Calling 6 tools.</a:t>
             </a:r>
           </a:p>
           <a:p>
-            <a:pPr>
+            <a:pPr algn="l">
               <a:spcBef>
                 <a:spcPts val="300"/>
               </a:spcBef>
-              <a:defRPr sz="880">
-                <a:solidFill>
-                  <a:srgbClr val="60746D"/>
-                </a:solidFill>
-                <a:latin typeface="Public Sans"/>
-              </a:defRPr>
-            </a:pPr>
-            <a:r>
+              <a:defRPr sz="880" b="0">
+                <a:solidFill>
+                  <a:srgbClr val="587068"/>
+                </a:solidFill>
+                <a:latin typeface="Public Sans"/>
+              </a:defRPr>
+            </a:pPr>
+            <a:r>
+              <a:rPr sz="880" b="0">
+                <a:solidFill>
+                  <a:srgbClr val="587068"/>
+                </a:solidFill>
+                <a:latin typeface="Public Sans"/>
+              </a:rPr>
               <a:t>• Perancangan skema database PostgreSQL 16 &amp; penanganan zona waktu WIB konsisten.</a:t>
             </a:r>
           </a:p>
           <a:p>
-            <a:pPr>
+            <a:pPr algn="l">
               <a:spcBef>
                 <a:spcPts val="300"/>
               </a:spcBef>
-              <a:defRPr sz="880">
-                <a:solidFill>
-                  <a:srgbClr val="60746D"/>
-                </a:solidFill>
-                <a:latin typeface="Public Sans"/>
-              </a:defRPr>
-            </a:pPr>
-            <a:r>
+              <a:defRPr sz="880" b="0">
+                <a:solidFill>
+                  <a:srgbClr val="587068"/>
+                </a:solidFill>
+                <a:latin typeface="Public Sans"/>
+              </a:defRPr>
+            </a:pPr>
+            <a:r>
+              <a:rPr sz="880" b="0">
+                <a:solidFill>
+                  <a:srgbClr val="587068"/>
+                </a:solidFill>
+                <a:latin typeface="Public Sans"/>
+              </a:rPr>
               <a:t>• Implementasi SLA auto-escalation darurat 10 detik &amp; penandaan status otomatis.</a:t>
             </a:r>
           </a:p>
@@ -10247,11 +11708,11 @@
             <a:avLst/>
           </a:prstGeom>
           <a:solidFill>
-            <a:srgbClr val="E2F1EA"/>
+            <a:srgbClr val="E0EFE8"/>
           </a:solidFill>
           <a:ln w="12700">
             <a:solidFill>
-              <a:srgbClr val="2A7662"/>
+              <a:srgbClr val="2B7865"/>
             </a:solidFill>
           </a:ln>
         </p:spPr>
@@ -10276,12 +11737,18 @@
             <a:pPr algn="ctr">
               <a:defRPr sz="1300" b="1">
                 <a:solidFill>
-                  <a:srgbClr val="14342C"/>
-                </a:solidFill>
-                <a:latin typeface="Public Sans"/>
-              </a:defRPr>
-            </a:pPr>
-            <a:r>
+                  <a:srgbClr val="15362F"/>
+                </a:solidFill>
+                <a:latin typeface="Public Sans"/>
+              </a:defRPr>
+            </a:pPr>
+            <a:r>
+              <a:rPr b="1">
+                <a:solidFill>
+                  <a:srgbClr val="15362F"/>
+                </a:solidFill>
+                <a:latin typeface="Public Sans"/>
+              </a:rPr>
               <a:t>MB</a:t>
             </a:r>
           </a:p>
@@ -10309,31 +11776,46 @@
           </a:bodyPr>
           <a:lstStyle/>
           <a:p>
-            <a:pPr>
+            <a:pPr algn="l">
+              <a:spcBef>
+                <a:spcPts val="0"/>
+              </a:spcBef>
               <a:defRPr sz="1200" b="1">
                 <a:solidFill>
-                  <a:srgbClr val="14342C"/>
-                </a:solidFill>
-                <a:latin typeface="Public Sans"/>
-              </a:defRPr>
-            </a:pPr>
-            <a:r>
+                  <a:srgbClr val="15362F"/>
+                </a:solidFill>
+                <a:latin typeface="Public Sans"/>
+              </a:defRPr>
+            </a:pPr>
+            <a:r>
+              <a:rPr sz="1200" b="1">
+                <a:solidFill>
+                  <a:srgbClr val="15362F"/>
+                </a:solidFill>
+                <a:latin typeface="Public Sans"/>
+              </a:rPr>
               <a:t>Michael Bintang Febryan S.J</a:t>
             </a:r>
           </a:p>
           <a:p>
-            <a:pPr>
+            <a:pPr algn="l">
               <a:spcBef>
                 <a:spcPts val="200"/>
               </a:spcBef>
               <a:defRPr sz="900" b="1">
                 <a:solidFill>
-                  <a:srgbClr val="204A40"/>
-                </a:solidFill>
-                <a:latin typeface="Public Sans"/>
-              </a:defRPr>
-            </a:pPr>
-            <a:r>
+                  <a:srgbClr val="234E44"/>
+                </a:solidFill>
+                <a:latin typeface="Public Sans"/>
+              </a:defRPr>
+            </a:pPr>
+            <a:r>
+              <a:rPr sz="900" b="1">
+                <a:solidFill>
+                  <a:srgbClr val="234E44"/>
+                </a:solidFill>
+                <a:latin typeface="Public Sans"/>
+              </a:rPr>
               <a:t>Back-End &amp; AI Systems Engineer</a:t>
             </a:r>
           </a:p>
@@ -10354,7 +11836,7 @@
             <a:avLst/>
           </a:prstGeom>
           <a:solidFill>
-            <a:srgbClr val="14342C"/>
+            <a:srgbClr val="15362F"/>
           </a:solidFill>
           <a:ln>
             <a:noFill/>
@@ -10378,7 +11860,10 @@
           <a:bodyPr rtlCol="0" anchor="ctr" wrap="square" lIns="320040" tIns="128016"/>
           <a:lstStyle/>
           <a:p>
-            <a:pPr algn="ctr">
+            <a:pPr algn="l">
+              <a:spcBef>
+                <a:spcPts val="0"/>
+              </a:spcBef>
               <a:defRPr sz="1300" b="1">
                 <a:solidFill>
                   <a:srgbClr val="FFFFFF"/>
@@ -10387,11 +11872,17 @@
               </a:defRPr>
             </a:pPr>
             <a:r>
+              <a:rPr sz="1300" b="1">
+                <a:solidFill>
+                  <a:srgbClr val="FFFFFF"/>
+                </a:solidFill>
+                <a:latin typeface="Public Sans"/>
+              </a:rPr>
               <a:t>“Together, let’s make independence possible, one little help at a time.”</a:t>
             </a:r>
           </a:p>
           <a:p>
-            <a:pPr>
+            <a:pPr algn="l">
               <a:spcBef>
                 <a:spcPts val="300"/>
               </a:spcBef>
@@ -10403,6 +11894,12 @@
               </a:defRPr>
             </a:pPr>
             <a:r>
+              <a:rPr sz="950" b="1">
+                <a:solidFill>
+                  <a:srgbClr val="B4DCD2"/>
+                </a:solidFill>
+                <a:latin typeface="Public Sans"/>
+              </a:rPr>
               <a:t>NARAE · INCEPTION 2026 · HACKING DAY 24 JAM · TIM MI AYAM KOPMA</a:t>
             </a:r>
           </a:p>
